--- a/slides/decks/s23-mds-mds-mpn.pptx
+++ b/slides/decks/s23-mds-mds-mpn.pptx
@@ -137,13 +137,13 @@
   <p:extLst>
     <p:ext uri="{521415D9-36F7-43E2-AB2F-B90AF26B5E84}">
       <p14:sectionLst xmlns:p14="http://schemas.microsoft.com/office/powerpoint/2010/main">
-        <p14:section name="Opening" id="{1141ec4e-c273-ed20-62e5-c14a69b6292a}">
+        <p14:section name="Opening" id="{e222ae17-1f33-10fe-f400-8be49274ab2a}">
           <p14:sldIdLst>
             <p14:sldId id="256"/>
             <p14:sldId id="257"/>
           </p14:sldIdLst>
         </p14:section>
-        <p14:section name="MDS" id="{284a4b2c-d3bc-f97d-4e64-37760e949966}">
+        <p14:section name="MDS" id="{1eafdcb1-3ae7-b36a-ae84-c1feaf8d3875}">
           <p14:sldIdLst>
             <p14:sldId id="258"/>
             <p14:sldId id="259"/>
@@ -155,7 +155,7 @@
             <p14:sldId id="265"/>
           </p14:sldIdLst>
         </p14:section>
-        <p14:section name="MDS/MPN" id="{a806de16-ceb1-21a1-6b64-326d0663dbb6}">
+        <p14:section name="MDS/MPN" id="{98179112-ea0c-e4c9-a01c-eec77176e800}">
           <p14:sldIdLst>
             <p14:sldId id="266"/>
             <p14:sldId id="267"/>
@@ -165,7 +165,7 @@
             <p14:sldId id="271"/>
           </p14:sldIdLst>
         </p14:section>
-        <p14:section name="Board questions" id="{603ed432-101e-8f19-b654-c99a9b66ec7f}">
+        <p14:section name="Board questions" id="{207b5c63-46df-6170-5811-3bfa1147b298}">
           <p14:sldIdLst>
             <p14:sldId id="272"/>
             <p14:sldId id="273"/>
@@ -175,7 +175,7 @@
             <p14:sldId id="277"/>
           </p14:sldIdLst>
         </p14:section>
-        <p14:section name="References" id="{7e746de1-8865-3725-5d51-8995cc7580b5}">
+        <p14:section name="References" id="{4dd898bf-578e-cbe1-b0f4-59b1db347281}">
           <p14:sldIdLst>
             <p14:sldId id="278"/>
             <p14:sldId id="279"/>
@@ -185,7 +185,7 @@
             <p14:sldId id="283"/>
           </p14:sldIdLst>
         </p14:section>
-        <p14:section name="Backup" id="{1735776c-0b74-e17f-df8f-9db1bc172272}">
+        <p14:section name="Backup" id="{c92678fc-e258-dc46-a0fd-1d7ecdce2480}">
           <p14:sldIdLst>
             <p14:sldId id="284"/>
             <p14:sldId id="285"/>
@@ -740,6 +740,17 @@
               <a:t>預防方面，biallelic TP53 或 complex karyotype 這類高風險病人，可以依風險或 MRD 做 pre-emptive azacitidine 或 DLI。Meta-analysis 顯示預防性 HMA 有存活好處，但唯一的 phase 3 是陰性，所以 maintenance 目前不是標準。</a:t>
             </a:r>
           </a:p>
+          <a:p>
+            <a:pPr>
+              <a:spcAft>
+                <a:spcPts val="600"/>
+              </a:spcAft>
+            </a:pPr>
+            <a:r>
+              <a:rPr lang="en-US" dirty="0"/>
+              <a:t>未來的方向包括 oral azacitidine，以及 venetoclax、enasidenib、eprenetapopt 這些標靶藥物，單用或合併，trial 都還在進行。病房上，移植後持續追蹤 MRD，越早發現 molecular relapse，可用的選擇越多。</a:t>
+            </a:r>
+          </a:p>
         </p:txBody>
       </p:sp>
       <p:sp>
@@ -876,6 +887,17 @@
               <a:t>SF3B1-T 是貧血加上血小板至少 450，有 SF3B1 突變，沒有的話要 ring sideroblast 至少 15%。不符合以上三種的歸入 NOS。考題常給一張 CBC 和骨髓報告，先要你分類，再判斷要不要移植，所以這幾個切點值得背熟。</a:t>
             </a:r>
           </a:p>
+          <a:p>
+            <a:pPr>
+              <a:spcAft>
+                <a:spcPts val="600"/>
+              </a:spcAft>
+            </a:pPr>
+            <a:r>
+              <a:rPr lang="en-US" dirty="0"/>
+              <a:t>還有兩個細節。Dysplasia 的定義是某個 lineage 至少 10% 的細胞有形態異常；blast 的計算包括 myeloblast、monoblast 和 promonocyte。周邊 monocyte subset 分布異常是新加入的 supporting criterion。其他三種 overlap 因為太少見，發生率都還不清楚。</a:t>
+            </a:r>
+          </a:p>
         </p:txBody>
       </p:sp>
       <p:sp>
@@ -1001,6 +1023,17 @@
               <a:t>CMML 的 karyotype 分類和 IPSS-R 不同，normal 和 isolated -Y 是 low，trisomy 8、complex 和 chromosome 7 異常是 high，其餘都是 intermediate。考題通常給完整數據，要你自己算 CPSS。</a:t>
             </a:r>
           </a:p>
+          <a:p>
+            <a:pPr>
+              <a:spcAft>
+                <a:spcPts val="600"/>
+              </a:spcAft>
+            </a:pPr>
+            <a:r>
+              <a:rPr lang="en-US" dirty="0"/>
+              <a:t>實務上 CPSS-Mol 需要 NGS 的結果，報告出來之前，可以先用 CPSS 決定要不要找 donor。WBC 13 這個切點同時是 MD-CMML 和 MP-CMML 的分界，可以一起記。兩個模型同一組別的 median OS 不一樣，例如 high risk 一個是 5 個月、一個是 18 個月，背的時候不要混用。</a:t>
+            </a:r>
+          </a:p>
         </p:txBody>
       </p:sp>
       <p:sp>
@@ -1126,6 +1159,17 @@
               <a:t>SF3B1-T 用 Mayo 的模型，異常 karyotype 給 2 分，貧血、ASXL1、SETBP1 各 1 分，high risk 只剩 11 個月。NOS 沒有專屬分數，四個系列的 median OS 在 12.4 到 33 個月之間。</a:t>
             </a:r>
           </a:p>
+          <a:p>
+            <a:pPr>
+              <a:spcAft>
+                <a:spcPts val="600"/>
+              </a:spcAft>
+            </a:pPr>
+            <a:r>
+              <a:rPr lang="en-US" dirty="0"/>
+              <a:t>MDS/MPN with neutrophilia 的分數只用年紀、Hb 和白血球三個臨床變數，不需要分子資料。SF3B1-T 的突變分布也可以知道一下，SF3B1 大約 85%，JAK2 V617F 大約 50%，TET2 約 25%，ASXL1 約 20%。</a:t>
+            </a:r>
+          </a:p>
         </p:txBody>
       </p:sp>
       <p:sp>
@@ -1251,6 +1295,17 @@
               <a:t>反白的是例外。SF3B1-T 是 overlap 裡預後最好的，median survival 大約 6 年，治療比照 lower-risk MDS 和 MPN。只有 refractory cytopenia、高風險遺傳變化、進展或轉化時才移植。這些建議幾乎都來自回溯性資料，沒有 prospective trial，所以病人的選擇格外重要。</a:t>
             </a:r>
           </a:p>
+          <a:p>
+            <a:pPr>
+              <a:spcAft>
+                <a:spcPts val="600"/>
+              </a:spcAft>
+            </a:pPr>
+            <a:r>
+              <a:rPr lang="en-US" dirty="0"/>
+              <a:t>MDS/MPN with neutrophilia 在 65 歲以下非常少見，移植資料只有小型系列。EBMT 42 位移植病人的 5 年 OS 是 51%、RFS 36%，復發率 40%，年輕、EBMT risk score 低的人結果較好。75 歲這個上限出自 key point，前提是沒有重大 comorbidity。</a:t>
+            </a:r>
+          </a:p>
         </p:txBody>
       </p:sp>
       <p:sp>
@@ -1376,6 +1431,17 @@
               <a:t>MDS/MPN with neutrophilia 用 HU 或 interferon-α 控制白血球，blast 高或轉成 AML 時用 induction。最常見的突變是 ASXL1、SETBP1、ETNK1，JAK2 很少。SF3B1-T 的血栓風險高，常需要 antiplatelet 和 cytoreduction。任何一型轉成 AML，都用 induction 當移植的 bridge。</a:t>
             </a:r>
           </a:p>
+          <a:p>
+            <a:pPr>
+              <a:spcAft>
+                <a:spcPts val="600"/>
+              </a:spcAft>
+            </a:pPr>
+            <a:r>
+              <a:rPr lang="en-US" dirty="0"/>
+              <a:t>新的組合還在試驗階段，包括 HMA 加 lenalidomide 或 venetoclax，以及 JAK2、MEK1/2、IDH1/2 inhibitor。Azacitidine 加 ruxolitinib 的 phase II 在 35 位 MDS/MPN 病人的反應率是 57%，但其中 4 位 atypical CML 的 median survival 只有 8 個月。MDS/MPN-NOS 也可以考慮 JAK inhibitor，單用或合併 HMA。</a:t>
+            </a:r>
+          </a:p>
         </p:txBody>
       </p:sp>
       <p:sp>
@@ -1501,6 +1567,17 @@
               <a:t>復發是 MDS/MPN 移植失敗的主因。有 chronic GVHD 的 CMML 病人復發較少，間接證明有 graft-versus-CMML 效應，低腫瘤負擔時 DLI 也有效。移植後 HMA 加不加 DLI，目前還在研究。</a:t>
             </a:r>
           </a:p>
+          <a:p>
+            <a:pPr>
+              <a:spcAft>
+                <a:spcPts val="600"/>
+              </a:spcAft>
+            </a:pPr>
+            <a:r>
+              <a:rPr lang="en-US" dirty="0"/>
+              <a:t>MDS/MPN with neutrophilia 最大的系列裡 76% 用 MAC，conditioning 強度同樣不影響結果。另有一份報告指出，advanced CMML 用 6 到 8 Gy 分次 TBI 加 FLU 結果較好，但只是單一報告。MAC 的切點是 60 歲和 HCT-CI 小於 3，和 MDS 依 fitness 選的原則一致，只是第 76 章給了具體數字。</a:t>
+            </a:r>
+          </a:p>
         </p:txBody>
       </p:sp>
       <p:sp>
@@ -1622,6 +1699,17 @@
               </a:spcAft>
             </a:pPr>
             <a:r>
+              <a:rPr lang="en-US" dirty="0"/>
+              <a:t>他目前沒有 blast 增加，karyotype 也正常，所以題目只留下一個線索可以用。</a:t>
+            </a:r>
+          </a:p>
+          <a:p>
+            <a:pPr>
+              <a:spcAft>
+                <a:spcPts val="600"/>
+              </a:spcAft>
+            </a:pPr>
+            <a:r>
               <a:rPr lang="en-US" b="1" dirty="0"/>
               <a:t>[Pause for answers.]</a:t>
             </a:r>
@@ -1751,6 +1839,17 @@
               <a:t>這類題目的設計，就是把 IPSS-R low 這個標籤放在前面，引導大家選等待。真正決定答案的是後面的輸血量和時間。</a:t>
             </a:r>
           </a:p>
+          <a:p>
+            <a:pPr>
+              <a:spcAft>
+                <a:spcPts val="600"/>
+              </a:spcAft>
+            </a:pPr>
+            <a:r>
+              <a:rPr lang="en-US" dirty="0"/>
+              <a:t>臨床上還要確認 sibling 的年紀和健康狀況，因為書上偏好年輕 donor。</a:t>
+            </a:r>
+          </a:p>
         </p:txBody>
       </p:sp>
       <p:sp>
@@ -1872,6 +1971,17 @@
               </a:spcAft>
             </a:pPr>
             <a:r>
+              <a:rPr lang="en-US" dirty="0"/>
+              <a:t>注意白血球和 monocyte 兩個數字都會用到。CPSS 有四個變數，karyotype 要先套 CMML-specific 的分類，再對應四個 risk group。</a:t>
+            </a:r>
+          </a:p>
+          <a:p>
+            <a:pPr>
+              <a:spcAft>
+                <a:spcPts val="600"/>
+              </a:spcAft>
+            </a:pPr>
+            <a:r>
               <a:rPr lang="en-US" b="1" dirty="0"/>
               <a:t>[Pause for answers.]</a:t>
             </a:r>
@@ -2001,6 +2111,17 @@
               <a:t>最後三題 board-style 題目，前兩題考算分和適應症，第三題考 higher-risk MDS 合併 blast 偏高時的處理順序。</a:t>
             </a:r>
           </a:p>
+          <a:p>
+            <a:pPr>
+              <a:spcAft>
+                <a:spcPts val="600"/>
+              </a:spcAft>
+            </a:pPr>
+            <a:r>
+              <a:rPr lang="en-US" dirty="0"/>
+              <a:t>MDS 和 MDS/MPN 的思路相同，先用疾病本身的風險分數決定該不該移植，再用病人的 fitness、comorbidity 和 donor 決定怎麼移植、什麼時候移植。</a:t>
+            </a:r>
+          </a:p>
         </p:txBody>
       </p:sp>
       <p:sp>
@@ -2126,6 +2247,17 @@
               <a:t>她是 CMML-2，移植前可以討論先用 HMA。白血球 18 也代表 MP-CMML，增生明顯，如果 fit，conditioning 上比較傾向 MAC。</a:t>
             </a:r>
           </a:p>
+          <a:p>
+            <a:pPr>
+              <a:spcAft>
+                <a:spcPts val="600"/>
+              </a:spcAft>
+            </a:pPr>
+            <a:r>
+              <a:rPr lang="en-US" dirty="0"/>
+              <a:t>另外，monocyte 4.0 遠超過 1.0，所以這個診斷不需要額外的 clonal 證據。</a:t>
+            </a:r>
+          </a:p>
         </p:txBody>
       </p:sp>
       <p:sp>
@@ -2247,6 +2379,17 @@
               </a:spcAft>
             </a:pPr>
             <a:r>
+              <a:rPr lang="en-US" dirty="0"/>
+              <a:t>請同時考慮 blast 比例、年紀，以及 conditioning 強度的證據，前面兩張流程圖和 conditioning trial 那張表都用得到。</a:t>
+            </a:r>
+          </a:p>
+          <a:p>
+            <a:pPr>
+              <a:spcAft>
+                <a:spcPts val="600"/>
+              </a:spcAft>
+            </a:pPr>
+            <a:r>
               <a:rPr lang="en-US" b="1" dirty="0"/>
               <a:t>[Pause for answers.]</a:t>
             </a:r>
@@ -2376,6 +2519,17 @@
               <a:t>Autologous HCT 不是 MDS 的選項。另外她的 donor 才 25 歲，正符合書上偏好年輕 donor 的建議。</a:t>
             </a:r>
           </a:p>
+          <a:p>
+            <a:pPr>
+              <a:spcAft>
+                <a:spcPts val="600"/>
+              </a:spcAft>
+            </a:pPr>
+            <a:r>
+              <a:rPr lang="en-US" dirty="0"/>
+              <a:t>移植後她屬於高復發風險，可以依 MRD 考慮 pre-emptive azacitidine 或 DLI。</a:t>
+            </a:r>
+          </a:p>
         </p:txBody>
       </p:sp>
       <p:sp>
@@ -3117,6 +3271,17 @@
               <a:t>Cytopenia 的定義在底下。Hb 小於 8 算 severe anemia，給 1.5 分；Hb 8 到 10 或血小板小於 50 算 moderate，1 分；血小板小於 100 或 ANC 小於 0.8 算 mild，0.5 分。</a:t>
             </a:r>
           </a:p>
+          <a:p>
+            <a:pPr>
+              <a:spcAft>
+                <a:spcPts val="600"/>
+              </a:spcAft>
+            </a:pPr>
+            <a:r>
+              <a:rPr lang="en-US" dirty="0"/>
+              <a:t>舉個例子，blast 6% 是 2 分，normal karyotype 是 1 分，Hb 9 屬於 moderate，1 分，總共 4 分，下一張會看到這落在 intermediate。WPSS 則是另一套把輸血依賴納入的系統，書上只提到它的存在。</a:t>
+            </a:r>
+          </a:p>
         </p:txBody>
       </p:sp>
       <p:sp>
@@ -3418,6 +3583,17 @@
               <a:t>分子資料方面，WHO 和 ICC 2022 都把 SF3B1 突變和 biallelic TP53 列為獨立 entity，10 到 19% blast 的病例改稱 MDS/AML。SF3B1 突變預期存活超過 10 年，TP53 則多見於 HR-MDS。IPSS-M 加入突變資料，但在移植決策上的角色還在驗證中。</a:t>
             </a:r>
           </a:p>
+          <a:p>
+            <a:pPr>
+              <a:spcAft>
+                <a:spcPts val="600"/>
+              </a:spcAft>
+            </a:pPr>
+            <a:r>
+              <a:rPr lang="en-US" dirty="0"/>
+              <a:t>移植量也在增加。EBMT registry 的 MDS 移植從 2006 年的 946 例增加到 2019 年的 2591 例，unrelated donor 的比例從 34% 增加到 43%。增加的部分主要來自老年病人和 alternative donor。</a:t>
+            </a:r>
+          </a:p>
         </p:txBody>
       </p:sp>
       <p:sp>
@@ -3543,6 +3719,17 @@
               <a:t>2017 年的 international expert panel 和 2023 年 ASTCT 的建議把兩邊合起來，HR-MDS 要移植，LR-MDS 出現這些 poor-risk features 或治療失敗也要移植。</a:t>
             </a:r>
           </a:p>
+          <a:p>
+            <a:pPr>
+              <a:spcAft>
+                <a:spcPts val="600"/>
+              </a:spcAft>
+            </a:pPr>
+            <a:r>
+              <a:rPr lang="en-US" dirty="0"/>
+              <a:t>這張表在門診可以反過來用。Lower-risk 的病人每次回診都對照一次這幾列，只要有一項成立，就該開始做 HLA typing、找 donor，而不是等 blast 升高才轉介。同時也要記得 NRM 的代價，書上一再強調移植的好處要和 NRM 一起衡量。</a:t>
+            </a:r>
+          </a:p>
         </p:txBody>
       </p:sp>
       <p:sp>
@@ -3668,6 +3855,17 @@
               <a:t>Key point 的講法是，LR-MDS 可以等到疾病進展再移植。書上也特別寫，只要病人 fit、沒有嚴重 comorbidity、Karnofsky 好，移植沒有年齡上限。EBMT registry 裡 60 歲以上的病人在 2019 年已經占 MDS 移植的 52%，2006 年只有 24%。年紀本身不是不轉介的理由。</a:t>
             </a:r>
           </a:p>
+          <a:p>
+            <a:pPr>
+              <a:spcAft>
+                <a:spcPts val="600"/>
+              </a:spcAft>
+            </a:pPr>
+            <a:r>
+              <a:rPr lang="en-US" dirty="0"/>
+              <a:t>書上沒有細講非移植治療的內容，只說依照 ELN 和 NCCN 等國際 MDS 專家團體的最新建議。考試比較常考的是分流本身，也就是 fit 與否、有沒有 poor-risk feature、有沒有 donor。圖上 failure 的箭頭也值得注意，非移植治療失敗的 fit 病人，同樣回到移植這條路。</a:t>
+            </a:r>
+          </a:p>
         </p:txBody>
       </p:sp>
       <p:sp>
@@ -3793,6 +3991,28 @@
               <a:t>Key point 也提醒，HR-MDS 拖延移植會降低長期 relapse-free survival。所以 bridge 的目的只是讓病人順利走到移植，不是用來取代移植。</a:t>
             </a:r>
           </a:p>
+          <a:p>
+            <a:pPr>
+              <a:spcAft>
+                <a:spcPts val="600"/>
+              </a:spcAft>
+            </a:pPr>
+            <a:r>
+              <a:rPr lang="en-US" dirty="0"/>
+              <a:t>沒有 donor 的 higher-risk 病人先走非移植治療，但仍要持續找 unrelated 或 haplo donor。Key point 提到 alternative donor 已經讓更多 MDS 病人有機會移植，長期結果也令人滿意。</a:t>
+            </a:r>
+          </a:p>
+          <a:p>
+            <a:pPr>
+              <a:spcAft>
+                <a:spcPts val="600"/>
+              </a:spcAft>
+            </a:pPr>
+            <a:r>
+              <a:rPr lang="en-US" dirty="0"/>
+              <a:t>至於 HMA 和化療要怎麼分配，書上說還需要更多研究。另外，Figure 74.2 的切點寫的是 10% 以上，內文寫的是超過 10%，剛好 10% 的病人落在邊界上，臨床上依整體狀況判斷。</a:t>
+            </a:r>
+          </a:p>
         </p:txBody>
       </p:sp>
       <p:sp>
@@ -3926,7 +4146,18 @@
             </a:pPr>
             <a:r>
               <a:rPr lang="en-US" dirty="0"/>
-              <a:t>所以書上的結論是依 fitness 選，MAC 只給 eligible、fit、通常較年輕的病人。考題如果問 MAC 能不能改善 MDS 的 OS，依這些資料答案是否定的；但年輕、DRI 低到中等的病人，MAC 的 DFS 比較好。</a:t>
+              <a:t>所以書上的結論是依 fitness 選，MAC 只給 eligible、fit、通常較年輕的病人。考題如果問 MAC 能不能改善 MDS 的 OS，依這些資料答案是否定的；但年輕、DRI 低到中等的病人，MAC 的 DFS 比較好。BMT CTN 裡 RIC 的復發較多，正好說明 conditioning 強度主要影響的是復發，而不是整體存活。</a:t>
+            </a:r>
+          </a:p>
+          <a:p>
+            <a:pPr>
+              <a:spcAft>
+                <a:spcPts val="600"/>
+              </a:spcAft>
+            </a:pPr>
+            <a:r>
+              <a:rPr lang="en-US" dirty="0"/>
+              <a:t>讀這些 trial 時要注意族群。RICMAC 只收 MDS 和 secondary AML；BMT CTN 和 CIBMTR 則把 AML 和 MDS 合在一起分析，MDS 的結論來自 subgroup。對 high 和 very high DRI 的病人來說，提高 conditioning 強度並沒有換到更好的 DFS。</a:t>
             </a:r>
           </a:p>
         </p:txBody>
@@ -4052,6 +4283,17 @@
             <a:r>
               <a:rPr lang="en-US" dirty="0"/>
               <a:t>Donor 方面，MSD 和 MUD 都可以。Haplo 越用越多，從 2006 年的 4.5% 增加到 2019 年的 20.5%，結果不錯，但 NRM 偏高，還追不上 matched donor。Cord blood 因為細胞數少、恢復慢，用得越來越少。MDS 病人和他的兄弟姊妹通常都老，所以 donor 年紀要考慮，年輕的 unrelated donor 可能比年長的 sibling 好。</a:t>
+            </a:r>
+          </a:p>
+          <a:p>
+            <a:pPr>
+              <a:spcAft>
+                <a:spcPts val="600"/>
+              </a:spcAft>
+            </a:pPr>
+            <a:r>
+              <a:rPr lang="en-US" dirty="0"/>
+              <a:t>這些因子在移植前就能拿到，適合用來和病人討論預期結果。IPSS-M 加上移植相關因子的模型也在研究中。考試常見的組合是 biallelic TP53 加 complex karyotype，這類病人移植後的復發風險最高，下一張會談到他們的移植後策略。</a:t>
             </a:r>
           </a:p>
         </p:txBody>

--- a/slides/decks/s23-mds-mds-mpn.pptx
+++ b/slides/decks/s23-mds-mds-mpn.pptx
@@ -35,10 +35,9 @@
     <p:sldId id="283" r:id="rId29"/>
     <p:sldId id="284" r:id="rId30"/>
     <p:sldId id="285" r:id="rId31"/>
-    <p:sldId id="286" r:id="rId32"/>
   </p:sldIdLst>
   <p:notesMasterIdLst>
-    <p:notesMasterId r:id="rId33"/>
+    <p:notesMasterId r:id="rId32"/>
   </p:notesMasterIdLst>
   <p:sldSz cx="12192000" cy="6858000"/>
   <p:notesSz cx="6858000" cy="12192000"/>
@@ -137,13 +136,13 @@
   <p:extLst>
     <p:ext uri="{521415D9-36F7-43E2-AB2F-B90AF26B5E84}">
       <p14:sectionLst xmlns:p14="http://schemas.microsoft.com/office/powerpoint/2010/main">
-        <p14:section name="Opening" id="{e222ae17-1f33-10fe-f400-8be49274ab2a}">
+        <p14:section name="Opening" id="{899a066f-94bc-38df-e7aa-8930540bfb97}">
           <p14:sldIdLst>
             <p14:sldId id="256"/>
             <p14:sldId id="257"/>
           </p14:sldIdLst>
         </p14:section>
-        <p14:section name="MDS" id="{1eafdcb1-3ae7-b36a-ae84-c1feaf8d3875}">
+        <p14:section name="MDS" id="{8f5e83a8-a2f2-5f31-9673-9bd9875e7286}">
           <p14:sldIdLst>
             <p14:sldId id="258"/>
             <p14:sldId id="259"/>
@@ -155,7 +154,7 @@
             <p14:sldId id="265"/>
           </p14:sldIdLst>
         </p14:section>
-        <p14:section name="MDS/MPN" id="{98179112-ea0c-e4c9-a01c-eec77176e800}">
+        <p14:section name="MDS/MPN" id="{193866f4-44aa-b129-8f6c-546cb2b44cb3}">
           <p14:sldIdLst>
             <p14:sldId id="266"/>
             <p14:sldId id="267"/>
@@ -165,7 +164,7 @@
             <p14:sldId id="271"/>
           </p14:sldIdLst>
         </p14:section>
-        <p14:section name="Board questions" id="{207b5c63-46df-6170-5811-3bfa1147b298}">
+        <p14:section name="Board questions" id="{4808fb72-860a-185b-79c5-95fa3a19f190}">
           <p14:sldIdLst>
             <p14:sldId id="272"/>
             <p14:sldId id="273"/>
@@ -175,21 +174,20 @@
             <p14:sldId id="277"/>
           </p14:sldIdLst>
         </p14:section>
-        <p14:section name="References" id="{4dd898bf-578e-cbe1-b0f4-59b1db347281}">
+        <p14:section name="References" id="{1a09b85f-fcf6-3bcb-3604-a078a0f968bc}">
           <p14:sldIdLst>
             <p14:sldId id="278"/>
             <p14:sldId id="279"/>
             <p14:sldId id="280"/>
             <p14:sldId id="281"/>
             <p14:sldId id="282"/>
-            <p14:sldId id="283"/>
           </p14:sldIdLst>
         </p14:section>
-        <p14:section name="Backup" id="{c92678fc-e258-dc46-a0fd-1d7ecdce2480}">
+        <p14:section name="Backup" id="{7174db05-a74a-fdae-80ce-3cb467905bc0}">
           <p14:sldIdLst>
+            <p14:sldId id="283"/>
             <p14:sldId id="284"/>
             <p14:sldId id="285"/>
-            <p14:sldId id="286"/>
           </p14:sldIdLst>
         </p14:section>
       </p14:sectionLst>
@@ -3054,7 +3052,7 @@
           <a:p>
             <a:r>
               <a:rPr lang="en-US" dirty="0"/>
-              <a:t>各頁頁尾短式引用的完整文獻，不講。</a:t>
+              <a:t>Table 76.3 選了幾個 CMML 系列。最新的 EBMT 1466 位病人，5 年 OS 37%，TRM 32%，復發 37%。MDS/MPN with neutrophilia 的 EBMT 42 位，5 年 OS 51%，年輕、EBMT risk score 低的人較好。</a:t>
             </a:r>
             <a:endParaRPr lang="en-US" dirty="0"/>
           </a:p>
@@ -3142,7 +3140,7 @@
           <a:p>
             <a:r>
               <a:rPr lang="en-US" dirty="0"/>
-              <a:t>Table 76.3 選了幾個 CMML 系列。最新的 EBMT 1466 位病人，5 年 OS 37%，TRM 32%，復發 37%。MDS/MPN with neutrophilia 的 EBMT 42 位，5 年 OS 51%，年輕、EBMT risk score 低的人較好。</a:t>
+              <a:t>小兒 MDS 依 blast、karyotype 和骨髓細胞密度分流。Monosomy 7 要盡早用 MAC 移植；hypocellular、karyotype 正常的 RCC 用 RIC，BM 當來源。MDS-EB 用 BU/CY/MEL，5 年 OS 63%。</a:t>
             </a:r>
             <a:endParaRPr lang="en-US" dirty="0"/>
           </a:p>
@@ -3366,7 +3364,7 @@
           <a:p>
             <a:r>
               <a:rPr lang="en-US" dirty="0"/>
-              <a:t>小兒 MDS 依 blast、karyotype 和骨髓細胞密度分流。Monosomy 7 要盡早用 MAC 移植；hypocellular、karyotype 正常的 RCC 用 RIC，BM 當來源。MDS-EB 用 BU/CY/MEL，5 年 OS 63%。</a:t>
+              <a:t>JMML 依 RAS pathway 的突變分五型，PTPN11 和 NF1 通常需要移植，CBL 很少需要。移植前用 azacitidine，conditioning 是 BU/CY/MEL，來源用 BM。年紀 2 歲以上、HbF 15% 以上、有次發突變和高甲基化的復發風險高。</a:t>
             </a:r>
             <a:endParaRPr lang="en-US" dirty="0"/>
           </a:p>
@@ -3390,94 +3388,6 @@
             <a:fld id="{F7021451-1387-4CA6-816F-3879F97B5CBC}" type="slidenum">
               <a:rPr lang="en-US"/>
               <a:t>30</a:t>
-            </a:fld>
-            <a:endParaRPr lang="en-US"/>
-          </a:p>
-        </p:txBody>
-      </p:sp>
-    </p:spTree>
-    <p:extLst>
-      <p:ext uri="{BB962C8B-B14F-4D97-AF65-F5344CB8AC3E}">
-        <p14:creationId xmlns:p14="http://schemas.microsoft.com/office/powerpoint/2010/main" val="1024086991"/>
-      </p:ext>
-    </p:extLst>
-  </p:cSld>
-  <p:clrMapOvr>
-    <a:masterClrMapping/>
-  </p:clrMapOvr>
-</p:notes>
-</file>
-
-<file path=ppt/notesSlides/notesSlide31.xml><?xml version="1.0" encoding="utf-8"?>
-<p:notes xmlns:a="http://schemas.openxmlformats.org/drawingml/2006/main" xmlns:r="http://schemas.openxmlformats.org/officeDocument/2006/relationships" xmlns:p="http://schemas.openxmlformats.org/presentationml/2006/main">
-  <p:cSld>
-    <p:spTree>
-      <p:nvGrpSpPr>
-        <p:cNvPr id="1" name=""/>
-        <p:cNvGrpSpPr/>
-        <p:nvPr/>
-      </p:nvGrpSpPr>
-      <p:grpSpPr>
-        <a:xfrm>
-          <a:off x="0" y="0"/>
-          <a:ext cx="0" cy="0"/>
-          <a:chOff x="0" y="0"/>
-          <a:chExt cx="0" cy="0"/>
-        </a:xfrm>
-      </p:grpSpPr>
-      <p:sp>
-        <p:nvSpPr>
-          <p:cNvPr id="2" name="Slide Image Placeholder 1"/>
-          <p:cNvSpPr>
-            <a:spLocks noGrp="1" noRot="1" noChangeAspect="1"/>
-          </p:cNvSpPr>
-          <p:nvPr>
-            <p:ph type="sldImg"/>
-          </p:nvPr>
-        </p:nvSpPr>
-        <p:spPr/>
-      </p:sp>
-      <p:sp>
-        <p:nvSpPr>
-          <p:cNvPr id="3" name="Notes Placeholder 2"/>
-          <p:cNvSpPr>
-            <a:spLocks noGrp="1"/>
-          </p:cNvSpPr>
-          <p:nvPr>
-            <p:ph type="body" idx="1"/>
-          </p:nvPr>
-        </p:nvSpPr>
-        <p:spPr/>
-        <p:txBody>
-          <a:bodyPr/>
-          <a:lstStyle/>
-          <a:p>
-            <a:r>
-              <a:rPr lang="en-US" dirty="0"/>
-              <a:t>JMML 依 RAS pathway 的突變分五型，PTPN11 和 NF1 通常需要移植，CBL 很少需要。移植前用 azacitidine，conditioning 是 BU/CY/MEL，來源用 BM。年紀 2 歲以上、HbF 15% 以上、有次發突變和高甲基化的復發風險高。</a:t>
-            </a:r>
-            <a:endParaRPr lang="en-US" dirty="0"/>
-          </a:p>
-        </p:txBody>
-      </p:sp>
-      <p:sp>
-        <p:nvSpPr>
-          <p:cNvPr id="4" name="Slide Number Placeholder 3"/>
-          <p:cNvSpPr>
-            <a:spLocks noGrp="1"/>
-          </p:cNvSpPr>
-          <p:nvPr>
-            <p:ph type="sldNum" sz="quarter" idx="10"/>
-          </p:nvPr>
-        </p:nvSpPr>
-        <p:spPr/>
-        <p:txBody>
-          <a:bodyPr/>
-          <a:lstStyle/>
-          <a:p>
-            <a:fld id="{F7021451-1387-4CA6-816F-3879F97B5CBC}" type="slidenum">
-              <a:rPr lang="en-US"/>
-              <a:t>31</a:t>
             </a:fld>
             <a:endParaRPr lang="en-US"/>
           </a:p>
@@ -15264,7 +15174,7 @@
                   <a:schemeClr val="tx1"/>
                 </a:solidFill>
               </a:rPr>
-              <a:t>References, part 1 of 6</a:t>
+              <a:t>References, part 1 of 5</a:t>
             </a:r>
             <a:endParaRPr lang="en-US" sz="3600" dirty="0"/>
           </a:p>
@@ -15428,6 +15338,23 @@
                 </a:solidFill>
               </a:rPr>
               <a:t>7. Cutler CS, Lee SJ, Greenberg P, Deeg HJ, Perez WS, Anasetti C, Bolwell BJ, et al. A decision analysis of allogeneic bone marrow transplantation for the myelodysplastic syndromes: delayed transplantation for low-risk myelodysplasia is associated with improved outcome. Blood. 2004;104(2):579–85.</a:t>
+            </a:r>
+            <a:endParaRPr lang="en-US" sz="1100" dirty="0"/>
+          </a:p>
+          <a:p>
+            <a:pPr indent="0" marL="0">
+              <a:spcAft>
+                <a:spcPts val="700"/>
+              </a:spcAft>
+              <a:buNone/>
+            </a:pPr>
+            <a:r>
+              <a:rPr lang="en-US" sz="1100" dirty="0">
+                <a:solidFill>
+                  <a:schemeClr val="tx1"/>
+                </a:solidFill>
+              </a:rPr>
+              <a:t>8. Koreth J, Pidala J, Perez WS, Deeg HJ, Garcia-Manero G, Malcovati L, Cazzola M, et al. Role of reduced-intensity conditioning allogeneic hematopoietic stem-cell transplantation in older patients with de novo myelodysplastic syndromes: an international collaborative decision analysis. J Clin Oncol. 2013;31(21):2662–70.</a:t>
             </a:r>
             <a:endParaRPr lang="en-US" sz="1100" dirty="0"/>
           </a:p>
@@ -15603,7 +15530,7 @@
                   <a:schemeClr val="tx1"/>
                 </a:solidFill>
               </a:rPr>
-              <a:t>References, part 2 of 6</a:t>
+              <a:t>References, part 2 of 5</a:t>
             </a:r>
             <a:endParaRPr lang="en-US" sz="3600" dirty="0"/>
           </a:p>
@@ -15642,23 +15569,6 @@
                   <a:schemeClr val="tx1"/>
                 </a:solidFill>
               </a:rPr>
-              <a:t>8. Koreth J, Pidala J, Perez WS, Deeg HJ, Garcia-Manero G, Malcovati L, Cazzola M, et al. Role of reduced-intensity conditioning allogeneic hematopoietic stem-cell transplantation in older patients with de novo myelodysplastic syndromes: an international collaborative decision analysis. J Clin Oncol. 2013;31(21):2662–70.</a:t>
-            </a:r>
-            <a:endParaRPr lang="en-US" sz="1100" dirty="0"/>
-          </a:p>
-          <a:p>
-            <a:pPr indent="0" marL="0">
-              <a:spcAft>
-                <a:spcPts val="700"/>
-              </a:spcAft>
-              <a:buNone/>
-            </a:pPr>
-            <a:r>
-              <a:rPr lang="en-US" sz="1100" dirty="0">
-                <a:solidFill>
-                  <a:schemeClr val="tx1"/>
-                </a:solidFill>
-              </a:rPr>
               <a:t>9. de Witte T, Bowen D, Robin M, Malcovati L, Niederwieser D, Yakoub-Agha I, Mufti GJ, et al. Allogeneic hematopoietic stem cell transplantation for MDS and CMML: recommendations from an international expert panel. Blood. 2017;129(13):1753–62. https://doi.org/10.1182/blood-2016-06-724500.</a:t>
             </a:r>
             <a:endParaRPr lang="en-US" sz="1100" dirty="0"/>
@@ -15694,6 +15604,23 @@
                 </a:solidFill>
               </a:rPr>
               <a:t>11. Voso MT, Leone G, Piciocchi A, Fianchi L, Santarone S, Candoni A, Criscuolo M, et al. Feasibility of allogeneic stem-cell transplantation after Azacitidine bridge in higher-risk myelodysplastic syndromes and low blast count acute myeloid leukemia: results of the BMT-AZA prospective study. Ann Oncol. 2017;28(7):1547–53. https://doi.org/10.1093/annonc/mdx154.</a:t>
+            </a:r>
+            <a:endParaRPr lang="en-US" sz="1100" dirty="0"/>
+          </a:p>
+          <a:p>
+            <a:pPr indent="0" marL="0">
+              <a:spcAft>
+                <a:spcPts val="700"/>
+              </a:spcAft>
+              <a:buNone/>
+            </a:pPr>
+            <a:r>
+              <a:rPr lang="en-US" sz="1100" dirty="0">
+                <a:solidFill>
+                  <a:schemeClr val="tx1"/>
+                </a:solidFill>
+              </a:rPr>
+              <a:t>12. Kröger N, Iacobelli S, Franke G-N, Platzbecker U, Uddin R, Hübel K, Scheid C, et al. Dose-reduced versus standard conditioning followed by allogeneic stem-cell transplantation for patients with myelodysplastic syndrome: a prospective randomized phase III study of the EBMT (RICMAC trial). J Clin Oncol Off J Am Soc Clin Oncol. 2017;35(19):2157–64. https://doi.org/10.1200/JCO.2016.70.7349.</a:t>
             </a:r>
             <a:endParaRPr lang="en-US" sz="1100" dirty="0"/>
           </a:p>
@@ -15732,23 +15659,6 @@
                   <a:schemeClr val="tx1"/>
                 </a:solidFill>
               </a:rPr>
-              <a:t>12. Kröger N, Iacobelli S, Franke G-N, Platzbecker U, Uddin R, Hübel K, Scheid C, et al. Dose-reduced versus standard conditioning followed by allogeneic stem-cell transplantation for patients with myelodysplastic syndrome: a prospective randomized phase III study of the EBMT (RICMAC trial). J Clin Oncol Off J Am Soc Clin Oncol. 2017;35(19):2157–64. https://doi.org/10.1200/JCO.2016.70.7349.</a:t>
-            </a:r>
-            <a:endParaRPr lang="en-US" sz="1100" dirty="0"/>
-          </a:p>
-          <a:p>
-            <a:pPr indent="0" marL="0">
-              <a:spcAft>
-                <a:spcPts val="700"/>
-              </a:spcAft>
-              <a:buNone/>
-            </a:pPr>
-            <a:r>
-              <a:rPr lang="en-US" sz="1100" dirty="0">
-                <a:solidFill>
-                  <a:schemeClr val="tx1"/>
-                </a:solidFill>
-              </a:rPr>
               <a:t>13. Scott BL, Pasquini MC, Logan BR, Juan W, Devine SM, Porter DL, Maziarz RT, et al. Myeloablative versus reduced-intensity hematopoietic cell transplantation for acute myeloid leukemia and myelodysplastic syndromes. J Clin Oncol Off J Am Soc Clin Oncol. 2017;35(11):1154–61. https://doi.org/10.1200/JCO.2016.70.7091.</a:t>
             </a:r>
             <a:endParaRPr lang="en-US" sz="1100" dirty="0"/>
@@ -15767,6 +15677,40 @@
                 </a:solidFill>
               </a:rPr>
               <a:t>14. Bejanyan N, Zhang M, Bo-Subait K, Brunstein C, Wang H, Warlick ED, Giralt S, et al. Myeloablative conditioning for allogeneic transplantation results in superior disease-free survival for acute myelogenous leukemia and myelodysplastic syndromes with low/intermediate but not high disease risk index: a center for international blood and marrow transplant research study. Transplant Cell Ther. 2021;27(1):68.e1–9. https://doi.org/10.1016/j.bbmt.2020.09.026.</a:t>
+            </a:r>
+            <a:endParaRPr lang="en-US" sz="1100" dirty="0"/>
+          </a:p>
+          <a:p>
+            <a:pPr indent="0" marL="0">
+              <a:spcAft>
+                <a:spcPts val="700"/>
+              </a:spcAft>
+              <a:buNone/>
+            </a:pPr>
+            <a:r>
+              <a:rPr lang="en-US" sz="1100" dirty="0">
+                <a:solidFill>
+                  <a:schemeClr val="tx1"/>
+                </a:solidFill>
+              </a:rPr>
+              <a:t>15. Craddock C, Jackson A, Loke J, Siddique S, Hodgkinson A, Mason J, Andrew G, et al. Augmented reduced-intensity regimen does not improve postallogeneic transplant outcomes in acute Myeloid Leukemia. J Clin Oncol. 2021;39(7):768–78. https://doi.org/10.1200/JCO.20.02308.</a:t>
+            </a:r>
+            <a:endParaRPr lang="en-US" sz="1100" dirty="0"/>
+          </a:p>
+          <a:p>
+            <a:pPr indent="0" marL="0">
+              <a:spcAft>
+                <a:spcPts val="700"/>
+              </a:spcAft>
+              <a:buNone/>
+            </a:pPr>
+            <a:r>
+              <a:rPr lang="en-US" sz="1100" dirty="0">
+                <a:solidFill>
+                  <a:schemeClr val="tx1"/>
+                </a:solidFill>
+              </a:rPr>
+              <a:t>16. Lindsley RC, Saber W, Mar BG, Redd R, Wang T, Haagenson MD, Grauman PV, et al. Prognostic mutations in myelodysplastic syndrome after stem-cell transplantation. N Engl J Med. 2017;376(6):536–47. https://doi.org/10.1056/NEJMoa1611604.</a:t>
             </a:r>
             <a:endParaRPr lang="en-US" sz="1100" dirty="0"/>
           </a:p>
@@ -15942,7 +15886,7 @@
                   <a:schemeClr val="tx1"/>
                 </a:solidFill>
               </a:rPr>
-              <a:t>References, part 3 of 6</a:t>
+              <a:t>References, part 3 of 5</a:t>
             </a:r>
             <a:endParaRPr lang="en-US" sz="3600" dirty="0"/>
           </a:p>
@@ -15981,40 +15925,6 @@
                   <a:schemeClr val="tx1"/>
                 </a:solidFill>
               </a:rPr>
-              <a:t>15. Craddock C, Jackson A, Loke J, Siddique S, Hodgkinson A, Mason J, Andrew G, et al. Augmented reduced-intensity regimen does not improve postallogeneic transplant outcomes in acute Myeloid Leukemia. J Clin Oncol. 2021;39(7):768–78. https://doi.org/10.1200/JCO.20.02308.</a:t>
-            </a:r>
-            <a:endParaRPr lang="en-US" sz="1100" dirty="0"/>
-          </a:p>
-          <a:p>
-            <a:pPr indent="0" marL="0">
-              <a:spcAft>
-                <a:spcPts val="700"/>
-              </a:spcAft>
-              <a:buNone/>
-            </a:pPr>
-            <a:r>
-              <a:rPr lang="en-US" sz="1100" dirty="0">
-                <a:solidFill>
-                  <a:schemeClr val="tx1"/>
-                </a:solidFill>
-              </a:rPr>
-              <a:t>16. Lindsley RC, Saber W, Mar BG, Redd R, Wang T, Haagenson MD, Grauman PV, et al. Prognostic mutations in myelodysplastic syndrome after stem-cell transplantation. N Engl J Med. 2017;376(6):536–47. https://doi.org/10.1056/NEJMoa1611604.</a:t>
-            </a:r>
-            <a:endParaRPr lang="en-US" sz="1100" dirty="0"/>
-          </a:p>
-          <a:p>
-            <a:pPr indent="0" marL="0">
-              <a:spcAft>
-                <a:spcPts val="700"/>
-              </a:spcAft>
-              <a:buNone/>
-            </a:pPr>
-            <a:r>
-              <a:rPr lang="en-US" sz="1100" dirty="0">
-                <a:solidFill>
-                  <a:schemeClr val="tx1"/>
-                </a:solidFill>
-              </a:rPr>
               <a:t>17. Gagelmann N, Eikema D-J, Stelljes M, Beelen D, de Wreede L, Mufti G, Knelange NS, et al. Optimized EBMT transplant-specific risk score in myelodysplastic syndromes after allogeneic stem-cell transplantation. Haematologica. 2019;104(5):929–36. https://doi.org/10.3324/haematol.2018.200808.</a:t>
             </a:r>
             <a:endParaRPr lang="en-US" sz="1100" dirty="0"/>
@@ -16033,6 +15943,40 @@
                 </a:solidFill>
               </a:rPr>
               <a:t>18. Kröger N, Zabelina T, de Wreede L, Berger J, Alchalby H, van Biezen A, Milpied N, et al. Allogeneic stem cell transplantation for older advanced MDS patients: improved survival with young unrelated donor in comparison with HLA-identical siblings. Leukemia. 2013;27(3):604–9. https://doi.org/10.1038/leu.2012.210.</a:t>
+            </a:r>
+            <a:endParaRPr lang="en-US" sz="1100" dirty="0"/>
+          </a:p>
+          <a:p>
+            <a:pPr indent="0" marL="0">
+              <a:spcAft>
+                <a:spcPts val="700"/>
+              </a:spcAft>
+              <a:buNone/>
+            </a:pPr>
+            <a:r>
+              <a:rPr lang="en-US" sz="1100" dirty="0">
+                <a:solidFill>
+                  <a:schemeClr val="tx1"/>
+                </a:solidFill>
+              </a:rPr>
+              <a:t>19. Murthy G, Subramanian G, Kim S, Zhen-Huan H, Estrada-Merly N, Abid MB, Aljurf M, Bacher U, et al. Relapse and disease-free survival in patients with myelodysplastic syndrome undergoing allogeneic hematopoietic cell transplantation using older matched sibling donors vs younger matched unrelated donors. JAMA Oncol. 2022;8(3):404–11. https://doi.org/10.1001/jamaoncol.2021.6846.</a:t>
+            </a:r>
+            <a:endParaRPr lang="en-US" sz="1100" dirty="0"/>
+          </a:p>
+          <a:p>
+            <a:pPr indent="0" marL="0">
+              <a:spcAft>
+                <a:spcPts val="700"/>
+              </a:spcAft>
+              <a:buNone/>
+            </a:pPr>
+            <a:r>
+              <a:rPr lang="en-US" sz="1100" dirty="0">
+                <a:solidFill>
+                  <a:schemeClr val="tx1"/>
+                </a:solidFill>
+              </a:rPr>
+              <a:t>20. Craddock C, Labopin M, Robin M, Finke J, Chevallier P, Yakoub-Agha I, Bourhis JH, et al. Clinical activity of Azacitidine in patients who relapse after allogeneic stem cell transplantation for acute myeloid leukemia. Haematologica. 2016;101(7):879–83. https://doi.org/10.3324/haematol.2015.140996.</a:t>
             </a:r>
             <a:endParaRPr lang="en-US" sz="1100" dirty="0"/>
           </a:p>
@@ -16071,7 +16015,7 @@
                   <a:schemeClr val="tx1"/>
                 </a:solidFill>
               </a:rPr>
-              <a:t>19. Murthy G, Subramanian G, Kim S, Zhen-Huan H, Estrada-Merly N, Abid MB, Aljurf M, Bacher U, et al. Relapse and disease-free survival in patients with myelodysplastic syndrome undergoing allogeneic hematopoietic cell transplantation using older matched sibling donors vs younger matched unrelated donors. JAMA Oncol. 2022;8(3):404–11. https://doi.org/10.1001/jamaoncol.2021.6846.</a:t>
+              <a:t>21. Guièze R, Damaj G, Pereira B, Robin M, Chevallier P, Michallet M, Vigouroux S, et al. Management of Myelodysplastic Syndrome Relapsing after allogeneic hematopoietic stem cell transplantation: a study by the French Society of Bone Marrow Transplantation and Cell Therapies. Biol Blood Marrow Transplant. 2016;22(2):240–7. https://doi.org/10.1016/j.bbmt.2015.07.037.</a:t>
             </a:r>
             <a:endParaRPr lang="en-US" sz="1100" dirty="0"/>
           </a:p>
@@ -16088,7 +16032,7 @@
                   <a:schemeClr val="tx1"/>
                 </a:solidFill>
               </a:rPr>
-              <a:t>20. Craddock C, Labopin M, Robin M, Finke J, Chevallier P, Yakoub-Agha I, Bourhis JH, et al. Clinical activity of Azacitidine in patients who relapse after allogeneic stem cell transplantation for acute myeloid leukemia. Haematologica. 2016;101(7):879–83. https://doi.org/10.3324/haematol.2015.140996.</a:t>
+              <a:t>22. Schmid C, de Wreede LC, van Biezen A, Finke J, Ehninger G, Ganser A, Volin L, et al. Outcome after relapse of myelodysplastic syndrome and secondary acute myeloid leukemia following allogeneic stem cell transplantation: a retrospective registry analysis on 698 patients by the chronic malignancies working Party of the European Society of blood and marrow transplantation. Haematologica. 2018;103(2):237–45. https://doi.org/10.3324/haematol.2017.168716.</a:t>
             </a:r>
             <a:endParaRPr lang="en-US" sz="1100" dirty="0"/>
           </a:p>
@@ -16105,7 +16049,24 @@
                   <a:schemeClr val="tx1"/>
                 </a:solidFill>
               </a:rPr>
-              <a:t>21. Guièze R, Damaj G, Pereira B, Robin M, Chevallier P, Michallet M, Vigouroux S, et al. Management of Myelodysplastic Syndrome Relapsing after allogeneic hematopoietic stem cell transplantation: a study by the French Society of Bone Marrow Transplantation and Cell Therapies. Biol Blood Marrow Transplant. 2016;22(2):240–7. https://doi.org/10.1016/j.bbmt.2015.07.037.</a:t>
+              <a:t>23. Kungwankiattichai S, Ponvilawan B, Roy C, Tunsing P, Kuchenbauer F, Owattanapanich W. Maintenance with Hypomethylating agents after allogeneic stem cell transplantation in acute myeloid leukemia and myelodysplastic syndrome: a systematic review and meta-analysis. Front Med. 2022;9:801632. https://doi.org/10.3389/fmed.2022.801632.</a:t>
+            </a:r>
+            <a:endParaRPr lang="en-US" sz="1100" dirty="0"/>
+          </a:p>
+          <a:p>
+            <a:pPr indent="0" marL="0">
+              <a:spcAft>
+                <a:spcPts val="700"/>
+              </a:spcAft>
+              <a:buNone/>
+            </a:pPr>
+            <a:r>
+              <a:rPr lang="en-US" sz="1100" dirty="0">
+                <a:solidFill>
+                  <a:schemeClr val="tx1"/>
+                </a:solidFill>
+              </a:rPr>
+              <a:t>24. Oran B, de Lima M, Garcia-Manero G, Thall PF, Lin R, Popat U, Alousi AM, et al. A phase 3 randomized study of 5-Azacitidine maintenance vs observation after transplant in high-risk AML and MDS patients. Blood Adv. 2020;4(21):5580–8. https://doi.org/10.1182/bloodadvances.2020002544.</a:t>
             </a:r>
             <a:endParaRPr lang="en-US" sz="1100" dirty="0"/>
           </a:p>
@@ -16281,7 +16242,7 @@
                   <a:schemeClr val="tx1"/>
                 </a:solidFill>
               </a:rPr>
-              <a:t>References, part 4 of 6</a:t>
+              <a:t>References, part 4 of 5</a:t>
             </a:r>
             <a:endParaRPr lang="en-US" sz="3600" dirty="0"/>
           </a:p>
@@ -16320,7 +16281,7 @@
                   <a:schemeClr val="tx1"/>
                 </a:solidFill>
               </a:rPr>
-              <a:t>22. Schmid C, de Wreede LC, van Biezen A, Finke J, Ehninger G, Ganser A, Volin L, et al. Outcome after relapse of myelodysplastic syndrome and secondary acute myeloid leukemia following allogeneic stem cell transplantation: a retrospective registry analysis on 698 patients by the chronic malignancies working Party of the European Society of blood and marrow transplantation. Haematologica. 2018;103(2):237–45. https://doi.org/10.3324/haematol.2017.168716.</a:t>
+              <a:t>25. Such E, Germing U, Malcovati L, et al. Development and validation of a prognostic scoring system for patients with chronic myelomonocytic leukemia. Blood. 2013;121:3005–15.</a:t>
             </a:r>
             <a:endParaRPr lang="en-US" sz="1100" dirty="0"/>
           </a:p>
@@ -16337,7 +16298,7 @@
                   <a:schemeClr val="tx1"/>
                 </a:solidFill>
               </a:rPr>
-              <a:t>23. Kungwankiattichai S, Ponvilawan B, Roy C, Tunsing P, Kuchenbauer F, Owattanapanich W. Maintenance with Hypomethylating agents after allogeneic stem cell transplantation in acute myeloid leukemia and myelodysplastic syndrome: a systematic review and meta-analysis. Front Med. 2022;9:801632. https://doi.org/10.3389/fmed.2022.801632.</a:t>
+              <a:t>26. Elena C, Gall A, Such E, et al. Integrating clinical features and genetic lesions in the risk assessment of patients with chronic myelomonocytic leukemia. Blood. 2016;128:1408–17.</a:t>
             </a:r>
             <a:endParaRPr lang="en-US" sz="1100" dirty="0"/>
           </a:p>
@@ -16354,7 +16315,7 @@
                   <a:schemeClr val="tx1"/>
                 </a:solidFill>
               </a:rPr>
-              <a:t>24. Oran B, de Lima M, Garcia-Manero G, Thall PF, Lin R, Popat U, Alousi AM, et al. A phase 3 randomized study of 5-Azacitidine maintenance vs observation after transplant in high-risk AML and MDS patients. Blood Adv. 2020;4(21):5580–8. https://doi.org/10.1182/bloodadvances.2020002544.</a:t>
+              <a:t>27. Itzykson R, Kosmider O, Renneville A, et al. Prognostic score including gene mutations in chronic myelomonocytic leukemia. J Clin Oncol. 2013;31:2428–36.</a:t>
             </a:r>
             <a:endParaRPr lang="en-US" sz="1100" dirty="0"/>
           </a:p>
@@ -16371,7 +16332,7 @@
                   <a:schemeClr val="tx1"/>
                 </a:solidFill>
               </a:rPr>
-              <a:t>25. Such E, Germing U, Malcovati L, et al. Development and validation of a prognostic scoring system for patients with chronic myelomonocytic leukemia. Blood. 2013;121:3005–15.</a:t>
+              <a:t>28. Patnaik MM, Itzykson R, Lasho T, et al. ASXL1 and SETBP1 mutations and their prognostic contribution in chronic myelomonocytic leukemia: a two-center study of 466 patients. Leukemia. 2014;28:2206–12.</a:t>
             </a:r>
             <a:endParaRPr lang="en-US" sz="1100" dirty="0"/>
           </a:p>
@@ -16410,7 +16371,7 @@
                   <a:schemeClr val="tx1"/>
                 </a:solidFill>
               </a:rPr>
-              <a:t>26. Elena C, Gall A, Such E, et al. Integrating clinical features and genetic lesions in the risk assessment of patients with chronic myelomonocytic leukemia. Blood. 2016;128:1408–17.</a:t>
+              <a:t>29. Onida F, Ball G, Kantarjian HM, et al. Characteristics and outcome of patients with Philadelphia chromosome negative, bcr/abl negative chronic myelogenous leukemia. Cancer. 2002;95:1673–84.</a:t>
             </a:r>
             <a:endParaRPr lang="en-US" sz="1100" dirty="0"/>
           </a:p>
@@ -16427,7 +16388,7 @@
                   <a:schemeClr val="tx1"/>
                 </a:solidFill>
               </a:rPr>
-              <a:t>27. Itzykson R, Kosmider O, Renneville A, et al. Prognostic score including gene mutations in chronic myelomonocytic leukemia. J Clin Oncol. 2013;31:2428–36.</a:t>
+              <a:t>30. Patnaik MM, Lasho TL, Finke CM, et al. Predictors of survival in refractory anemia with ring sideroblasts and thrombocytosis (RARS-T) and the role of next-generation sequencing. Am J Hematol. 2016;91:492–8.</a:t>
             </a:r>
             <a:endParaRPr lang="en-US" sz="1100" dirty="0"/>
           </a:p>
@@ -16444,7 +16405,24 @@
                   <a:schemeClr val="tx1"/>
                 </a:solidFill>
               </a:rPr>
-              <a:t>28. Patnaik MM, Itzykson R, Lasho T, et al. ASXL1 and SETBP1 mutations and their prognostic contribution in chronic myelomonocytic leukemia: a two-center study of 466 patients. Leukemia. 2014;28:2206–12.</a:t>
+              <a:t>31. Kröger N, Zabelina T, Guardiola P, et al. Allogeneic stem cell transplantation of adult chronic myelomonocytic leukaemia. A report on behalf of the chronic Leukaemia working Party of the European Group for blood and marrow transplantation (EBMT). Br J Haematol. 2002;118:67–73.</a:t>
+            </a:r>
+            <a:endParaRPr lang="en-US" sz="1100" dirty="0"/>
+          </a:p>
+          <a:p>
+            <a:pPr indent="0" marL="0">
+              <a:spcAft>
+                <a:spcPts val="700"/>
+              </a:spcAft>
+              <a:buNone/>
+            </a:pPr>
+            <a:r>
+              <a:rPr lang="en-US" sz="1100" dirty="0">
+                <a:solidFill>
+                  <a:schemeClr val="tx1"/>
+                </a:solidFill>
+              </a:rPr>
+              <a:t>32. Symeonidis A, van Biezen A, de Wreede L, et al. Achievement of complete remission predicts outcome of allogeneic haematopoietic stem cell transplantation in patients with chronic myelomonocytic leukaemia. A study of the chronic malignancies working Party of the European Group for blood and marrow transplantation. Br J Haematol. 2015;171:239–46.</a:t>
             </a:r>
             <a:endParaRPr lang="en-US" sz="1100" dirty="0"/>
           </a:p>
@@ -16620,7 +16598,7 @@
                   <a:schemeClr val="tx1"/>
                 </a:solidFill>
               </a:rPr>
-              <a:t>References, part 5 of 6</a:t>
+              <a:t>References, part 5 of 5</a:t>
             </a:r>
             <a:endParaRPr lang="en-US" sz="3600" dirty="0"/>
           </a:p>
@@ -16659,7 +16637,7 @@
                   <a:schemeClr val="tx1"/>
                 </a:solidFill>
               </a:rPr>
-              <a:t>29. Onida F, Ball G, Kantarjian HM, et al. Characteristics and outcome of patients with Philadelphia chromosome negative, bcr/abl negative chronic myelogenous leukemia. Cancer. 2002;95:1673–84.</a:t>
+              <a:t>33. Liu HD, Ahn KW, Hu ZH, et al. Allogeneic hematopoietic cell transplantation for adult chronic myelomonocytic leukemia. Biol Blood Marrow Transplant. 2017;23:767–75.</a:t>
             </a:r>
             <a:endParaRPr lang="en-US" sz="1100" dirty="0"/>
           </a:p>
@@ -16676,7 +16654,7 @@
                   <a:schemeClr val="tx1"/>
                 </a:solidFill>
               </a:rPr>
-              <a:t>30. Patnaik MM, Lasho TL, Finke CM, et al. Predictors of survival in refractory anemia with ring sideroblasts and thrombocytosis (RARS-T) and the role of next-generation sequencing. Am J Hematol. 2016;91:492–8.</a:t>
+              <a:t>34. Itonaga H, Aoki K, Aoki J, et al. Prognostic impact of donor source on allogeneic hematopoietic stem cell transplantation outcomes in adults with chronic myelomonocytic leukemia: a Nationwide retrospective analysis in Japan. Biol Blood Marrow Transplant. 2018;24:840–8.</a:t>
             </a:r>
             <a:endParaRPr lang="en-US" sz="1100" dirty="0"/>
           </a:p>
@@ -16693,24 +16671,7 @@
                   <a:schemeClr val="tx1"/>
                 </a:solidFill>
               </a:rPr>
-              <a:t>31. Kröger N, Zabelina T, Guardiola P, et al. Allogeneic stem cell transplantation of adult chronic myelomonocytic leukaemia. A report on behalf of the chronic Leukaemia working Party of the European Group for blood and marrow transplantation (EBMT). Br J Haematol. 2002;118:67–73.</a:t>
-            </a:r>
-            <a:endParaRPr lang="en-US" sz="1100" dirty="0"/>
-          </a:p>
-          <a:p>
-            <a:pPr indent="0" marL="0">
-              <a:spcAft>
-                <a:spcPts val="700"/>
-              </a:spcAft>
-              <a:buNone/>
-            </a:pPr>
-            <a:r>
-              <a:rPr lang="en-US" sz="1100" dirty="0">
-                <a:solidFill>
-                  <a:schemeClr val="tx1"/>
-                </a:solidFill>
-              </a:rPr>
-              <a:t>32. Symeonidis A, van Biezen A, de Wreede L, et al. Achievement of complete remission predicts outcome of allogeneic haematopoietic stem cell transplantation in patients with chronic myelomonocytic leukaemia. A study of the chronic malignancies working Party of the European Group for blood and marrow transplantation. Br J Haematol. 2015;171:239–46.</a:t>
+              <a:t>35. Rovó A, Gras L, Piebenbroek B et al. Outcomes of CMML patients undergoing allo-HCT are significantly worse compared to MDS - A study of the CMWP of the EBMT. American Journal of Hematology. 2023. In press.</a:t>
             </a:r>
             <a:endParaRPr lang="en-US" sz="1100" dirty="0"/>
           </a:p>
@@ -16749,7 +16710,7 @@
                   <a:schemeClr val="tx1"/>
                 </a:solidFill>
               </a:rPr>
-              <a:t>33. Liu HD, Ahn KW, Hu ZH, et al. Allogeneic hematopoietic cell transplantation for adult chronic myelomonocytic leukemia. Biol Blood Marrow Transplant. 2017;23:767–75.</a:t>
+              <a:t>36. Onida F, de Wreede LC, van Biezen A, et al. Allogeneic stem cell transplantation in patients with atypical chronic myeloid leukaemia: a retrospective study from the chronic malignancies working Party of the European Society for blood and marrow transplantation. Br J Haematol. 2017;177:759–65.</a:t>
             </a:r>
             <a:endParaRPr lang="en-US" sz="1100" dirty="0"/>
           </a:p>
@@ -16766,7 +16727,7 @@
                   <a:schemeClr val="tx1"/>
                 </a:solidFill>
               </a:rPr>
-              <a:t>34. Itonaga H, Aoki K, Aoki J, et al. Prognostic impact of donor source on allogeneic hematopoietic stem cell transplantation outcomes in adults with chronic myelomonocytic leukemia: a Nationwide retrospective analysis in Japan. Biol Blood Marrow Transplant. 2018;24:840–8.</a:t>
+              <a:t>37. Strahm B, Nöllke P, Zecca M, EWOG-MDS Study Group, et al. Hematopoietic stem cell transplantation for advanced myelodysplastic syndrome in children: results of the EWOG-MDS 98 study. Leukemia. 2011;25:455–62.</a:t>
             </a:r>
             <a:endParaRPr lang="en-US" sz="1100" dirty="0"/>
           </a:p>
@@ -16783,7 +16744,7 @@
                   <a:schemeClr val="tx1"/>
                 </a:solidFill>
               </a:rPr>
-              <a:t>35. Rovó A, Gras L, Piebenbroek B et al. Outcomes of CMML patients undergoing allo-HCT are significantly worse compared to MDS - A study of the CMWP of the EBMT. American Journal of Hematology. 2023. In press.</a:t>
+              <a:t>38. Strahm B, Albert M, Bierings M, et al. EWOG-MDS study SCT RC RIC 06: Reduced intensity conditioning for children and adolescents with refractory cytopenia of childhood. Bone Marrow Transplant. 2017;52:S103.</a:t>
             </a:r>
             <a:endParaRPr lang="en-US" sz="1100" dirty="0"/>
           </a:p>
@@ -16921,7 +16882,7 @@
                   <a:schemeClr val="tx1"/>
                 </a:solidFill>
               </a:rPr>
-              <a:t>REFERENCES</a:t>
+              <a:t>BACKUP · MDS/MPN · TRANSPLANT SERIES (TABLE 76.3)</a:t>
             </a:r>
             <a:endParaRPr lang="en-US" sz="1100" dirty="0"/>
           </a:p>
@@ -16959,7 +16920,7 @@
                   <a:schemeClr val="tx1"/>
                 </a:solidFill>
               </a:rPr>
-              <a:t>References, part 6 of 6</a:t>
+              <a:t>Relapse and TRM each claim about a third after HCT for CMML</a:t>
             </a:r>
             <a:endParaRPr lang="en-US" sz="3600" dirty="0"/>
           </a:p>
@@ -16967,102 +16928,7 @@
       </p:sp>
       <p:sp>
         <p:nvSpPr>
-          <p:cNvPr id="5" name="Text 95"/>
-          <p:cNvSpPr txBox="1"/>
-          <p:nvPr/>
-        </p:nvSpPr>
-        <p:spPr>
-          <a:xfrm>
-            <a:off x="685800" y="2103120"/>
-            <a:ext cx="5120640" cy="3886200"/>
-          </a:xfrm>
-          <a:prstGeom prst="rect">
-            <a:avLst/>
-          </a:prstGeom>
-          <a:noFill/>
-          <a:ln/>
-        </p:spPr>
-        <p:txBody>
-          <a:bodyPr wrap="square" lIns="0" tIns="0" rIns="0" bIns="0" rtlCol="0" anchor="t"/>
-          <a:lstStyle/>
-          <a:p>
-            <a:pPr indent="0" marL="0">
-              <a:spcAft>
-                <a:spcPts val="700"/>
-              </a:spcAft>
-              <a:buNone/>
-            </a:pPr>
-            <a:r>
-              <a:rPr lang="en-US" sz="1100" dirty="0">
-                <a:solidFill>
-                  <a:schemeClr val="tx1"/>
-                </a:solidFill>
-              </a:rPr>
-              <a:t>36. Onida F, de Wreede LC, van Biezen A, et al. Allogeneic stem cell transplantation in patients with atypical chronic myeloid leukaemia: a retrospective study from the chronic malignancies working Party of the European Society for blood and marrow transplantation. Br J Haematol. 2017;177:759–65.</a:t>
-            </a:r>
-            <a:endParaRPr lang="en-US" sz="1100" dirty="0"/>
-          </a:p>
-          <a:p>
-            <a:pPr indent="0" marL="0">
-              <a:spcAft>
-                <a:spcPts val="700"/>
-              </a:spcAft>
-              <a:buNone/>
-            </a:pPr>
-            <a:r>
-              <a:rPr lang="en-US" sz="1100" dirty="0">
-                <a:solidFill>
-                  <a:schemeClr val="tx1"/>
-                </a:solidFill>
-              </a:rPr>
-              <a:t>37. Strahm B, Nöllke P, Zecca M, EWOG-MDS Study Group, et al. Hematopoietic stem cell transplantation for advanced myelodysplastic syndrome in children: results of the EWOG-MDS 98 study. Leukemia. 2011;25:455–62.</a:t>
-            </a:r>
-            <a:endParaRPr lang="en-US" sz="1100" dirty="0"/>
-          </a:p>
-        </p:txBody>
-      </p:sp>
-      <p:sp>
-        <p:nvSpPr>
-          <p:cNvPr id="6" name="Text 96"/>
-          <p:cNvSpPr txBox="1"/>
-          <p:nvPr/>
-        </p:nvSpPr>
-        <p:spPr>
-          <a:xfrm>
-            <a:off x="6400800" y="2103120"/>
-            <a:ext cx="5120640" cy="3886200"/>
-          </a:xfrm>
-          <a:prstGeom prst="rect">
-            <a:avLst/>
-          </a:prstGeom>
-          <a:noFill/>
-          <a:ln/>
-        </p:spPr>
-        <p:txBody>
-          <a:bodyPr wrap="square" lIns="0" tIns="0" rIns="0" bIns="0" rtlCol="0" anchor="t"/>
-          <a:lstStyle/>
-          <a:p>
-            <a:pPr indent="0" marL="0">
-              <a:spcAft>
-                <a:spcPts val="700"/>
-              </a:spcAft>
-              <a:buNone/>
-            </a:pPr>
-            <a:r>
-              <a:rPr lang="en-US" sz="1100" dirty="0">
-                <a:solidFill>
-                  <a:schemeClr val="tx1"/>
-                </a:solidFill>
-              </a:rPr>
-              <a:t>38. Strahm B, Albert M, Bierings M, et al. EWOG-MDS study SCT RC RIC 06: Reduced intensity conditioning for children and adolescents with refractory cytopenia of childhood. Bone Marrow Transplant. 2017;52:S103.</a:t>
-            </a:r>
-            <a:endParaRPr lang="en-US" sz="1100" dirty="0"/>
-          </a:p>
-        </p:txBody>
-      </p:sp>
-      <p:sp>
-        <p:nvSpPr>
-          <p:cNvPr id="7" name="Text 0"/>
+          <p:cNvPr id="4" name="Text 0"/>
           <p:cNvSpPr/>
           <p:nvPr>
             <p:ph idx="102" type="body" hasCustomPrompt="1"/>
@@ -17086,182 +16952,6 @@
             <a:pPr algn="l" indent="0" marL="0">
               <a:buNone/>
             </a:pPr>
-            <a:endParaRPr lang="en-US" sz="1000" dirty="0"/>
-          </a:p>
-        </p:txBody>
-      </p:sp>
-      <p:sp>
-        <p:nvSpPr>
-          <p:cNvPr id="25" name="Slide Number Placeholder 0"/>
-          <p:cNvSpPr>
-            <a:spLocks noGrp="1"/>
-          </p:cNvSpPr>
-          <p:nvPr>
-            <p:ph type="sldNum" sz="quarter" idx="4294967295"/>
-          </p:nvPr>
-        </p:nvSpPr>
-        <p:spPr>
-          <a:xfrm>
-            <a:off x="10972800" y="6080760"/>
-            <a:ext cx="530352" cy="274320"/>
-          </a:xfrm>
-          <a:prstGeom prst="rect">
-            <a:avLst/>
-          </a:prstGeom>
-          <a:extLst>
-            <a:ext uri="{C572A759-6A51-4108-AA02-DFA0A04FC94B}">
-              <ma14:wrappingTextBoxFlag xmlns:ma14="http://schemas.microsoft.com/office/mac/drawingml/2011/main" val="0"/>
-            </a:ext>
-          </a:extLst>
-        </p:spPr>
-        <p:txBody>
-          <a:bodyPr/>
-          <a:lstStyle>
-            <a:lvl1pPr>
-              <a:defRPr sz="1000">
-                <a:solidFill>
-                  <a:schemeClr val="tx1"/>
-                </a:solidFill>
-              </a:defRPr>
-            </a:lvl1pPr>
-          </a:lstStyle>
-          <a:p>
-            <a:pPr algn="r"/>
-            <a:fld id="{F7021451-1387-4CA6-816F-3879F97B5CBC}" type="slidenum">
-              <a:rPr b="0" lang="en-US"/>
-              <a:t>28</a:t>
-            </a:fld>
-            <a:endParaRPr lang="en-US"/>
-          </a:p>
-        </p:txBody>
-      </p:sp>
-    </p:spTree>
-  </p:cSld>
-  <p:clrMapOvr>
-    <a:masterClrMapping/>
-  </p:clrMapOvr>
-</p:sld>
-</file>
-
-<file path=ppt/slides/slide29.xml><?xml version="1.0" encoding="utf-8"?>
-<p:sld xmlns:a="http://schemas.openxmlformats.org/drawingml/2006/main" xmlns:r="http://schemas.openxmlformats.org/officeDocument/2006/relationships" xmlns:p="http://schemas.openxmlformats.org/presentationml/2006/main">
-  <p:cSld name="Slide 29">
-    <p:spTree>
-      <p:nvGrpSpPr>
-        <p:cNvPr id="1" name=""/>
-        <p:cNvGrpSpPr/>
-        <p:nvPr/>
-      </p:nvGrpSpPr>
-      <p:grpSpPr>
-        <a:xfrm>
-          <a:off x="0" y="0"/>
-          <a:ext cx="0" cy="0"/>
-          <a:chOff x="0" y="0"/>
-          <a:chExt cx="0" cy="0"/>
-        </a:xfrm>
-      </p:grpSpPr>
-      <p:sp>
-        <p:nvSpPr>
-          <p:cNvPr id="2" name="Text 0"/>
-          <p:cNvSpPr/>
-          <p:nvPr>
-            <p:ph idx="100" type="body" hasCustomPrompt="1"/>
-          </p:nvPr>
-        </p:nvSpPr>
-        <p:spPr>
-          <a:xfrm>
-            <a:off x="685800" y="502920"/>
-            <a:ext cx="10817352" cy="274320"/>
-          </a:xfrm>
-          <a:prstGeom prst="rect">
-            <a:avLst/>
-          </a:prstGeom>
-          <a:noFill/>
-          <a:ln/>
-        </p:spPr>
-        <p:txBody>
-          <a:bodyPr wrap="square" lIns="0" tIns="0" rIns="0" bIns="0" rtlCol="0" anchor="t"/>
-          <a:lstStyle/>
-          <a:p>
-            <a:pPr algn="l" indent="0" marL="0">
-              <a:buNone/>
-            </a:pPr>
-            <a:r>
-              <a:rPr lang="en-US" sz="1100" spc="300" kern="0" dirty="0">
-                <a:solidFill>
-                  <a:schemeClr val="tx1"/>
-                </a:solidFill>
-              </a:rPr>
-              <a:t>BACKUP · MDS/MPN · TRANSPLANT SERIES (TABLE 76.3)</a:t>
-            </a:r>
-            <a:endParaRPr lang="en-US" sz="1100" dirty="0"/>
-          </a:p>
-        </p:txBody>
-      </p:sp>
-      <p:sp>
-        <p:nvSpPr>
-          <p:cNvPr id="3" name="Text 0"/>
-          <p:cNvSpPr/>
-          <p:nvPr>
-            <p:ph idx="101" type="title" hasCustomPrompt="1"/>
-          </p:nvPr>
-        </p:nvSpPr>
-        <p:spPr>
-          <a:xfrm>
-            <a:off x="685800" y="822960"/>
-            <a:ext cx="10817352" cy="1143000"/>
-          </a:xfrm>
-          <a:prstGeom prst="rect">
-            <a:avLst/>
-          </a:prstGeom>
-          <a:noFill/>
-          <a:ln/>
-        </p:spPr>
-        <p:txBody>
-          <a:bodyPr wrap="square" lIns="0" tIns="0" rIns="0" bIns="0" rtlCol="0" anchor="t"/>
-          <a:lstStyle/>
-          <a:p>
-            <a:pPr algn="l" indent="0" marL="0">
-              <a:buNone/>
-            </a:pPr>
-            <a:r>
-              <a:rPr lang="en-US" sz="3600" b="1" dirty="0">
-                <a:solidFill>
-                  <a:schemeClr val="tx1"/>
-                </a:solidFill>
-              </a:rPr>
-              <a:t>Relapse and TRM each claim about a third after HCT for CMML</a:t>
-            </a:r>
-            <a:endParaRPr lang="en-US" sz="3600" dirty="0"/>
-          </a:p>
-        </p:txBody>
-      </p:sp>
-      <p:sp>
-        <p:nvSpPr>
-          <p:cNvPr id="4" name="Text 0"/>
-          <p:cNvSpPr/>
-          <p:nvPr>
-            <p:ph idx="102" type="body" hasCustomPrompt="1"/>
-          </p:nvPr>
-        </p:nvSpPr>
-        <p:spPr>
-          <a:xfrm>
-            <a:off x="685800" y="6080760"/>
-            <a:ext cx="9966960" cy="457200"/>
-          </a:xfrm>
-          <a:prstGeom prst="rect">
-            <a:avLst/>
-          </a:prstGeom>
-          <a:noFill/>
-          <a:ln/>
-        </p:spPr>
-        <p:txBody>
-          <a:bodyPr wrap="square" lIns="0" tIns="0" rIns="0" bIns="0" rtlCol="0" anchor="t"/>
-          <a:lstStyle/>
-          <a:p>
-            <a:pPr algn="l" indent="0" marL="0">
-              <a:buNone/>
-            </a:pPr>
             <a:r>
               <a:rPr lang="en-US" sz="1000" dirty="0">
                 <a:solidFill>
@@ -17276,7 +16966,7 @@
       </p:sp>
       <p:graphicFrame>
         <p:nvGraphicFramePr>
-          <p:cNvPr id="30" name="Table 97"/>
+          <p:cNvPr id="29" name="Table 95"/>
           <p:cNvGraphicFramePr>
             <a:graphicFrameLocks noGrp="1"/>
           </p:cNvGraphicFramePr>
@@ -18790,6 +18480,916 @@
             <a:pPr algn="r"/>
             <a:fld id="{F7021451-1387-4CA6-816F-3879F97B5CBC}" type="slidenum">
               <a:rPr b="0" lang="en-US"/>
+              <a:t>28</a:t>
+            </a:fld>
+            <a:endParaRPr lang="en-US"/>
+          </a:p>
+        </p:txBody>
+      </p:sp>
+    </p:spTree>
+  </p:cSld>
+  <p:clrMapOvr>
+    <a:masterClrMapping/>
+  </p:clrMapOvr>
+</p:sld>
+</file>
+
+<file path=ppt/slides/slide29.xml><?xml version="1.0" encoding="utf-8"?>
+<p:sld xmlns:a="http://schemas.openxmlformats.org/drawingml/2006/main" xmlns:r="http://schemas.openxmlformats.org/officeDocument/2006/relationships" xmlns:p="http://schemas.openxmlformats.org/presentationml/2006/main">
+  <p:cSld name="Slide 29">
+    <p:spTree>
+      <p:nvGrpSpPr>
+        <p:cNvPr id="1" name=""/>
+        <p:cNvGrpSpPr/>
+        <p:nvPr/>
+      </p:nvGrpSpPr>
+      <p:grpSpPr>
+        <a:xfrm>
+          <a:off x="0" y="0"/>
+          <a:ext cx="0" cy="0"/>
+          <a:chOff x="0" y="0"/>
+          <a:chExt cx="0" cy="0"/>
+        </a:xfrm>
+      </p:grpSpPr>
+      <p:sp>
+        <p:nvSpPr>
+          <p:cNvPr id="2" name="Text 0"/>
+          <p:cNvSpPr/>
+          <p:nvPr>
+            <p:ph idx="100" type="body" hasCustomPrompt="1"/>
+          </p:nvPr>
+        </p:nvSpPr>
+        <p:spPr>
+          <a:xfrm>
+            <a:off x="685800" y="502920"/>
+            <a:ext cx="10817352" cy="274320"/>
+          </a:xfrm>
+          <a:prstGeom prst="rect">
+            <a:avLst/>
+          </a:prstGeom>
+          <a:noFill/>
+          <a:ln/>
+        </p:spPr>
+        <p:txBody>
+          <a:bodyPr wrap="square" lIns="0" tIns="0" rIns="0" bIns="0" rtlCol="0" anchor="t"/>
+          <a:lstStyle/>
+          <a:p>
+            <a:pPr algn="l" indent="0" marL="0">
+              <a:buNone/>
+            </a:pPr>
+            <a:r>
+              <a:rPr lang="en-US" sz="1100" spc="300" kern="0" dirty="0">
+                <a:solidFill>
+                  <a:schemeClr val="tx1"/>
+                </a:solidFill>
+              </a:rPr>
+              <a:t>BACKUP · PAEDIATRIC MDS · CH. 75</a:t>
+            </a:r>
+            <a:endParaRPr lang="en-US" sz="1100" dirty="0"/>
+          </a:p>
+        </p:txBody>
+      </p:sp>
+      <p:sp>
+        <p:nvSpPr>
+          <p:cNvPr id="3" name="Text 0"/>
+          <p:cNvSpPr/>
+          <p:nvPr>
+            <p:ph idx="101" type="title" hasCustomPrompt="1"/>
+          </p:nvPr>
+        </p:nvSpPr>
+        <p:spPr>
+          <a:xfrm>
+            <a:off x="685800" y="822960"/>
+            <a:ext cx="10817352" cy="1143000"/>
+          </a:xfrm>
+          <a:prstGeom prst="rect">
+            <a:avLst/>
+          </a:prstGeom>
+          <a:noFill/>
+          <a:ln/>
+        </p:spPr>
+        <p:txBody>
+          <a:bodyPr wrap="square" lIns="0" tIns="0" rIns="0" bIns="0" rtlCol="0" anchor="t"/>
+          <a:lstStyle/>
+          <a:p>
+            <a:pPr algn="l" indent="0" marL="0">
+              <a:buNone/>
+            </a:pPr>
+            <a:r>
+              <a:rPr lang="en-US" sz="3600" b="1" dirty="0">
+                <a:solidFill>
+                  <a:schemeClr val="tx1"/>
+                </a:solidFill>
+              </a:rPr>
+              <a:t>Children with MDS are transplanted by blasts, karyotype and cellularity</a:t>
+            </a:r>
+            <a:endParaRPr lang="en-US" sz="3600" dirty="0"/>
+          </a:p>
+        </p:txBody>
+      </p:sp>
+      <p:sp>
+        <p:nvSpPr>
+          <p:cNvPr id="4" name="Text 0"/>
+          <p:cNvSpPr/>
+          <p:nvPr>
+            <p:ph idx="102" type="body" hasCustomPrompt="1"/>
+          </p:nvPr>
+        </p:nvSpPr>
+        <p:spPr>
+          <a:xfrm>
+            <a:off x="685800" y="6080760"/>
+            <a:ext cx="9966960" cy="457200"/>
+          </a:xfrm>
+          <a:prstGeom prst="rect">
+            <a:avLst/>
+          </a:prstGeom>
+          <a:noFill/>
+          <a:ln/>
+        </p:spPr>
+        <p:txBody>
+          <a:bodyPr wrap="square" lIns="0" tIns="0" rIns="0" bIns="0" rtlCol="0" anchor="t"/>
+          <a:lstStyle/>
+          <a:p>
+            <a:pPr algn="l" indent="0" marL="0">
+              <a:buNone/>
+            </a:pPr>
+            <a:r>
+              <a:rPr lang="en-US" sz="1000" dirty="0">
+                <a:solidFill>
+                  <a:schemeClr val="tx1"/>
+                </a:solidFill>
+              </a:rPr>
+              <a:t>Niemeyer CM, Strahm B. EBMT Handbook 8th ed. 2024; Ch. 75</a:t>
+            </a:r>
+            <a:endParaRPr lang="en-US" sz="1000" dirty="0"/>
+          </a:p>
+        </p:txBody>
+      </p:sp>
+      <p:graphicFrame>
+        <p:nvGraphicFramePr>
+          <p:cNvPr id="30" name="Table 96"/>
+          <p:cNvGraphicFramePr>
+            <a:graphicFrameLocks noGrp="1"/>
+          </p:cNvGraphicFramePr>
+          <p:nvPr>
+            <p:extLst>
+              <p:ext uri="{D42A27DB-BD31-4B8C-83A1-F6EECF244321}">
+                <p14:modId xmlns:p14="http://schemas.microsoft.com/office/powerpoint/2010/main" val="1579011935"/>
+              </p:ext>
+            </p:extLst>
+          </p:nvPr>
+        </p:nvGraphicFramePr>
+        <p:xfrm>
+          <a:off x="685800" y="2240280"/>
+          <a:ext cx="10817352" cy="914400"/>
+        </p:xfrm>
+        <a:graphic>
+          <a:graphicData uri="http://schemas.openxmlformats.org/drawingml/2006/table">
+            <a:tbl>
+              <a:tblPr/>
+              <a:tblGrid>
+                <a:gridCol w="4480560"/>
+                <a:gridCol w="6336792"/>
+              </a:tblGrid>
+              <a:tr h="0">
+                <a:tc>
+                  <a:txBody>
+                    <a:bodyPr/>
+                    <a:lstStyle/>
+                    <a:p>
+                      <a:pPr indent="0" marL="0">
+                        <a:buNone/>
+                      </a:pPr>
+                      <a:r>
+                        <a:rPr lang="en-US" sz="1500" b="1" dirty="0">
+                          <a:solidFill>
+                            <a:schemeClr val="tx1"/>
+                          </a:solidFill>
+                        </a:rPr>
+                        <a:t>Setting</a:t>
+                      </a:r>
+                      <a:endParaRPr lang="en-US" sz="1500" dirty="0"/>
+                    </a:p>
+                  </a:txBody>
+                  <a:tcPr marL="25400" marR="101600" marT="63500" marB="63500" anchor="ctr">
+                    <a:lnL w="0" cap="flat" cmpd="sng" algn="ctr">
+                      <a:noFill/>
+                    </a:lnL>
+                    <a:lnR w="0" cap="flat" cmpd="sng" algn="ctr">
+                      <a:noFill/>
+                    </a:lnR>
+                    <a:lnT w="19050" cap="flat" cmpd="sng" algn="ctr">
+                      <a:solidFill>
+                        <a:srgbClr val="000000"/>
+                      </a:solidFill>
+                      <a:prstDash val="solid"/>
+                      <a:round/>
+                      <a:headEnd type="none" w="med" len="med"/>
+                      <a:tailEnd type="none" w="med" len="med"/>
+                    </a:lnT>
+                    <a:lnB w="6350" cap="flat" cmpd="sng" algn="ctr">
+                      <a:solidFill>
+                        <a:srgbClr val="000000"/>
+                      </a:solidFill>
+                      <a:prstDash val="solid"/>
+                      <a:round/>
+                      <a:headEnd type="none" w="med" len="med"/>
+                      <a:tailEnd type="none" w="med" len="med"/>
+                    </a:lnB>
+                  </a:tcPr>
+                </a:tc>
+                <a:tc>
+                  <a:txBody>
+                    <a:bodyPr/>
+                    <a:lstStyle/>
+                    <a:p>
+                      <a:pPr indent="0" marL="0">
+                        <a:buNone/>
+                      </a:pPr>
+                      <a:r>
+                        <a:rPr lang="en-US" sz="1500" b="1" dirty="0">
+                          <a:solidFill>
+                            <a:schemeClr val="tx1"/>
+                          </a:solidFill>
+                        </a:rPr>
+                        <a:t>Chapter guidance</a:t>
+                      </a:r>
+                      <a:endParaRPr lang="en-US" sz="1500" dirty="0"/>
+                    </a:p>
+                  </a:txBody>
+                  <a:tcPr marL="25400" marR="101600" marT="63500" marB="63500" anchor="ctr">
+                    <a:lnL w="0" cap="flat" cmpd="sng" algn="ctr">
+                      <a:noFill/>
+                    </a:lnL>
+                    <a:lnR w="0" cap="flat" cmpd="sng" algn="ctr">
+                      <a:noFill/>
+                    </a:lnR>
+                    <a:lnT w="19050" cap="flat" cmpd="sng" algn="ctr">
+                      <a:solidFill>
+                        <a:srgbClr val="000000"/>
+                      </a:solidFill>
+                      <a:prstDash val="solid"/>
+                      <a:round/>
+                      <a:headEnd type="none" w="med" len="med"/>
+                      <a:tailEnd type="none" w="med" len="med"/>
+                    </a:lnT>
+                    <a:lnB w="6350" cap="flat" cmpd="sng" algn="ctr">
+                      <a:solidFill>
+                        <a:srgbClr val="000000"/>
+                      </a:solidFill>
+                      <a:prstDash val="solid"/>
+                      <a:round/>
+                      <a:headEnd type="none" w="med" len="med"/>
+                      <a:tailEnd type="none" w="med" len="med"/>
+                    </a:lnB>
+                  </a:tcPr>
+                </a:tc>
+              </a:tr>
+              <a:tr h="0">
+                <a:tc>
+                  <a:txBody>
+                    <a:bodyPr/>
+                    <a:lstStyle/>
+                    <a:p>
+                      <a:pPr indent="0" marL="0">
+                        <a:buNone/>
+                      </a:pPr>
+                      <a:r>
+                        <a:rPr lang="en-US" sz="1500" dirty="0">
+                          <a:solidFill>
+                            <a:schemeClr val="tx1"/>
+                          </a:solidFill>
+                        </a:rPr>
+                        <a:t>RCC with −7, del(7q) or ≥ 2 aberrations</a:t>
+                      </a:r>
+                      <a:endParaRPr lang="en-US" sz="1500" dirty="0"/>
+                    </a:p>
+                  </a:txBody>
+                  <a:tcPr marL="25400" marR="101600" marT="63500" marB="63500" anchor="ctr">
+                    <a:lnL w="0" cap="flat" cmpd="sng" algn="ctr">
+                      <a:noFill/>
+                    </a:lnL>
+                    <a:lnR w="0" cap="flat" cmpd="sng" algn="ctr">
+                      <a:noFill/>
+                    </a:lnR>
+                    <a:lnT w="0" cap="flat" cmpd="sng" algn="ctr">
+                      <a:noFill/>
+                    </a:lnT>
+                    <a:lnB w="6350" cap="flat" cmpd="sng" algn="ctr">
+                      <a:solidFill>
+                        <a:srgbClr val="000000"/>
+                      </a:solidFill>
+                      <a:prstDash val="solid"/>
+                      <a:round/>
+                      <a:headEnd type="none" w="med" len="med"/>
+                      <a:tailEnd type="none" w="med" len="med"/>
+                    </a:lnB>
+                  </a:tcPr>
+                </a:tc>
+                <a:tc>
+                  <a:txBody>
+                    <a:bodyPr/>
+                    <a:lstStyle/>
+                    <a:p>
+                      <a:pPr indent="0" marL="0">
+                        <a:buNone/>
+                      </a:pPr>
+                      <a:r>
+                        <a:rPr lang="en-US" sz="1500" dirty="0">
+                          <a:solidFill>
+                            <a:schemeClr val="tx1"/>
+                          </a:solidFill>
+                        </a:rPr>
+                        <a:t>Transplant early; MAC (TREO-based); OS ~90%</a:t>
+                      </a:r>
+                      <a:endParaRPr lang="en-US" sz="1500" dirty="0"/>
+                    </a:p>
+                  </a:txBody>
+                  <a:tcPr marL="25400" marR="101600" marT="63500" marB="63500" anchor="ctr">
+                    <a:lnL w="0" cap="flat" cmpd="sng" algn="ctr">
+                      <a:noFill/>
+                    </a:lnL>
+                    <a:lnR w="0" cap="flat" cmpd="sng" algn="ctr">
+                      <a:noFill/>
+                    </a:lnR>
+                    <a:lnT w="0" cap="flat" cmpd="sng" algn="ctr">
+                      <a:noFill/>
+                    </a:lnT>
+                    <a:lnB w="6350" cap="flat" cmpd="sng" algn="ctr">
+                      <a:solidFill>
+                        <a:srgbClr val="000000"/>
+                      </a:solidFill>
+                      <a:prstDash val="solid"/>
+                      <a:round/>
+                      <a:headEnd type="none" w="med" len="med"/>
+                      <a:tailEnd type="none" w="med" len="med"/>
+                    </a:lnB>
+                  </a:tcPr>
+                </a:tc>
+              </a:tr>
+              <a:tr h="0">
+                <a:tc>
+                  <a:txBody>
+                    <a:bodyPr/>
+                    <a:lstStyle/>
+                    <a:p>
+                      <a:pPr indent="0" marL="0">
+                        <a:buNone/>
+                      </a:pPr>
+                      <a:r>
+                        <a:rPr lang="en-US" sz="1500" dirty="0">
+                          <a:solidFill>
+                            <a:schemeClr val="tx1"/>
+                          </a:solidFill>
+                        </a:rPr>
+                        <a:t>Hypocellular RCC, normal karyotype</a:t>
+                      </a:r>
+                      <a:endParaRPr lang="en-US" sz="1500" dirty="0"/>
+                    </a:p>
+                  </a:txBody>
+                  <a:tcPr marL="25400" marR="101600" marT="63500" marB="63500" anchor="ctr">
+                    <a:lnL w="0" cap="flat" cmpd="sng" algn="ctr">
+                      <a:noFill/>
+                    </a:lnL>
+                    <a:lnR w="0" cap="flat" cmpd="sng" algn="ctr">
+                      <a:noFill/>
+                    </a:lnR>
+                    <a:lnT w="0" cap="flat" cmpd="sng" algn="ctr">
+                      <a:noFill/>
+                    </a:lnT>
+                    <a:lnB w="6350" cap="flat" cmpd="sng" algn="ctr">
+                      <a:solidFill>
+                        <a:srgbClr val="000000"/>
+                      </a:solidFill>
+                      <a:prstDash val="solid"/>
+                      <a:round/>
+                      <a:headEnd type="none" w="med" len="med"/>
+                      <a:tailEnd type="none" w="med" len="med"/>
+                    </a:lnB>
+                  </a:tcPr>
+                </a:tc>
+                <a:tc>
+                  <a:txBody>
+                    <a:bodyPr/>
+                    <a:lstStyle/>
+                    <a:p>
+                      <a:pPr indent="0" marL="0">
+                        <a:buNone/>
+                      </a:pPr>
+                      <a:r>
+                        <a:rPr lang="en-US" sz="1500" dirty="0">
+                          <a:solidFill>
+                            <a:schemeClr val="tx1"/>
+                          </a:solidFill>
+                        </a:rPr>
+                        <a:t>RIC: TT/FLU OS 94% (Strahm 2017); now TREO/FLU;</a:t>
+                      </a:r>
+                      <a:endParaRPr lang="en-US" sz="1500" dirty="0"/>
+                    </a:p>
+                    <a:p>
+                      <a:pPr indent="0" marL="0">
+                        <a:buNone/>
+                      </a:pPr>
+                      <a:r>
+                        <a:rPr lang="en-US" sz="1500" dirty="0">
+                          <a:solidFill>
+                            <a:schemeClr val="tx1"/>
+                          </a:solidFill>
+                        </a:rPr>
+                        <a:t>BM graft</a:t>
+                      </a:r>
+                      <a:endParaRPr lang="en-US" sz="1500" dirty="0"/>
+                    </a:p>
+                  </a:txBody>
+                  <a:tcPr marL="25400" marR="101600" marT="63500" marB="63500" anchor="ctr">
+                    <a:lnL w="0" cap="flat" cmpd="sng" algn="ctr">
+                      <a:noFill/>
+                    </a:lnL>
+                    <a:lnR w="0" cap="flat" cmpd="sng" algn="ctr">
+                      <a:noFill/>
+                    </a:lnR>
+                    <a:lnT w="0" cap="flat" cmpd="sng" algn="ctr">
+                      <a:noFill/>
+                    </a:lnT>
+                    <a:lnB w="6350" cap="flat" cmpd="sng" algn="ctr">
+                      <a:solidFill>
+                        <a:srgbClr val="000000"/>
+                      </a:solidFill>
+                      <a:prstDash val="solid"/>
+                      <a:round/>
+                      <a:headEnd type="none" w="med" len="med"/>
+                      <a:tailEnd type="none" w="med" len="med"/>
+                    </a:lnB>
+                  </a:tcPr>
+                </a:tc>
+              </a:tr>
+              <a:tr h="0">
+                <a:tc>
+                  <a:txBody>
+                    <a:bodyPr/>
+                    <a:lstStyle/>
+                    <a:p>
+                      <a:pPr indent="0" marL="0">
+                        <a:buNone/>
+                      </a:pPr>
+                      <a:r>
+                        <a:rPr lang="en-US" sz="1500" dirty="0">
+                          <a:solidFill>
+                            <a:schemeClr val="tx1"/>
+                          </a:solidFill>
+                        </a:rPr>
+                        <a:t>Mild RCC, no −7, ANC &gt; 1 × 10⁹/L</a:t>
+                      </a:r>
+                      <a:endParaRPr lang="en-US" sz="1500" dirty="0"/>
+                    </a:p>
+                  </a:txBody>
+                  <a:tcPr marL="25400" marR="101600" marT="63500" marB="63500" anchor="ctr">
+                    <a:lnL w="0" cap="flat" cmpd="sng" algn="ctr">
+                      <a:noFill/>
+                    </a:lnL>
+                    <a:lnR w="0" cap="flat" cmpd="sng" algn="ctr">
+                      <a:noFill/>
+                    </a:lnR>
+                    <a:lnT w="0" cap="flat" cmpd="sng" algn="ctr">
+                      <a:noFill/>
+                    </a:lnT>
+                    <a:lnB w="6350" cap="flat" cmpd="sng" algn="ctr">
+                      <a:solidFill>
+                        <a:srgbClr val="000000"/>
+                      </a:solidFill>
+                      <a:prstDash val="solid"/>
+                      <a:round/>
+                      <a:headEnd type="none" w="med" len="med"/>
+                      <a:tailEnd type="none" w="med" len="med"/>
+                    </a:lnB>
+                  </a:tcPr>
+                </a:tc>
+                <a:tc>
+                  <a:txBody>
+                    <a:bodyPr/>
+                    <a:lstStyle/>
+                    <a:p>
+                      <a:pPr indent="0" marL="0">
+                        <a:buNone/>
+                      </a:pPr>
+                      <a:r>
+                        <a:rPr lang="en-US" sz="1500" dirty="0">
+                          <a:solidFill>
+                            <a:schemeClr val="tx1"/>
+                          </a:solidFill>
+                        </a:rPr>
+                        <a:t>Watch and observe</a:t>
+                      </a:r>
+                      <a:endParaRPr lang="en-US" sz="1500" dirty="0"/>
+                    </a:p>
+                  </a:txBody>
+                  <a:tcPr marL="25400" marR="101600" marT="63500" marB="63500" anchor="ctr">
+                    <a:lnL w="0" cap="flat" cmpd="sng" algn="ctr">
+                      <a:noFill/>
+                    </a:lnL>
+                    <a:lnR w="0" cap="flat" cmpd="sng" algn="ctr">
+                      <a:noFill/>
+                    </a:lnR>
+                    <a:lnT w="0" cap="flat" cmpd="sng" algn="ctr">
+                      <a:noFill/>
+                    </a:lnT>
+                    <a:lnB w="6350" cap="flat" cmpd="sng" algn="ctr">
+                      <a:solidFill>
+                        <a:srgbClr val="000000"/>
+                      </a:solidFill>
+                      <a:prstDash val="solid"/>
+                      <a:round/>
+                      <a:headEnd type="none" w="med" len="med"/>
+                      <a:tailEnd type="none" w="med" len="med"/>
+                    </a:lnB>
+                  </a:tcPr>
+                </a:tc>
+              </a:tr>
+              <a:tr h="0">
+                <a:tc>
+                  <a:txBody>
+                    <a:bodyPr/>
+                    <a:lstStyle/>
+                    <a:p>
+                      <a:pPr indent="0" marL="0">
+                        <a:buNone/>
+                      </a:pPr>
+                      <a:r>
+                        <a:rPr lang="en-US" sz="1500" dirty="0">
+                          <a:solidFill>
+                            <a:schemeClr val="tx1"/>
+                          </a:solidFill>
+                        </a:rPr>
+                        <a:t>Primary MDS-EB</a:t>
+                      </a:r>
+                      <a:endParaRPr lang="en-US" sz="1500" dirty="0"/>
+                    </a:p>
+                  </a:txBody>
+                  <a:tcPr marL="25400" marR="101600" marT="63500" marB="63500" anchor="ctr">
+                    <a:lnL w="0" cap="flat" cmpd="sng" algn="ctr">
+                      <a:noFill/>
+                    </a:lnL>
+                    <a:lnR w="0" cap="flat" cmpd="sng" algn="ctr">
+                      <a:noFill/>
+                    </a:lnR>
+                    <a:lnT w="0" cap="flat" cmpd="sng" algn="ctr">
+                      <a:noFill/>
+                    </a:lnT>
+                    <a:lnB w="6350" cap="flat" cmpd="sng" algn="ctr">
+                      <a:solidFill>
+                        <a:srgbClr val="000000"/>
+                      </a:solidFill>
+                      <a:prstDash val="solid"/>
+                      <a:round/>
+                      <a:headEnd type="none" w="med" len="med"/>
+                      <a:tailEnd type="none" w="med" len="med"/>
+                    </a:lnB>
+                  </a:tcPr>
+                </a:tc>
+                <a:tc>
+                  <a:txBody>
+                    <a:bodyPr/>
+                    <a:lstStyle/>
+                    <a:p>
+                      <a:pPr indent="0" marL="0">
+                        <a:buNone/>
+                      </a:pPr>
+                      <a:r>
+                        <a:rPr lang="en-US" sz="1500" dirty="0">
+                          <a:solidFill>
+                            <a:schemeClr val="tx1"/>
+                          </a:solidFill>
+                        </a:rPr>
+                        <a:t>MAC BU/CY/MEL: 5-y OS 63% (Strahm 2011)</a:t>
+                      </a:r>
+                      <a:endParaRPr lang="en-US" sz="1500" dirty="0"/>
+                    </a:p>
+                  </a:txBody>
+                  <a:tcPr marL="25400" marR="101600" marT="63500" marB="63500" anchor="ctr">
+                    <a:lnL w="0" cap="flat" cmpd="sng" algn="ctr">
+                      <a:noFill/>
+                    </a:lnL>
+                    <a:lnR w="0" cap="flat" cmpd="sng" algn="ctr">
+                      <a:noFill/>
+                    </a:lnR>
+                    <a:lnT w="0" cap="flat" cmpd="sng" algn="ctr">
+                      <a:noFill/>
+                    </a:lnT>
+                    <a:lnB w="6350" cap="flat" cmpd="sng" algn="ctr">
+                      <a:solidFill>
+                        <a:srgbClr val="000000"/>
+                      </a:solidFill>
+                      <a:prstDash val="solid"/>
+                      <a:round/>
+                      <a:headEnd type="none" w="med" len="med"/>
+                      <a:tailEnd type="none" w="med" len="med"/>
+                    </a:lnB>
+                  </a:tcPr>
+                </a:tc>
+              </a:tr>
+              <a:tr h="0">
+                <a:tc>
+                  <a:txBody>
+                    <a:bodyPr/>
+                    <a:lstStyle/>
+                    <a:p>
+                      <a:pPr indent="0" marL="0">
+                        <a:buNone/>
+                      </a:pPr>
+                      <a:r>
+                        <a:rPr lang="en-US" sz="1500" dirty="0">
+                          <a:solidFill>
+                            <a:schemeClr val="tx1"/>
+                          </a:solidFill>
+                        </a:rPr>
+                        <a:t>UBTF-TD (~1/3 of de novo MDS-EB)</a:t>
+                      </a:r>
+                      <a:endParaRPr lang="en-US" sz="1500" dirty="0"/>
+                    </a:p>
+                  </a:txBody>
+                  <a:tcPr marL="25400" marR="101600" marT="63500" marB="63500" anchor="ctr">
+                    <a:lnL w="0" cap="flat" cmpd="sng" algn="ctr">
+                      <a:noFill/>
+                    </a:lnL>
+                    <a:lnR w="0" cap="flat" cmpd="sng" algn="ctr">
+                      <a:noFill/>
+                    </a:lnR>
+                    <a:lnT w="0" cap="flat" cmpd="sng" algn="ctr">
+                      <a:noFill/>
+                    </a:lnT>
+                    <a:lnB w="6350" cap="flat" cmpd="sng" algn="ctr">
+                      <a:solidFill>
+                        <a:srgbClr val="000000"/>
+                      </a:solidFill>
+                      <a:prstDash val="solid"/>
+                      <a:round/>
+                      <a:headEnd type="none" w="med" len="med"/>
+                      <a:tailEnd type="none" w="med" len="med"/>
+                    </a:lnB>
+                  </a:tcPr>
+                </a:tc>
+                <a:tc>
+                  <a:txBody>
+                    <a:bodyPr/>
+                    <a:lstStyle/>
+                    <a:p>
+                      <a:pPr indent="0" marL="0">
+                        <a:buNone/>
+                      </a:pPr>
+                      <a:r>
+                        <a:rPr lang="en-US" sz="1500" dirty="0">
+                          <a:solidFill>
+                            <a:schemeClr val="tx1"/>
+                          </a:solidFill>
+                        </a:rPr>
+                        <a:t>Poor response to AML-type chemo; worse after HCT</a:t>
+                      </a:r>
+                      <a:endParaRPr lang="en-US" sz="1500" dirty="0"/>
+                    </a:p>
+                  </a:txBody>
+                  <a:tcPr marL="25400" marR="101600" marT="63500" marB="63500" anchor="ctr">
+                    <a:lnL w="0" cap="flat" cmpd="sng" algn="ctr">
+                      <a:noFill/>
+                    </a:lnL>
+                    <a:lnR w="0" cap="flat" cmpd="sng" algn="ctr">
+                      <a:noFill/>
+                    </a:lnR>
+                    <a:lnT w="0" cap="flat" cmpd="sng" algn="ctr">
+                      <a:noFill/>
+                    </a:lnT>
+                    <a:lnB w="6350" cap="flat" cmpd="sng" algn="ctr">
+                      <a:solidFill>
+                        <a:srgbClr val="000000"/>
+                      </a:solidFill>
+                      <a:prstDash val="solid"/>
+                      <a:round/>
+                      <a:headEnd type="none" w="med" len="med"/>
+                      <a:tailEnd type="none" w="med" len="med"/>
+                    </a:lnB>
+                  </a:tcPr>
+                </a:tc>
+              </a:tr>
+              <a:tr h="0">
+                <a:tc>
+                  <a:txBody>
+                    <a:bodyPr/>
+                    <a:lstStyle/>
+                    <a:p>
+                      <a:pPr indent="0" marL="0">
+                        <a:buNone/>
+                      </a:pPr>
+                      <a:r>
+                        <a:rPr lang="en-US" sz="1500" dirty="0">
+                          <a:solidFill>
+                            <a:schemeClr val="tx1"/>
+                          </a:solidFill>
+                        </a:rPr>
+                        <a:t>GATA2 or SAMD9/SAMD9L germline</a:t>
+                      </a:r>
+                      <a:endParaRPr lang="en-US" sz="1500" dirty="0"/>
+                    </a:p>
+                  </a:txBody>
+                  <a:tcPr marL="25400" marR="101600" marT="63500" marB="63500" anchor="ctr">
+                    <a:lnL w="0" cap="flat" cmpd="sng" algn="ctr">
+                      <a:noFill/>
+                    </a:lnL>
+                    <a:lnR w="0" cap="flat" cmpd="sng" algn="ctr">
+                      <a:noFill/>
+                    </a:lnR>
+                    <a:lnT w="0" cap="flat" cmpd="sng" algn="ctr">
+                      <a:noFill/>
+                    </a:lnT>
+                    <a:lnB w="6350" cap="flat" cmpd="sng" algn="ctr">
+                      <a:solidFill>
+                        <a:srgbClr val="000000"/>
+                      </a:solidFill>
+                      <a:prstDash val="solid"/>
+                      <a:round/>
+                      <a:headEnd type="none" w="med" len="med"/>
+                      <a:tailEnd type="none" w="med" len="med"/>
+                    </a:lnB>
+                  </a:tcPr>
+                </a:tc>
+                <a:tc>
+                  <a:txBody>
+                    <a:bodyPr/>
+                    <a:lstStyle/>
+                    <a:p>
+                      <a:pPr indent="0" marL="0">
+                        <a:buNone/>
+                      </a:pPr>
+                      <a:r>
+                        <a:rPr lang="en-US" sz="1500" dirty="0">
+                          <a:solidFill>
+                            <a:schemeClr val="tx1"/>
+                          </a:solidFill>
+                        </a:rPr>
+                        <a:t>Same outcome when stratified; screen family donors</a:t>
+                      </a:r>
+                      <a:endParaRPr lang="en-US" sz="1500" dirty="0"/>
+                    </a:p>
+                  </a:txBody>
+                  <a:tcPr marL="25400" marR="101600" marT="63500" marB="63500" anchor="ctr">
+                    <a:lnL w="0" cap="flat" cmpd="sng" algn="ctr">
+                      <a:noFill/>
+                    </a:lnL>
+                    <a:lnR w="0" cap="flat" cmpd="sng" algn="ctr">
+                      <a:noFill/>
+                    </a:lnR>
+                    <a:lnT w="0" cap="flat" cmpd="sng" algn="ctr">
+                      <a:noFill/>
+                    </a:lnT>
+                    <a:lnB w="6350" cap="flat" cmpd="sng" algn="ctr">
+                      <a:solidFill>
+                        <a:srgbClr val="000000"/>
+                      </a:solidFill>
+                      <a:prstDash val="solid"/>
+                      <a:round/>
+                      <a:headEnd type="none" w="med" len="med"/>
+                      <a:tailEnd type="none" w="med" len="med"/>
+                    </a:lnB>
+                  </a:tcPr>
+                </a:tc>
+              </a:tr>
+              <a:tr h="0">
+                <a:tc>
+                  <a:txBody>
+                    <a:bodyPr/>
+                    <a:lstStyle/>
+                    <a:p>
+                      <a:pPr indent="0" marL="0">
+                        <a:buNone/>
+                      </a:pPr>
+                      <a:r>
+                        <a:rPr lang="en-US" sz="1500" dirty="0">
+                          <a:solidFill>
+                            <a:schemeClr val="tx1"/>
+                          </a:solidFill>
+                        </a:rPr>
+                        <a:t>Therapy-related MDS</a:t>
+                      </a:r>
+                      <a:endParaRPr lang="en-US" sz="1500" dirty="0"/>
+                    </a:p>
+                  </a:txBody>
+                  <a:tcPr marL="25400" marR="101600" marT="63500" marB="63500" anchor="ctr">
+                    <a:lnL w="0" cap="flat" cmpd="sng" algn="ctr">
+                      <a:noFill/>
+                    </a:lnL>
+                    <a:lnR w="0" cap="flat" cmpd="sng" algn="ctr">
+                      <a:noFill/>
+                    </a:lnR>
+                    <a:lnT w="0" cap="flat" cmpd="sng" algn="ctr">
+                      <a:noFill/>
+                    </a:lnT>
+                    <a:lnB w="19050" cap="flat" cmpd="sng" algn="ctr">
+                      <a:solidFill>
+                        <a:srgbClr val="000000"/>
+                      </a:solidFill>
+                      <a:prstDash val="solid"/>
+                      <a:round/>
+                      <a:headEnd type="none" w="med" len="med"/>
+                      <a:tailEnd type="none" w="med" len="med"/>
+                    </a:lnB>
+                  </a:tcPr>
+                </a:tc>
+                <a:tc>
+                  <a:txBody>
+                    <a:bodyPr/>
+                    <a:lstStyle/>
+                    <a:p>
+                      <a:pPr indent="0" marL="0">
+                        <a:buNone/>
+                      </a:pPr>
+                      <a:r>
+                        <a:rPr lang="en-US" sz="1500" dirty="0">
+                          <a:solidFill>
+                            <a:schemeClr val="tx1"/>
+                          </a:solidFill>
+                        </a:rPr>
+                        <a:t>OS ≤ 20% with complex karyotype or TP53;</a:t>
+                      </a:r>
+                      <a:endParaRPr lang="en-US" sz="1500" dirty="0"/>
+                    </a:p>
+                    <a:p>
+                      <a:pPr indent="0" marL="0">
+                        <a:buNone/>
+                      </a:pPr>
+                      <a:r>
+                        <a:rPr lang="en-US" sz="1500" dirty="0">
+                          <a:solidFill>
+                            <a:schemeClr val="tx1"/>
+                          </a:solidFill>
+                        </a:rPr>
+                        <a:t>~50% otherwise</a:t>
+                      </a:r>
+                      <a:endParaRPr lang="en-US" sz="1500" dirty="0"/>
+                    </a:p>
+                  </a:txBody>
+                  <a:tcPr marL="25400" marR="101600" marT="63500" marB="63500" anchor="ctr">
+                    <a:lnL w="0" cap="flat" cmpd="sng" algn="ctr">
+                      <a:noFill/>
+                    </a:lnL>
+                    <a:lnR w="0" cap="flat" cmpd="sng" algn="ctr">
+                      <a:noFill/>
+                    </a:lnR>
+                    <a:lnT w="0" cap="flat" cmpd="sng" algn="ctr">
+                      <a:noFill/>
+                    </a:lnT>
+                    <a:lnB w="19050" cap="flat" cmpd="sng" algn="ctr">
+                      <a:solidFill>
+                        <a:srgbClr val="000000"/>
+                      </a:solidFill>
+                      <a:prstDash val="solid"/>
+                      <a:round/>
+                      <a:headEnd type="none" w="med" len="med"/>
+                      <a:tailEnd type="none" w="med" len="med"/>
+                    </a:lnB>
+                  </a:tcPr>
+                </a:tc>
+              </a:tr>
+            </a:tbl>
+          </a:graphicData>
+        </a:graphic>
+      </p:graphicFrame>
+      <p:sp>
+        <p:nvSpPr>
+          <p:cNvPr id="25" name="Slide Number Placeholder 0"/>
+          <p:cNvSpPr>
+            <a:spLocks noGrp="1"/>
+          </p:cNvSpPr>
+          <p:nvPr>
+            <p:ph type="sldNum" sz="quarter" idx="4294967295"/>
+          </p:nvPr>
+        </p:nvSpPr>
+        <p:spPr>
+          <a:xfrm>
+            <a:off x="10972800" y="6080760"/>
+            <a:ext cx="530352" cy="274320"/>
+          </a:xfrm>
+          <a:prstGeom prst="rect">
+            <a:avLst/>
+          </a:prstGeom>
+          <a:extLst>
+            <a:ext uri="{C572A759-6A51-4108-AA02-DFA0A04FC94B}">
+              <ma14:wrappingTextBoxFlag xmlns:ma14="http://schemas.microsoft.com/office/mac/drawingml/2011/main" val="0"/>
+            </a:ext>
+          </a:extLst>
+        </p:spPr>
+        <p:txBody>
+          <a:bodyPr/>
+          <a:lstStyle>
+            <a:lvl1pPr>
+              <a:defRPr sz="1000">
+                <a:solidFill>
+                  <a:schemeClr val="tx1"/>
+                </a:solidFill>
+              </a:defRPr>
+            </a:lvl1pPr>
+          </a:lstStyle>
+          <a:p>
+            <a:pPr algn="r"/>
+            <a:fld id="{F7021451-1387-4CA6-816F-3879F97B5CBC}" type="slidenum">
+              <a:rPr b="0" lang="en-US"/>
               <a:t>29</a:t>
             </a:fld>
             <a:endParaRPr lang="en-US"/>
@@ -19853,7 +20453,7 @@
                   <a:schemeClr val="tx1"/>
                 </a:solidFill>
               </a:rPr>
-              <a:t>BACKUP · PAEDIATRIC MDS · CH. 75</a:t>
+              <a:t>BACKUP · JMML · CH. 75 (TABLE 75.1)</a:t>
             </a:r>
             <a:endParaRPr lang="en-US" sz="1100" dirty="0"/>
           </a:p>
@@ -19891,7 +20491,7 @@
                   <a:schemeClr val="tx1"/>
                 </a:solidFill>
               </a:rPr>
-              <a:t>Children with MDS are transplanted by blasts, karyotype and cellularity</a:t>
+              <a:t>JMML genotype predicts who needs HCT; about 80% do</a:t>
             </a:r>
             <a:endParaRPr lang="en-US" sz="3600" dirty="0"/>
           </a:p>
@@ -19937,917 +20537,7 @@
       </p:sp>
       <p:graphicFrame>
         <p:nvGraphicFramePr>
-          <p:cNvPr id="31" name="Table 98"/>
-          <p:cNvGraphicFramePr>
-            <a:graphicFrameLocks noGrp="1"/>
-          </p:cNvGraphicFramePr>
-          <p:nvPr>
-            <p:extLst>
-              <p:ext uri="{D42A27DB-BD31-4B8C-83A1-F6EECF244321}">
-                <p14:modId xmlns:p14="http://schemas.microsoft.com/office/powerpoint/2010/main" val="1579011935"/>
-              </p:ext>
-            </p:extLst>
-          </p:nvPr>
-        </p:nvGraphicFramePr>
-        <p:xfrm>
-          <a:off x="685800" y="2240280"/>
-          <a:ext cx="10817352" cy="914400"/>
-        </p:xfrm>
-        <a:graphic>
-          <a:graphicData uri="http://schemas.openxmlformats.org/drawingml/2006/table">
-            <a:tbl>
-              <a:tblPr/>
-              <a:tblGrid>
-                <a:gridCol w="4480560"/>
-                <a:gridCol w="6336792"/>
-              </a:tblGrid>
-              <a:tr h="0">
-                <a:tc>
-                  <a:txBody>
-                    <a:bodyPr/>
-                    <a:lstStyle/>
-                    <a:p>
-                      <a:pPr indent="0" marL="0">
-                        <a:buNone/>
-                      </a:pPr>
-                      <a:r>
-                        <a:rPr lang="en-US" sz="1500" b="1" dirty="0">
-                          <a:solidFill>
-                            <a:schemeClr val="tx1"/>
-                          </a:solidFill>
-                        </a:rPr>
-                        <a:t>Setting</a:t>
-                      </a:r>
-                      <a:endParaRPr lang="en-US" sz="1500" dirty="0"/>
-                    </a:p>
-                  </a:txBody>
-                  <a:tcPr marL="25400" marR="101600" marT="63500" marB="63500" anchor="ctr">
-                    <a:lnL w="0" cap="flat" cmpd="sng" algn="ctr">
-                      <a:noFill/>
-                    </a:lnL>
-                    <a:lnR w="0" cap="flat" cmpd="sng" algn="ctr">
-                      <a:noFill/>
-                    </a:lnR>
-                    <a:lnT w="19050" cap="flat" cmpd="sng" algn="ctr">
-                      <a:solidFill>
-                        <a:srgbClr val="000000"/>
-                      </a:solidFill>
-                      <a:prstDash val="solid"/>
-                      <a:round/>
-                      <a:headEnd type="none" w="med" len="med"/>
-                      <a:tailEnd type="none" w="med" len="med"/>
-                    </a:lnT>
-                    <a:lnB w="6350" cap="flat" cmpd="sng" algn="ctr">
-                      <a:solidFill>
-                        <a:srgbClr val="000000"/>
-                      </a:solidFill>
-                      <a:prstDash val="solid"/>
-                      <a:round/>
-                      <a:headEnd type="none" w="med" len="med"/>
-                      <a:tailEnd type="none" w="med" len="med"/>
-                    </a:lnB>
-                  </a:tcPr>
-                </a:tc>
-                <a:tc>
-                  <a:txBody>
-                    <a:bodyPr/>
-                    <a:lstStyle/>
-                    <a:p>
-                      <a:pPr indent="0" marL="0">
-                        <a:buNone/>
-                      </a:pPr>
-                      <a:r>
-                        <a:rPr lang="en-US" sz="1500" b="1" dirty="0">
-                          <a:solidFill>
-                            <a:schemeClr val="tx1"/>
-                          </a:solidFill>
-                        </a:rPr>
-                        <a:t>Chapter guidance</a:t>
-                      </a:r>
-                      <a:endParaRPr lang="en-US" sz="1500" dirty="0"/>
-                    </a:p>
-                  </a:txBody>
-                  <a:tcPr marL="25400" marR="101600" marT="63500" marB="63500" anchor="ctr">
-                    <a:lnL w="0" cap="flat" cmpd="sng" algn="ctr">
-                      <a:noFill/>
-                    </a:lnL>
-                    <a:lnR w="0" cap="flat" cmpd="sng" algn="ctr">
-                      <a:noFill/>
-                    </a:lnR>
-                    <a:lnT w="19050" cap="flat" cmpd="sng" algn="ctr">
-                      <a:solidFill>
-                        <a:srgbClr val="000000"/>
-                      </a:solidFill>
-                      <a:prstDash val="solid"/>
-                      <a:round/>
-                      <a:headEnd type="none" w="med" len="med"/>
-                      <a:tailEnd type="none" w="med" len="med"/>
-                    </a:lnT>
-                    <a:lnB w="6350" cap="flat" cmpd="sng" algn="ctr">
-                      <a:solidFill>
-                        <a:srgbClr val="000000"/>
-                      </a:solidFill>
-                      <a:prstDash val="solid"/>
-                      <a:round/>
-                      <a:headEnd type="none" w="med" len="med"/>
-                      <a:tailEnd type="none" w="med" len="med"/>
-                    </a:lnB>
-                  </a:tcPr>
-                </a:tc>
-              </a:tr>
-              <a:tr h="0">
-                <a:tc>
-                  <a:txBody>
-                    <a:bodyPr/>
-                    <a:lstStyle/>
-                    <a:p>
-                      <a:pPr indent="0" marL="0">
-                        <a:buNone/>
-                      </a:pPr>
-                      <a:r>
-                        <a:rPr lang="en-US" sz="1500" dirty="0">
-                          <a:solidFill>
-                            <a:schemeClr val="tx1"/>
-                          </a:solidFill>
-                        </a:rPr>
-                        <a:t>RCC with −7, del(7q) or ≥ 2 aberrations</a:t>
-                      </a:r>
-                      <a:endParaRPr lang="en-US" sz="1500" dirty="0"/>
-                    </a:p>
-                  </a:txBody>
-                  <a:tcPr marL="25400" marR="101600" marT="63500" marB="63500" anchor="ctr">
-                    <a:lnL w="0" cap="flat" cmpd="sng" algn="ctr">
-                      <a:noFill/>
-                    </a:lnL>
-                    <a:lnR w="0" cap="flat" cmpd="sng" algn="ctr">
-                      <a:noFill/>
-                    </a:lnR>
-                    <a:lnT w="0" cap="flat" cmpd="sng" algn="ctr">
-                      <a:noFill/>
-                    </a:lnT>
-                    <a:lnB w="6350" cap="flat" cmpd="sng" algn="ctr">
-                      <a:solidFill>
-                        <a:srgbClr val="000000"/>
-                      </a:solidFill>
-                      <a:prstDash val="solid"/>
-                      <a:round/>
-                      <a:headEnd type="none" w="med" len="med"/>
-                      <a:tailEnd type="none" w="med" len="med"/>
-                    </a:lnB>
-                  </a:tcPr>
-                </a:tc>
-                <a:tc>
-                  <a:txBody>
-                    <a:bodyPr/>
-                    <a:lstStyle/>
-                    <a:p>
-                      <a:pPr indent="0" marL="0">
-                        <a:buNone/>
-                      </a:pPr>
-                      <a:r>
-                        <a:rPr lang="en-US" sz="1500" dirty="0">
-                          <a:solidFill>
-                            <a:schemeClr val="tx1"/>
-                          </a:solidFill>
-                        </a:rPr>
-                        <a:t>Transplant early; MAC (TREO-based); OS ~90%</a:t>
-                      </a:r>
-                      <a:endParaRPr lang="en-US" sz="1500" dirty="0"/>
-                    </a:p>
-                  </a:txBody>
-                  <a:tcPr marL="25400" marR="101600" marT="63500" marB="63500" anchor="ctr">
-                    <a:lnL w="0" cap="flat" cmpd="sng" algn="ctr">
-                      <a:noFill/>
-                    </a:lnL>
-                    <a:lnR w="0" cap="flat" cmpd="sng" algn="ctr">
-                      <a:noFill/>
-                    </a:lnR>
-                    <a:lnT w="0" cap="flat" cmpd="sng" algn="ctr">
-                      <a:noFill/>
-                    </a:lnT>
-                    <a:lnB w="6350" cap="flat" cmpd="sng" algn="ctr">
-                      <a:solidFill>
-                        <a:srgbClr val="000000"/>
-                      </a:solidFill>
-                      <a:prstDash val="solid"/>
-                      <a:round/>
-                      <a:headEnd type="none" w="med" len="med"/>
-                      <a:tailEnd type="none" w="med" len="med"/>
-                    </a:lnB>
-                  </a:tcPr>
-                </a:tc>
-              </a:tr>
-              <a:tr h="0">
-                <a:tc>
-                  <a:txBody>
-                    <a:bodyPr/>
-                    <a:lstStyle/>
-                    <a:p>
-                      <a:pPr indent="0" marL="0">
-                        <a:buNone/>
-                      </a:pPr>
-                      <a:r>
-                        <a:rPr lang="en-US" sz="1500" dirty="0">
-                          <a:solidFill>
-                            <a:schemeClr val="tx1"/>
-                          </a:solidFill>
-                        </a:rPr>
-                        <a:t>Hypocellular RCC, normal karyotype</a:t>
-                      </a:r>
-                      <a:endParaRPr lang="en-US" sz="1500" dirty="0"/>
-                    </a:p>
-                  </a:txBody>
-                  <a:tcPr marL="25400" marR="101600" marT="63500" marB="63500" anchor="ctr">
-                    <a:lnL w="0" cap="flat" cmpd="sng" algn="ctr">
-                      <a:noFill/>
-                    </a:lnL>
-                    <a:lnR w="0" cap="flat" cmpd="sng" algn="ctr">
-                      <a:noFill/>
-                    </a:lnR>
-                    <a:lnT w="0" cap="flat" cmpd="sng" algn="ctr">
-                      <a:noFill/>
-                    </a:lnT>
-                    <a:lnB w="6350" cap="flat" cmpd="sng" algn="ctr">
-                      <a:solidFill>
-                        <a:srgbClr val="000000"/>
-                      </a:solidFill>
-                      <a:prstDash val="solid"/>
-                      <a:round/>
-                      <a:headEnd type="none" w="med" len="med"/>
-                      <a:tailEnd type="none" w="med" len="med"/>
-                    </a:lnB>
-                  </a:tcPr>
-                </a:tc>
-                <a:tc>
-                  <a:txBody>
-                    <a:bodyPr/>
-                    <a:lstStyle/>
-                    <a:p>
-                      <a:pPr indent="0" marL="0">
-                        <a:buNone/>
-                      </a:pPr>
-                      <a:r>
-                        <a:rPr lang="en-US" sz="1500" dirty="0">
-                          <a:solidFill>
-                            <a:schemeClr val="tx1"/>
-                          </a:solidFill>
-                        </a:rPr>
-                        <a:t>RIC: TT/FLU OS 94% (Strahm 2017); now TREO/FLU;</a:t>
-                      </a:r>
-                      <a:endParaRPr lang="en-US" sz="1500" dirty="0"/>
-                    </a:p>
-                    <a:p>
-                      <a:pPr indent="0" marL="0">
-                        <a:buNone/>
-                      </a:pPr>
-                      <a:r>
-                        <a:rPr lang="en-US" sz="1500" dirty="0">
-                          <a:solidFill>
-                            <a:schemeClr val="tx1"/>
-                          </a:solidFill>
-                        </a:rPr>
-                        <a:t>BM graft</a:t>
-                      </a:r>
-                      <a:endParaRPr lang="en-US" sz="1500" dirty="0"/>
-                    </a:p>
-                  </a:txBody>
-                  <a:tcPr marL="25400" marR="101600" marT="63500" marB="63500" anchor="ctr">
-                    <a:lnL w="0" cap="flat" cmpd="sng" algn="ctr">
-                      <a:noFill/>
-                    </a:lnL>
-                    <a:lnR w="0" cap="flat" cmpd="sng" algn="ctr">
-                      <a:noFill/>
-                    </a:lnR>
-                    <a:lnT w="0" cap="flat" cmpd="sng" algn="ctr">
-                      <a:noFill/>
-                    </a:lnT>
-                    <a:lnB w="6350" cap="flat" cmpd="sng" algn="ctr">
-                      <a:solidFill>
-                        <a:srgbClr val="000000"/>
-                      </a:solidFill>
-                      <a:prstDash val="solid"/>
-                      <a:round/>
-                      <a:headEnd type="none" w="med" len="med"/>
-                      <a:tailEnd type="none" w="med" len="med"/>
-                    </a:lnB>
-                  </a:tcPr>
-                </a:tc>
-              </a:tr>
-              <a:tr h="0">
-                <a:tc>
-                  <a:txBody>
-                    <a:bodyPr/>
-                    <a:lstStyle/>
-                    <a:p>
-                      <a:pPr indent="0" marL="0">
-                        <a:buNone/>
-                      </a:pPr>
-                      <a:r>
-                        <a:rPr lang="en-US" sz="1500" dirty="0">
-                          <a:solidFill>
-                            <a:schemeClr val="tx1"/>
-                          </a:solidFill>
-                        </a:rPr>
-                        <a:t>Mild RCC, no −7, ANC &gt; 1 × 10⁹/L</a:t>
-                      </a:r>
-                      <a:endParaRPr lang="en-US" sz="1500" dirty="0"/>
-                    </a:p>
-                  </a:txBody>
-                  <a:tcPr marL="25400" marR="101600" marT="63500" marB="63500" anchor="ctr">
-                    <a:lnL w="0" cap="flat" cmpd="sng" algn="ctr">
-                      <a:noFill/>
-                    </a:lnL>
-                    <a:lnR w="0" cap="flat" cmpd="sng" algn="ctr">
-                      <a:noFill/>
-                    </a:lnR>
-                    <a:lnT w="0" cap="flat" cmpd="sng" algn="ctr">
-                      <a:noFill/>
-                    </a:lnT>
-                    <a:lnB w="6350" cap="flat" cmpd="sng" algn="ctr">
-                      <a:solidFill>
-                        <a:srgbClr val="000000"/>
-                      </a:solidFill>
-                      <a:prstDash val="solid"/>
-                      <a:round/>
-                      <a:headEnd type="none" w="med" len="med"/>
-                      <a:tailEnd type="none" w="med" len="med"/>
-                    </a:lnB>
-                  </a:tcPr>
-                </a:tc>
-                <a:tc>
-                  <a:txBody>
-                    <a:bodyPr/>
-                    <a:lstStyle/>
-                    <a:p>
-                      <a:pPr indent="0" marL="0">
-                        <a:buNone/>
-                      </a:pPr>
-                      <a:r>
-                        <a:rPr lang="en-US" sz="1500" dirty="0">
-                          <a:solidFill>
-                            <a:schemeClr val="tx1"/>
-                          </a:solidFill>
-                        </a:rPr>
-                        <a:t>Watch and observe</a:t>
-                      </a:r>
-                      <a:endParaRPr lang="en-US" sz="1500" dirty="0"/>
-                    </a:p>
-                  </a:txBody>
-                  <a:tcPr marL="25400" marR="101600" marT="63500" marB="63500" anchor="ctr">
-                    <a:lnL w="0" cap="flat" cmpd="sng" algn="ctr">
-                      <a:noFill/>
-                    </a:lnL>
-                    <a:lnR w="0" cap="flat" cmpd="sng" algn="ctr">
-                      <a:noFill/>
-                    </a:lnR>
-                    <a:lnT w="0" cap="flat" cmpd="sng" algn="ctr">
-                      <a:noFill/>
-                    </a:lnT>
-                    <a:lnB w="6350" cap="flat" cmpd="sng" algn="ctr">
-                      <a:solidFill>
-                        <a:srgbClr val="000000"/>
-                      </a:solidFill>
-                      <a:prstDash val="solid"/>
-                      <a:round/>
-                      <a:headEnd type="none" w="med" len="med"/>
-                      <a:tailEnd type="none" w="med" len="med"/>
-                    </a:lnB>
-                  </a:tcPr>
-                </a:tc>
-              </a:tr>
-              <a:tr h="0">
-                <a:tc>
-                  <a:txBody>
-                    <a:bodyPr/>
-                    <a:lstStyle/>
-                    <a:p>
-                      <a:pPr indent="0" marL="0">
-                        <a:buNone/>
-                      </a:pPr>
-                      <a:r>
-                        <a:rPr lang="en-US" sz="1500" dirty="0">
-                          <a:solidFill>
-                            <a:schemeClr val="tx1"/>
-                          </a:solidFill>
-                        </a:rPr>
-                        <a:t>Primary MDS-EB</a:t>
-                      </a:r>
-                      <a:endParaRPr lang="en-US" sz="1500" dirty="0"/>
-                    </a:p>
-                  </a:txBody>
-                  <a:tcPr marL="25400" marR="101600" marT="63500" marB="63500" anchor="ctr">
-                    <a:lnL w="0" cap="flat" cmpd="sng" algn="ctr">
-                      <a:noFill/>
-                    </a:lnL>
-                    <a:lnR w="0" cap="flat" cmpd="sng" algn="ctr">
-                      <a:noFill/>
-                    </a:lnR>
-                    <a:lnT w="0" cap="flat" cmpd="sng" algn="ctr">
-                      <a:noFill/>
-                    </a:lnT>
-                    <a:lnB w="6350" cap="flat" cmpd="sng" algn="ctr">
-                      <a:solidFill>
-                        <a:srgbClr val="000000"/>
-                      </a:solidFill>
-                      <a:prstDash val="solid"/>
-                      <a:round/>
-                      <a:headEnd type="none" w="med" len="med"/>
-                      <a:tailEnd type="none" w="med" len="med"/>
-                    </a:lnB>
-                  </a:tcPr>
-                </a:tc>
-                <a:tc>
-                  <a:txBody>
-                    <a:bodyPr/>
-                    <a:lstStyle/>
-                    <a:p>
-                      <a:pPr indent="0" marL="0">
-                        <a:buNone/>
-                      </a:pPr>
-                      <a:r>
-                        <a:rPr lang="en-US" sz="1500" dirty="0">
-                          <a:solidFill>
-                            <a:schemeClr val="tx1"/>
-                          </a:solidFill>
-                        </a:rPr>
-                        <a:t>MAC BU/CY/MEL: 5-y OS 63% (Strahm 2011)</a:t>
-                      </a:r>
-                      <a:endParaRPr lang="en-US" sz="1500" dirty="0"/>
-                    </a:p>
-                  </a:txBody>
-                  <a:tcPr marL="25400" marR="101600" marT="63500" marB="63500" anchor="ctr">
-                    <a:lnL w="0" cap="flat" cmpd="sng" algn="ctr">
-                      <a:noFill/>
-                    </a:lnL>
-                    <a:lnR w="0" cap="flat" cmpd="sng" algn="ctr">
-                      <a:noFill/>
-                    </a:lnR>
-                    <a:lnT w="0" cap="flat" cmpd="sng" algn="ctr">
-                      <a:noFill/>
-                    </a:lnT>
-                    <a:lnB w="6350" cap="flat" cmpd="sng" algn="ctr">
-                      <a:solidFill>
-                        <a:srgbClr val="000000"/>
-                      </a:solidFill>
-                      <a:prstDash val="solid"/>
-                      <a:round/>
-                      <a:headEnd type="none" w="med" len="med"/>
-                      <a:tailEnd type="none" w="med" len="med"/>
-                    </a:lnB>
-                  </a:tcPr>
-                </a:tc>
-              </a:tr>
-              <a:tr h="0">
-                <a:tc>
-                  <a:txBody>
-                    <a:bodyPr/>
-                    <a:lstStyle/>
-                    <a:p>
-                      <a:pPr indent="0" marL="0">
-                        <a:buNone/>
-                      </a:pPr>
-                      <a:r>
-                        <a:rPr lang="en-US" sz="1500" dirty="0">
-                          <a:solidFill>
-                            <a:schemeClr val="tx1"/>
-                          </a:solidFill>
-                        </a:rPr>
-                        <a:t>UBTF-TD (~1/3 of de novo MDS-EB)</a:t>
-                      </a:r>
-                      <a:endParaRPr lang="en-US" sz="1500" dirty="0"/>
-                    </a:p>
-                  </a:txBody>
-                  <a:tcPr marL="25400" marR="101600" marT="63500" marB="63500" anchor="ctr">
-                    <a:lnL w="0" cap="flat" cmpd="sng" algn="ctr">
-                      <a:noFill/>
-                    </a:lnL>
-                    <a:lnR w="0" cap="flat" cmpd="sng" algn="ctr">
-                      <a:noFill/>
-                    </a:lnR>
-                    <a:lnT w="0" cap="flat" cmpd="sng" algn="ctr">
-                      <a:noFill/>
-                    </a:lnT>
-                    <a:lnB w="6350" cap="flat" cmpd="sng" algn="ctr">
-                      <a:solidFill>
-                        <a:srgbClr val="000000"/>
-                      </a:solidFill>
-                      <a:prstDash val="solid"/>
-                      <a:round/>
-                      <a:headEnd type="none" w="med" len="med"/>
-                      <a:tailEnd type="none" w="med" len="med"/>
-                    </a:lnB>
-                  </a:tcPr>
-                </a:tc>
-                <a:tc>
-                  <a:txBody>
-                    <a:bodyPr/>
-                    <a:lstStyle/>
-                    <a:p>
-                      <a:pPr indent="0" marL="0">
-                        <a:buNone/>
-                      </a:pPr>
-                      <a:r>
-                        <a:rPr lang="en-US" sz="1500" dirty="0">
-                          <a:solidFill>
-                            <a:schemeClr val="tx1"/>
-                          </a:solidFill>
-                        </a:rPr>
-                        <a:t>Poor response to AML-type chemo; worse after HCT</a:t>
-                      </a:r>
-                      <a:endParaRPr lang="en-US" sz="1500" dirty="0"/>
-                    </a:p>
-                  </a:txBody>
-                  <a:tcPr marL="25400" marR="101600" marT="63500" marB="63500" anchor="ctr">
-                    <a:lnL w="0" cap="flat" cmpd="sng" algn="ctr">
-                      <a:noFill/>
-                    </a:lnL>
-                    <a:lnR w="0" cap="flat" cmpd="sng" algn="ctr">
-                      <a:noFill/>
-                    </a:lnR>
-                    <a:lnT w="0" cap="flat" cmpd="sng" algn="ctr">
-                      <a:noFill/>
-                    </a:lnT>
-                    <a:lnB w="6350" cap="flat" cmpd="sng" algn="ctr">
-                      <a:solidFill>
-                        <a:srgbClr val="000000"/>
-                      </a:solidFill>
-                      <a:prstDash val="solid"/>
-                      <a:round/>
-                      <a:headEnd type="none" w="med" len="med"/>
-                      <a:tailEnd type="none" w="med" len="med"/>
-                    </a:lnB>
-                  </a:tcPr>
-                </a:tc>
-              </a:tr>
-              <a:tr h="0">
-                <a:tc>
-                  <a:txBody>
-                    <a:bodyPr/>
-                    <a:lstStyle/>
-                    <a:p>
-                      <a:pPr indent="0" marL="0">
-                        <a:buNone/>
-                      </a:pPr>
-                      <a:r>
-                        <a:rPr lang="en-US" sz="1500" dirty="0">
-                          <a:solidFill>
-                            <a:schemeClr val="tx1"/>
-                          </a:solidFill>
-                        </a:rPr>
-                        <a:t>GATA2 or SAMD9/SAMD9L germline</a:t>
-                      </a:r>
-                      <a:endParaRPr lang="en-US" sz="1500" dirty="0"/>
-                    </a:p>
-                  </a:txBody>
-                  <a:tcPr marL="25400" marR="101600" marT="63500" marB="63500" anchor="ctr">
-                    <a:lnL w="0" cap="flat" cmpd="sng" algn="ctr">
-                      <a:noFill/>
-                    </a:lnL>
-                    <a:lnR w="0" cap="flat" cmpd="sng" algn="ctr">
-                      <a:noFill/>
-                    </a:lnR>
-                    <a:lnT w="0" cap="flat" cmpd="sng" algn="ctr">
-                      <a:noFill/>
-                    </a:lnT>
-                    <a:lnB w="6350" cap="flat" cmpd="sng" algn="ctr">
-                      <a:solidFill>
-                        <a:srgbClr val="000000"/>
-                      </a:solidFill>
-                      <a:prstDash val="solid"/>
-                      <a:round/>
-                      <a:headEnd type="none" w="med" len="med"/>
-                      <a:tailEnd type="none" w="med" len="med"/>
-                    </a:lnB>
-                  </a:tcPr>
-                </a:tc>
-                <a:tc>
-                  <a:txBody>
-                    <a:bodyPr/>
-                    <a:lstStyle/>
-                    <a:p>
-                      <a:pPr indent="0" marL="0">
-                        <a:buNone/>
-                      </a:pPr>
-                      <a:r>
-                        <a:rPr lang="en-US" sz="1500" dirty="0">
-                          <a:solidFill>
-                            <a:schemeClr val="tx1"/>
-                          </a:solidFill>
-                        </a:rPr>
-                        <a:t>Same outcome when stratified; screen family donors</a:t>
-                      </a:r>
-                      <a:endParaRPr lang="en-US" sz="1500" dirty="0"/>
-                    </a:p>
-                  </a:txBody>
-                  <a:tcPr marL="25400" marR="101600" marT="63500" marB="63500" anchor="ctr">
-                    <a:lnL w="0" cap="flat" cmpd="sng" algn="ctr">
-                      <a:noFill/>
-                    </a:lnL>
-                    <a:lnR w="0" cap="flat" cmpd="sng" algn="ctr">
-                      <a:noFill/>
-                    </a:lnR>
-                    <a:lnT w="0" cap="flat" cmpd="sng" algn="ctr">
-                      <a:noFill/>
-                    </a:lnT>
-                    <a:lnB w="6350" cap="flat" cmpd="sng" algn="ctr">
-                      <a:solidFill>
-                        <a:srgbClr val="000000"/>
-                      </a:solidFill>
-                      <a:prstDash val="solid"/>
-                      <a:round/>
-                      <a:headEnd type="none" w="med" len="med"/>
-                      <a:tailEnd type="none" w="med" len="med"/>
-                    </a:lnB>
-                  </a:tcPr>
-                </a:tc>
-              </a:tr>
-              <a:tr h="0">
-                <a:tc>
-                  <a:txBody>
-                    <a:bodyPr/>
-                    <a:lstStyle/>
-                    <a:p>
-                      <a:pPr indent="0" marL="0">
-                        <a:buNone/>
-                      </a:pPr>
-                      <a:r>
-                        <a:rPr lang="en-US" sz="1500" dirty="0">
-                          <a:solidFill>
-                            <a:schemeClr val="tx1"/>
-                          </a:solidFill>
-                        </a:rPr>
-                        <a:t>Therapy-related MDS</a:t>
-                      </a:r>
-                      <a:endParaRPr lang="en-US" sz="1500" dirty="0"/>
-                    </a:p>
-                  </a:txBody>
-                  <a:tcPr marL="25400" marR="101600" marT="63500" marB="63500" anchor="ctr">
-                    <a:lnL w="0" cap="flat" cmpd="sng" algn="ctr">
-                      <a:noFill/>
-                    </a:lnL>
-                    <a:lnR w="0" cap="flat" cmpd="sng" algn="ctr">
-                      <a:noFill/>
-                    </a:lnR>
-                    <a:lnT w="0" cap="flat" cmpd="sng" algn="ctr">
-                      <a:noFill/>
-                    </a:lnT>
-                    <a:lnB w="19050" cap="flat" cmpd="sng" algn="ctr">
-                      <a:solidFill>
-                        <a:srgbClr val="000000"/>
-                      </a:solidFill>
-                      <a:prstDash val="solid"/>
-                      <a:round/>
-                      <a:headEnd type="none" w="med" len="med"/>
-                      <a:tailEnd type="none" w="med" len="med"/>
-                    </a:lnB>
-                  </a:tcPr>
-                </a:tc>
-                <a:tc>
-                  <a:txBody>
-                    <a:bodyPr/>
-                    <a:lstStyle/>
-                    <a:p>
-                      <a:pPr indent="0" marL="0">
-                        <a:buNone/>
-                      </a:pPr>
-                      <a:r>
-                        <a:rPr lang="en-US" sz="1500" dirty="0">
-                          <a:solidFill>
-                            <a:schemeClr val="tx1"/>
-                          </a:solidFill>
-                        </a:rPr>
-                        <a:t>OS ≤ 20% with complex karyotype or TP53;</a:t>
-                      </a:r>
-                      <a:endParaRPr lang="en-US" sz="1500" dirty="0"/>
-                    </a:p>
-                    <a:p>
-                      <a:pPr indent="0" marL="0">
-                        <a:buNone/>
-                      </a:pPr>
-                      <a:r>
-                        <a:rPr lang="en-US" sz="1500" dirty="0">
-                          <a:solidFill>
-                            <a:schemeClr val="tx1"/>
-                          </a:solidFill>
-                        </a:rPr>
-                        <a:t>~50% otherwise</a:t>
-                      </a:r>
-                      <a:endParaRPr lang="en-US" sz="1500" dirty="0"/>
-                    </a:p>
-                  </a:txBody>
-                  <a:tcPr marL="25400" marR="101600" marT="63500" marB="63500" anchor="ctr">
-                    <a:lnL w="0" cap="flat" cmpd="sng" algn="ctr">
-                      <a:noFill/>
-                    </a:lnL>
-                    <a:lnR w="0" cap="flat" cmpd="sng" algn="ctr">
-                      <a:noFill/>
-                    </a:lnR>
-                    <a:lnT w="0" cap="flat" cmpd="sng" algn="ctr">
-                      <a:noFill/>
-                    </a:lnT>
-                    <a:lnB w="19050" cap="flat" cmpd="sng" algn="ctr">
-                      <a:solidFill>
-                        <a:srgbClr val="000000"/>
-                      </a:solidFill>
-                      <a:prstDash val="solid"/>
-                      <a:round/>
-                      <a:headEnd type="none" w="med" len="med"/>
-                      <a:tailEnd type="none" w="med" len="med"/>
-                    </a:lnB>
-                  </a:tcPr>
-                </a:tc>
-              </a:tr>
-            </a:tbl>
-          </a:graphicData>
-        </a:graphic>
-      </p:graphicFrame>
-      <p:sp>
-        <p:nvSpPr>
-          <p:cNvPr id="25" name="Slide Number Placeholder 0"/>
-          <p:cNvSpPr>
-            <a:spLocks noGrp="1"/>
-          </p:cNvSpPr>
-          <p:nvPr>
-            <p:ph type="sldNum" sz="quarter" idx="4294967295"/>
-          </p:nvPr>
-        </p:nvSpPr>
-        <p:spPr>
-          <a:xfrm>
-            <a:off x="10972800" y="6080760"/>
-            <a:ext cx="530352" cy="274320"/>
-          </a:xfrm>
-          <a:prstGeom prst="rect">
-            <a:avLst/>
-          </a:prstGeom>
-          <a:extLst>
-            <a:ext uri="{C572A759-6A51-4108-AA02-DFA0A04FC94B}">
-              <ma14:wrappingTextBoxFlag xmlns:ma14="http://schemas.microsoft.com/office/mac/drawingml/2011/main" val="0"/>
-            </a:ext>
-          </a:extLst>
-        </p:spPr>
-        <p:txBody>
-          <a:bodyPr/>
-          <a:lstStyle>
-            <a:lvl1pPr>
-              <a:defRPr sz="1000">
-                <a:solidFill>
-                  <a:schemeClr val="tx1"/>
-                </a:solidFill>
-              </a:defRPr>
-            </a:lvl1pPr>
-          </a:lstStyle>
-          <a:p>
-            <a:pPr algn="r"/>
-            <a:fld id="{F7021451-1387-4CA6-816F-3879F97B5CBC}" type="slidenum">
-              <a:rPr b="0" lang="en-US"/>
-              <a:t>30</a:t>
-            </a:fld>
-            <a:endParaRPr lang="en-US"/>
-          </a:p>
-        </p:txBody>
-      </p:sp>
-    </p:spTree>
-  </p:cSld>
-  <p:clrMapOvr>
-    <a:masterClrMapping/>
-  </p:clrMapOvr>
-</p:sld>
-</file>
-
-<file path=ppt/slides/slide31.xml><?xml version="1.0" encoding="utf-8"?>
-<p:sld xmlns:a="http://schemas.openxmlformats.org/drawingml/2006/main" xmlns:r="http://schemas.openxmlformats.org/officeDocument/2006/relationships" xmlns:p="http://schemas.openxmlformats.org/presentationml/2006/main">
-  <p:cSld name="Slide 31">
-    <p:spTree>
-      <p:nvGrpSpPr>
-        <p:cNvPr id="1" name=""/>
-        <p:cNvGrpSpPr/>
-        <p:nvPr/>
-      </p:nvGrpSpPr>
-      <p:grpSpPr>
-        <a:xfrm>
-          <a:off x="0" y="0"/>
-          <a:ext cx="0" cy="0"/>
-          <a:chOff x="0" y="0"/>
-          <a:chExt cx="0" cy="0"/>
-        </a:xfrm>
-      </p:grpSpPr>
-      <p:sp>
-        <p:nvSpPr>
-          <p:cNvPr id="2" name="Text 0"/>
-          <p:cNvSpPr/>
-          <p:nvPr>
-            <p:ph idx="100" type="body" hasCustomPrompt="1"/>
-          </p:nvPr>
-        </p:nvSpPr>
-        <p:spPr>
-          <a:xfrm>
-            <a:off x="685800" y="502920"/>
-            <a:ext cx="10817352" cy="274320"/>
-          </a:xfrm>
-          <a:prstGeom prst="rect">
-            <a:avLst/>
-          </a:prstGeom>
-          <a:noFill/>
-          <a:ln/>
-        </p:spPr>
-        <p:txBody>
-          <a:bodyPr wrap="square" lIns="0" tIns="0" rIns="0" bIns="0" rtlCol="0" anchor="t"/>
-          <a:lstStyle/>
-          <a:p>
-            <a:pPr algn="l" indent="0" marL="0">
-              <a:buNone/>
-            </a:pPr>
-            <a:r>
-              <a:rPr lang="en-US" sz="1100" spc="300" kern="0" dirty="0">
-                <a:solidFill>
-                  <a:schemeClr val="tx1"/>
-                </a:solidFill>
-              </a:rPr>
-              <a:t>BACKUP · JMML · CH. 75 (TABLE 75.1)</a:t>
-            </a:r>
-            <a:endParaRPr lang="en-US" sz="1100" dirty="0"/>
-          </a:p>
-        </p:txBody>
-      </p:sp>
-      <p:sp>
-        <p:nvSpPr>
-          <p:cNvPr id="3" name="Text 0"/>
-          <p:cNvSpPr/>
-          <p:nvPr>
-            <p:ph idx="101" type="title" hasCustomPrompt="1"/>
-          </p:nvPr>
-        </p:nvSpPr>
-        <p:spPr>
-          <a:xfrm>
-            <a:off x="685800" y="822960"/>
-            <a:ext cx="10817352" cy="1143000"/>
-          </a:xfrm>
-          <a:prstGeom prst="rect">
-            <a:avLst/>
-          </a:prstGeom>
-          <a:noFill/>
-          <a:ln/>
-        </p:spPr>
-        <p:txBody>
-          <a:bodyPr wrap="square" lIns="0" tIns="0" rIns="0" bIns="0" rtlCol="0" anchor="t"/>
-          <a:lstStyle/>
-          <a:p>
-            <a:pPr algn="l" indent="0" marL="0">
-              <a:buNone/>
-            </a:pPr>
-            <a:r>
-              <a:rPr lang="en-US" sz="3600" b="1" dirty="0">
-                <a:solidFill>
-                  <a:schemeClr val="tx1"/>
-                </a:solidFill>
-              </a:rPr>
-              <a:t>JMML genotype predicts who needs HCT; about 80% do</a:t>
-            </a:r>
-            <a:endParaRPr lang="en-US" sz="3600" dirty="0"/>
-          </a:p>
-        </p:txBody>
-      </p:sp>
-      <p:sp>
-        <p:nvSpPr>
-          <p:cNvPr id="4" name="Text 0"/>
-          <p:cNvSpPr/>
-          <p:nvPr>
-            <p:ph idx="102" type="body" hasCustomPrompt="1"/>
-          </p:nvPr>
-        </p:nvSpPr>
-        <p:spPr>
-          <a:xfrm>
-            <a:off x="685800" y="6080760"/>
-            <a:ext cx="9966960" cy="457200"/>
-          </a:xfrm>
-          <a:prstGeom prst="rect">
-            <a:avLst/>
-          </a:prstGeom>
-          <a:noFill/>
-          <a:ln/>
-        </p:spPr>
-        <p:txBody>
-          <a:bodyPr wrap="square" lIns="0" tIns="0" rIns="0" bIns="0" rtlCol="0" anchor="t"/>
-          <a:lstStyle/>
-          <a:p>
-            <a:pPr algn="l" indent="0" marL="0">
-              <a:buNone/>
-            </a:pPr>
-            <a:r>
-              <a:rPr lang="en-US" sz="1000" dirty="0">
-                <a:solidFill>
-                  <a:schemeClr val="tx1"/>
-                </a:solidFill>
-              </a:rPr>
-              <a:t>Niemeyer CM, Strahm B. EBMT Handbook 8th ed. 2024; Ch. 75</a:t>
-            </a:r>
-            <a:endParaRPr lang="en-US" sz="1000" dirty="0"/>
-          </a:p>
-        </p:txBody>
-      </p:sp>
-      <p:graphicFrame>
-        <p:nvGraphicFramePr>
-          <p:cNvPr id="32" name="Table 99"/>
+          <p:cNvPr id="31" name="Table 97"/>
           <p:cNvGraphicFramePr>
             <a:graphicFrameLocks noGrp="1"/>
           </p:cNvGraphicFramePr>
@@ -21875,7 +21565,7 @@
       </p:graphicFrame>
       <p:sp>
         <p:nvSpPr>
-          <p:cNvPr id="7" name="Text 100"/>
+          <p:cNvPr id="7" name="Text 98"/>
           <p:cNvSpPr txBox="1"/>
           <p:nvPr/>
         </p:nvSpPr>
@@ -21948,7 +21638,7 @@
             <a:pPr algn="r"/>
             <a:fld id="{F7021451-1387-4CA6-816F-3879F97B5CBC}" type="slidenum">
               <a:rPr b="0" lang="en-US"/>
-              <a:t>31</a:t>
+              <a:t>30</a:t>
             </a:fld>
             <a:endParaRPr lang="en-US"/>
           </a:p>

--- a/slides/decks/s23-mds-mds-mpn.pptx
+++ b/slides/decks/s23-mds-mds-mpn.pptx
@@ -136,13 +136,13 @@
   <p:extLst>
     <p:ext uri="{521415D9-36F7-43E2-AB2F-B90AF26B5E84}">
       <p14:sectionLst xmlns:p14="http://schemas.microsoft.com/office/powerpoint/2010/main">
-        <p14:section name="Opening" id="{899a066f-94bc-38df-e7aa-8930540bfb97}">
+        <p14:section name="Opening" id="{af6ecc9a-7612-f413-11a3-9d9f88a9fe47}">
           <p14:sldIdLst>
             <p14:sldId id="256"/>
             <p14:sldId id="257"/>
           </p14:sldIdLst>
         </p14:section>
-        <p14:section name="MDS" id="{8f5e83a8-a2f2-5f31-9673-9bd9875e7286}">
+        <p14:section name="MDS" id="{81fa711c-9ee2-c5dd-5d5f-ecf6bd5a6e29}">
           <p14:sldIdLst>
             <p14:sldId id="258"/>
             <p14:sldId id="259"/>
@@ -154,7 +154,7 @@
             <p14:sldId id="265"/>
           </p14:sldIdLst>
         </p14:section>
-        <p14:section name="MDS/MPN" id="{193866f4-44aa-b129-8f6c-546cb2b44cb3}">
+        <p14:section name="MDS/MPN" id="{d23dffaa-739c-b19d-9bd3-04de136e4028}">
           <p14:sldIdLst>
             <p14:sldId id="266"/>
             <p14:sldId id="267"/>
@@ -164,7 +164,7 @@
             <p14:sldId id="271"/>
           </p14:sldIdLst>
         </p14:section>
-        <p14:section name="Board questions" id="{4808fb72-860a-185b-79c5-95fa3a19f190}">
+        <p14:section name="Board questions" id="{24ee9cdc-7f7f-9a6e-d11d-5f708a0c694b}">
           <p14:sldIdLst>
             <p14:sldId id="272"/>
             <p14:sldId id="273"/>
@@ -174,7 +174,7 @@
             <p14:sldId id="277"/>
           </p14:sldIdLst>
         </p14:section>
-        <p14:section name="References" id="{1a09b85f-fcf6-3bcb-3604-a078a0f968bc}">
+        <p14:section name="References" id="{0e34c627-1a89-4f1a-c241-19ed67ade465}">
           <p14:sldIdLst>
             <p14:sldId id="278"/>
             <p14:sldId id="279"/>
@@ -183,7 +183,7 @@
             <p14:sldId id="282"/>
           </p14:sldIdLst>
         </p14:section>
-        <p14:section name="Backup" id="{7174db05-a74a-fdae-80ce-3cb467905bc0}">
+        <p14:section name="Backup" id="{e347709f-891a-464a-35aa-6c58073c4d58}">
           <p14:sldIdLst>
             <p14:sldId id="283"/>
             <p14:sldId id="284"/>
@@ -5635,14 +5635,14 @@
                         <a:buNone/>
                       </a:pPr>
                       <a:r>
-                        <a:rPr lang="en-US" sz="1500" b="1" dirty="0">
+                        <a:rPr lang="en-US" sz="1600" b="1" dirty="0">
                           <a:solidFill>
                             <a:schemeClr val="tx1"/>
                           </a:solidFill>
                         </a:rPr>
                         <a:t>Strategy</a:t>
                       </a:r>
-                      <a:endParaRPr lang="en-US" sz="1500" dirty="0"/>
+                      <a:endParaRPr lang="en-US" sz="1600" dirty="0"/>
                     </a:p>
                   </a:txBody>
                   <a:tcPr marL="25400" marR="101600" marT="63500" marB="63500" anchor="ctr">
@@ -5681,14 +5681,14 @@
                         <a:buNone/>
                       </a:pPr>
                       <a:r>
-                        <a:rPr lang="en-US" sz="1500" b="1" dirty="0">
+                        <a:rPr lang="en-US" sz="1600" b="1" dirty="0">
                           <a:solidFill>
                             <a:schemeClr val="tx1"/>
                           </a:solidFill>
                         </a:rPr>
                         <a:t>Finding (Ch. 74)</a:t>
                       </a:r>
-                      <a:endParaRPr lang="en-US" sz="1500" dirty="0"/>
+                      <a:endParaRPr lang="en-US" sz="1600" dirty="0"/>
                     </a:p>
                   </a:txBody>
                   <a:tcPr marL="25400" marR="101600" marT="63500" marB="63500" anchor="ctr">
@@ -5729,28 +5729,28 @@
                         <a:buNone/>
                       </a:pPr>
                       <a:r>
-                        <a:rPr lang="en-US" sz="1500" dirty="0">
+                        <a:rPr lang="en-US" sz="1600" dirty="0">
                           <a:solidFill>
                             <a:schemeClr val="tx1"/>
                           </a:solidFill>
                         </a:rPr>
                         <a:t>AZA at relapse</a:t>
                       </a:r>
-                      <a:endParaRPr lang="en-US" sz="1500" dirty="0"/>
-                    </a:p>
-                    <a:p>
-                      <a:pPr indent="0" marL="0">
-                        <a:buNone/>
-                      </a:pPr>
-                      <a:r>
-                        <a:rPr lang="en-US" sz="1500" dirty="0">
+                      <a:endParaRPr lang="en-US" sz="1600" dirty="0"/>
+                    </a:p>
+                    <a:p>
+                      <a:pPr indent="0" marL="0">
+                        <a:buNone/>
+                      </a:pPr>
+                      <a:r>
+                        <a:rPr lang="en-US" sz="1600" dirty="0">
                           <a:solidFill>
                             <a:schemeClr val="tx1"/>
                           </a:solidFill>
                         </a:rPr>
                         <a:t>(Craddock 2016, n = 181)</a:t>
                       </a:r>
-                      <a:endParaRPr lang="en-US" sz="1500" dirty="0"/>
+                      <a:endParaRPr lang="en-US" sz="1600" dirty="0"/>
                     </a:p>
                   </a:txBody>
                   <a:tcPr marL="25400" marR="101600" marT="63500" marB="63500" anchor="ctr">
@@ -5783,28 +5783,28 @@
                         <a:buNone/>
                       </a:pPr>
                       <a:r>
-                        <a:rPr lang="en-US" sz="1500" dirty="0">
-                          <a:solidFill>
-                            <a:schemeClr val="tx1"/>
-                          </a:solidFill>
-                        </a:rPr>
-                        <a:t>Better with low blasts and relapse &gt; 6 months;</a:t>
-                      </a:r>
-                      <a:endParaRPr lang="en-US" sz="1500" dirty="0"/>
-                    </a:p>
-                    <a:p>
-                      <a:pPr indent="0" marL="0">
-                        <a:buNone/>
-                      </a:pPr>
-                      <a:r>
-                        <a:rPr lang="en-US" sz="1500" dirty="0">
-                          <a:solidFill>
-                            <a:schemeClr val="tx1"/>
-                          </a:solidFill>
-                        </a:rPr>
-                        <a:t>adding DLI changed nothing</a:t>
-                      </a:r>
-                      <a:endParaRPr lang="en-US" sz="1500" dirty="0"/>
+                        <a:rPr lang="en-US" sz="1600" dirty="0">
+                          <a:solidFill>
+                            <a:schemeClr val="tx1"/>
+                          </a:solidFill>
+                        </a:rPr>
+                        <a:t>Better: low blasts, relapse &gt; 6 months;</a:t>
+                      </a:r>
+                      <a:endParaRPr lang="en-US" sz="1600" dirty="0"/>
+                    </a:p>
+                    <a:p>
+                      <a:pPr indent="0" marL="0">
+                        <a:buNone/>
+                      </a:pPr>
+                      <a:r>
+                        <a:rPr lang="en-US" sz="1600" dirty="0">
+                          <a:solidFill>
+                            <a:schemeClr val="tx1"/>
+                          </a:solidFill>
+                        </a:rPr>
+                        <a:t>DLI added nothing</a:t>
+                      </a:r>
+                      <a:endParaRPr lang="en-US" sz="1600" dirty="0"/>
                     </a:p>
                   </a:txBody>
                   <a:tcPr marL="25400" marR="101600" marT="63500" marB="63500" anchor="ctr">
@@ -5839,28 +5839,28 @@
                         <a:buNone/>
                       </a:pPr>
                       <a:r>
-                        <a:rPr lang="en-US" sz="1500" dirty="0">
+                        <a:rPr lang="en-US" sz="1600" dirty="0">
                           <a:solidFill>
                             <a:schemeClr val="tx1"/>
                           </a:solidFill>
                         </a:rPr>
                         <a:t>DLI or 2nd HCT</a:t>
                       </a:r>
-                      <a:endParaRPr lang="en-US" sz="1500" dirty="0"/>
-                    </a:p>
-                    <a:p>
-                      <a:pPr indent="0" marL="0">
-                        <a:buNone/>
-                      </a:pPr>
-                      <a:r>
-                        <a:rPr lang="en-US" sz="1500" dirty="0">
+                      <a:endParaRPr lang="en-US" sz="1600" dirty="0"/>
+                    </a:p>
+                    <a:p>
+                      <a:pPr indent="0" marL="0">
+                        <a:buNone/>
+                      </a:pPr>
+                      <a:r>
+                        <a:rPr lang="en-US" sz="1600" dirty="0">
                           <a:solidFill>
                             <a:schemeClr val="tx1"/>
                           </a:solidFill>
                         </a:rPr>
                         <a:t>(Guièze 2016, n = 147)</a:t>
                       </a:r>
-                      <a:endParaRPr lang="en-US" sz="1500" dirty="0"/>
+                      <a:endParaRPr lang="en-US" sz="1600" dirty="0"/>
                     </a:p>
                   </a:txBody>
                   <a:tcPr marL="25400" marR="101600" marT="63500" marB="63500" anchor="ctr">
@@ -5893,28 +5893,28 @@
                         <a:buNone/>
                       </a:pPr>
                       <a:r>
-                        <a:rPr lang="en-US" sz="1500" dirty="0">
+                        <a:rPr lang="en-US" sz="1600" dirty="0">
                           <a:solidFill>
                             <a:schemeClr val="tx1"/>
                           </a:solidFill>
                         </a:rPr>
                         <a:t>Long-term survival 32% vs 6% with</a:t>
                       </a:r>
-                      <a:endParaRPr lang="en-US" sz="1500" dirty="0"/>
-                    </a:p>
-                    <a:p>
-                      <a:pPr indent="0" marL="0">
-                        <a:buNone/>
-                      </a:pPr>
-                      <a:r>
-                        <a:rPr lang="en-US" sz="1500" dirty="0">
+                      <a:endParaRPr lang="en-US" sz="1600" dirty="0"/>
+                    </a:p>
+                    <a:p>
+                      <a:pPr indent="0" marL="0">
+                        <a:buNone/>
+                      </a:pPr>
+                      <a:r>
+                        <a:rPr lang="en-US" sz="1600" dirty="0">
                           <a:solidFill>
                             <a:schemeClr val="tx1"/>
                           </a:solidFill>
                         </a:rPr>
                         <a:t>chemotherapy alone</a:t>
                       </a:r>
-                      <a:endParaRPr lang="en-US" sz="1500" dirty="0"/>
+                      <a:endParaRPr lang="en-US" sz="1600" dirty="0"/>
                     </a:p>
                   </a:txBody>
                   <a:tcPr marL="25400" marR="101600" marT="63500" marB="63500" anchor="ctr">
@@ -5949,28 +5949,28 @@
                         <a:buNone/>
                       </a:pPr>
                       <a:r>
-                        <a:rPr lang="en-US" sz="1500" dirty="0">
+                        <a:rPr lang="en-US" sz="1600" dirty="0">
                           <a:solidFill>
                             <a:schemeClr val="tx1"/>
                           </a:solidFill>
                         </a:rPr>
                         <a:t>2nd allo-HCT</a:t>
                       </a:r>
-                      <a:endParaRPr lang="en-US" sz="1500" dirty="0"/>
-                    </a:p>
-                    <a:p>
-                      <a:pPr indent="0" marL="0">
-                        <a:buNone/>
-                      </a:pPr>
-                      <a:r>
-                        <a:rPr lang="en-US" sz="1500" dirty="0">
+                      <a:endParaRPr lang="en-US" sz="1600" dirty="0"/>
+                    </a:p>
+                    <a:p>
+                      <a:pPr indent="0" marL="0">
+                        <a:buNone/>
+                      </a:pPr>
+                      <a:r>
+                        <a:rPr lang="en-US" sz="1600" dirty="0">
                           <a:solidFill>
                             <a:schemeClr val="tx1"/>
                           </a:solidFill>
                         </a:rPr>
                         <a:t>(Schmid 2018)</a:t>
                       </a:r>
-                      <a:endParaRPr lang="en-US" sz="1500" dirty="0"/>
+                      <a:endParaRPr lang="en-US" sz="1600" dirty="0"/>
                     </a:p>
                   </a:txBody>
                   <a:tcPr marL="25400" marR="101600" marT="63500" marB="63500" anchor="ctr">
@@ -6003,28 +6003,28 @@
                         <a:buNone/>
                       </a:pPr>
                       <a:r>
-                        <a:rPr lang="en-US" sz="1500" dirty="0">
+                        <a:rPr lang="en-US" sz="1600" dirty="0">
                           <a:solidFill>
                             <a:schemeClr val="tx1"/>
                           </a:solidFill>
                         </a:rPr>
                         <a:t>Rescues some in CR, without prior GVHD,</a:t>
                       </a:r>
-                      <a:endParaRPr lang="en-US" sz="1500" dirty="0"/>
-                    </a:p>
-                    <a:p>
-                      <a:pPr indent="0" marL="0">
-                        <a:buNone/>
-                      </a:pPr>
-                      <a:r>
-                        <a:rPr lang="en-US" sz="1500" dirty="0">
+                      <a:endParaRPr lang="en-US" sz="1600" dirty="0"/>
+                    </a:p>
+                    <a:p>
+                      <a:pPr indent="0" marL="0">
+                        <a:buNone/>
+                      </a:pPr>
+                      <a:r>
+                        <a:rPr lang="en-US" sz="1600" dirty="0">
                           <a:solidFill>
                             <a:schemeClr val="tx1"/>
                           </a:solidFill>
                         </a:rPr>
                         <a:t>with a new donor</a:t>
                       </a:r>
-                      <a:endParaRPr lang="en-US" sz="1500" dirty="0"/>
+                      <a:endParaRPr lang="en-US" sz="1600" dirty="0"/>
                     </a:p>
                   </a:txBody>
                   <a:tcPr marL="25400" marR="101600" marT="63500" marB="63500" anchor="ctr">
@@ -6059,14 +6059,14 @@
                         <a:buNone/>
                       </a:pPr>
                       <a:r>
-                        <a:rPr lang="en-US" sz="1500" dirty="0">
+                        <a:rPr lang="en-US" sz="1600" dirty="0">
                           <a:solidFill>
                             <a:schemeClr val="tx1"/>
                           </a:solidFill>
                         </a:rPr>
                         <a:t>Pre-emptive AZA or DLI</a:t>
                       </a:r>
-                      <a:endParaRPr lang="en-US" sz="1500" dirty="0"/>
+                      <a:endParaRPr lang="en-US" sz="1600" dirty="0"/>
                     </a:p>
                   </a:txBody>
                   <a:tcPr marL="25400" marR="101600" marT="63500" marB="63500" anchor="ctr">
@@ -6099,14 +6099,14 @@
                         <a:buNone/>
                       </a:pPr>
                       <a:r>
-                        <a:rPr lang="en-US" sz="1500" dirty="0">
+                        <a:rPr lang="en-US" sz="1600" dirty="0">
                           <a:solidFill>
                             <a:schemeClr val="tx1"/>
                           </a:solidFill>
                         </a:rPr>
                         <a:t>Risk- or MRD-guided: biallelic TP53, complex karyotype</a:t>
                       </a:r>
-                      <a:endParaRPr lang="en-US" sz="1500" dirty="0"/>
+                      <a:endParaRPr lang="en-US" sz="1600" dirty="0"/>
                     </a:p>
                   </a:txBody>
                   <a:tcPr marL="25400" marR="101600" marT="63500" marB="63500" anchor="ctr">
@@ -6141,28 +6141,28 @@
                         <a:buNone/>
                       </a:pPr>
                       <a:r>
-                        <a:rPr lang="en-US" sz="1500" dirty="0">
+                        <a:rPr lang="en-US" sz="1600" dirty="0">
                           <a:solidFill>
                             <a:schemeClr val="tx1"/>
                           </a:solidFill>
                         </a:rPr>
                         <a:t>HMA prophylaxis meta-analysis</a:t>
                       </a:r>
-                      <a:endParaRPr lang="en-US" sz="1500" dirty="0"/>
-                    </a:p>
-                    <a:p>
-                      <a:pPr indent="0" marL="0">
-                        <a:buNone/>
-                      </a:pPr>
-                      <a:r>
-                        <a:rPr lang="en-US" sz="1500" dirty="0">
+                      <a:endParaRPr lang="en-US" sz="1600" dirty="0"/>
+                    </a:p>
+                    <a:p>
+                      <a:pPr indent="0" marL="0">
+                        <a:buNone/>
+                      </a:pPr>
+                      <a:r>
+                        <a:rPr lang="en-US" sz="1600" dirty="0">
                           <a:solidFill>
                             <a:schemeClr val="tx1"/>
                           </a:solidFill>
                         </a:rPr>
                         <a:t>(Kungwankiattichai 2022)</a:t>
                       </a:r>
-                      <a:endParaRPr lang="en-US" sz="1500" dirty="0"/>
+                      <a:endParaRPr lang="en-US" sz="1600" dirty="0"/>
                     </a:p>
                   </a:txBody>
                   <a:tcPr marL="25400" marR="101600" marT="63500" marB="63500" anchor="ctr">
@@ -6195,14 +6195,14 @@
                         <a:buNone/>
                       </a:pPr>
                       <a:r>
-                        <a:rPr lang="en-US" sz="1500" dirty="0">
+                        <a:rPr lang="en-US" sz="1600" dirty="0">
                           <a:solidFill>
                             <a:schemeClr val="tx1"/>
                           </a:solidFill>
                         </a:rPr>
                         <a:t>Better survival</a:t>
                       </a:r>
-                      <a:endParaRPr lang="en-US" sz="1500" dirty="0"/>
+                      <a:endParaRPr lang="en-US" sz="1600" dirty="0"/>
                     </a:p>
                   </a:txBody>
                   <a:tcPr marL="25400" marR="101600" marT="63500" marB="63500" anchor="ctr">
@@ -6237,28 +6237,28 @@
                         <a:buNone/>
                       </a:pPr>
                       <a:r>
-                        <a:rPr lang="en-US" sz="1500" dirty="0">
+                        <a:rPr lang="en-US" sz="1600" dirty="0">
                           <a:solidFill>
                             <a:schemeClr val="tx1"/>
                           </a:solidFill>
                         </a:rPr>
                         <a:t>AZA maintenance phase 3</a:t>
                       </a:r>
-                      <a:endParaRPr lang="en-US" sz="1500" dirty="0"/>
-                    </a:p>
-                    <a:p>
-                      <a:pPr indent="0" marL="0">
-                        <a:buNone/>
-                      </a:pPr>
-                      <a:r>
-                        <a:rPr lang="en-US" sz="1500" dirty="0">
+                      <a:endParaRPr lang="en-US" sz="1600" dirty="0"/>
+                    </a:p>
+                    <a:p>
+                      <a:pPr indent="0" marL="0">
+                        <a:buNone/>
+                      </a:pPr>
+                      <a:r>
+                        <a:rPr lang="en-US" sz="1600" dirty="0">
                           <a:solidFill>
                             <a:schemeClr val="tx1"/>
                           </a:solidFill>
                         </a:rPr>
                         <a:t>(Oran 2020)</a:t>
                       </a:r>
-                      <a:endParaRPr lang="en-US" sz="1500" dirty="0"/>
+                      <a:endParaRPr lang="en-US" sz="1600" dirty="0"/>
                     </a:p>
                   </a:txBody>
                   <a:tcPr marL="25400" marR="101600" marT="63500" marB="63500" anchor="ctr">
@@ -6291,14 +6291,14 @@
                         <a:buNone/>
                       </a:pPr>
                       <a:r>
-                        <a:rPr lang="en-US" sz="1500" dirty="0">
+                        <a:rPr lang="en-US" sz="1600" dirty="0">
                           <a:solidFill>
                             <a:schemeClr val="tx1"/>
                           </a:solidFill>
                         </a:rPr>
                         <a:t>No benefit over observation</a:t>
                       </a:r>
-                      <a:endParaRPr lang="en-US" sz="1500" dirty="0"/>
+                      <a:endParaRPr lang="en-US" sz="1600" dirty="0"/>
                     </a:p>
                   </a:txBody>
                   <a:tcPr marL="25400" marR="101600" marT="63500" marB="63500" anchor="ctr">
@@ -7860,7 +7860,7 @@
                             <a:schemeClr val="tx1"/>
                           </a:solidFill>
                         </a:rPr>
-                        <a:t>CMML karyotype int/high [1/2]; TD [1]</a:t>
+                        <a:t>karyotype int/high [1/2]; TD [1]</a:t>
                       </a:r>
                       <a:endParaRPr lang="en-US" sz="1600" dirty="0"/>
                     </a:p>
@@ -8010,7 +8010,7 @@
                             <a:schemeClr val="tx1"/>
                           </a:solidFill>
                         </a:rPr>
-                        <a:t>WBC ≥ 13 [1]; BM blasts ≥ 5% [1];</a:t>
+                        <a:t>WBC ≥ 13 [1]; marrow blasts ≥ 5% [1];</a:t>
                       </a:r>
                       <a:endParaRPr lang="en-US" sz="1600" dirty="0"/>
                     </a:p>
@@ -8024,7 +8024,7 @@
                             <a:schemeClr val="tx1"/>
                           </a:solidFill>
                         </a:rPr>
-                        <a:t>genetic risk group [0–3]; TD [1]</a:t>
+                        <a:t>genetic risk [0–3]; TD [1]</a:t>
                       </a:r>
                       <a:endParaRPr lang="en-US" sz="1600" dirty="0"/>
                     </a:p>
@@ -8160,7 +8160,7 @@
                             <a:schemeClr val="tx1"/>
                           </a:solidFill>
                         </a:rPr>
-                        <a:t>Low: normal, isolated −Y;</a:t>
+                        <a:t>Low: normal, −Y alone; high: +8,</a:t>
                       </a:r>
                       <a:endParaRPr lang="en-US" sz="1600" dirty="0"/>
                     </a:p>
@@ -8174,7 +8174,7 @@
                             <a:schemeClr val="tx1"/>
                           </a:solidFill>
                         </a:rPr>
-                        <a:t>high: +8, complex (≥ 3), chromosome 7</a:t>
+                        <a:t>complex (≥ 3), chromosome 7</a:t>
                       </a:r>
                       <a:endParaRPr lang="en-US" sz="1600" dirty="0"/>
                     </a:p>
@@ -8638,14 +8638,14 @@
                         <a:buNone/>
                       </a:pPr>
                       <a:r>
-                        <a:rPr lang="en-US" sz="1500" b="1" dirty="0">
+                        <a:rPr lang="en-US" sz="1600" b="1" dirty="0">
                           <a:solidFill>
                             <a:schemeClr val="tx1"/>
                           </a:solidFill>
                         </a:rPr>
                         <a:t>Entity · model</a:t>
                       </a:r>
-                      <a:endParaRPr lang="en-US" sz="1500" dirty="0"/>
+                      <a:endParaRPr lang="en-US" sz="1600" dirty="0"/>
                     </a:p>
                   </a:txBody>
                   <a:tcPr marL="25400" marR="101600" marT="63500" marB="63500" anchor="ctr">
@@ -8684,14 +8684,14 @@
                         <a:buNone/>
                       </a:pPr>
                       <a:r>
-                        <a:rPr lang="en-US" sz="1500" b="1" dirty="0">
+                        <a:rPr lang="en-US" sz="1600" b="1" dirty="0">
                           <a:solidFill>
                             <a:schemeClr val="tx1"/>
                           </a:solidFill>
                         </a:rPr>
                         <a:t>Variables [points]</a:t>
                       </a:r>
-                      <a:endParaRPr lang="en-US" sz="1500" dirty="0"/>
+                      <a:endParaRPr lang="en-US" sz="1600" dirty="0"/>
                     </a:p>
                   </a:txBody>
                   <a:tcPr marL="25400" marR="101600" marT="63500" marB="63500" anchor="ctr">
@@ -8730,14 +8730,14 @@
                         <a:buNone/>
                       </a:pPr>
                       <a:r>
-                        <a:rPr lang="en-US" sz="1500" b="1" dirty="0">
+                        <a:rPr lang="en-US" sz="1600" b="1" dirty="0">
                           <a:solidFill>
                             <a:schemeClr val="tx1"/>
                           </a:solidFill>
                         </a:rPr>
                         <a:t>Score (median OS, months)</a:t>
                       </a:r>
-                      <a:endParaRPr lang="en-US" sz="1500" dirty="0"/>
+                      <a:endParaRPr lang="en-US" sz="1600" dirty="0"/>
                     </a:p>
                   </a:txBody>
                   <a:tcPr marL="25400" marR="101600" marT="63500" marB="63500" anchor="ctr">
@@ -8778,28 +8778,28 @@
                         <a:buNone/>
                       </a:pPr>
                       <a:r>
-                        <a:rPr lang="en-US" sz="1500" dirty="0">
+                        <a:rPr lang="en-US" sz="1600" dirty="0">
                           <a:solidFill>
                             <a:schemeClr val="tx1"/>
                           </a:solidFill>
                         </a:rPr>
                         <a:t>CMML · GFM</a:t>
                       </a:r>
-                      <a:endParaRPr lang="en-US" sz="1500" dirty="0"/>
-                    </a:p>
-                    <a:p>
-                      <a:pPr indent="0" marL="0">
-                        <a:buNone/>
-                      </a:pPr>
-                      <a:r>
-                        <a:rPr lang="en-US" sz="1500" dirty="0">
+                      <a:endParaRPr lang="en-US" sz="1600" dirty="0"/>
+                    </a:p>
+                    <a:p>
+                      <a:pPr indent="0" marL="0">
+                        <a:buNone/>
+                      </a:pPr>
+                      <a:r>
+                        <a:rPr lang="en-US" sz="1600" dirty="0">
                           <a:solidFill>
                             <a:schemeClr val="tx1"/>
                           </a:solidFill>
                         </a:rPr>
                         <a:t>(Itzykson 2013)</a:t>
                       </a:r>
-                      <a:endParaRPr lang="en-US" sz="1500" dirty="0"/>
+                      <a:endParaRPr lang="en-US" sz="1600" dirty="0"/>
                     </a:p>
                   </a:txBody>
                   <a:tcPr marL="25400" marR="101600" marT="63500" marB="63500" anchor="ctr">
@@ -8832,28 +8832,28 @@
                         <a:buNone/>
                       </a:pPr>
                       <a:r>
-                        <a:rPr lang="en-US" sz="1500" dirty="0">
-                          <a:solidFill>
-                            <a:schemeClr val="tx1"/>
-                          </a:solidFill>
-                        </a:rPr>
-                        <a:t>Age &gt; 65 [2]; WBC &gt; 15 [3]; PLT &lt; 100 [2];</a:t>
-                      </a:r>
-                      <a:endParaRPr lang="en-US" sz="1500" dirty="0"/>
-                    </a:p>
-                    <a:p>
-                      <a:pPr indent="0" marL="0">
-                        <a:buNone/>
-                      </a:pPr>
-                      <a:r>
-                        <a:rPr lang="en-US" sz="1500" dirty="0">
-                          <a:solidFill>
-                            <a:schemeClr val="tx1"/>
-                          </a:solidFill>
-                        </a:rPr>
-                        <a:t>anaemia [2]; ASXL1 [2]</a:t>
-                      </a:r>
-                      <a:endParaRPr lang="en-US" sz="1500" dirty="0"/>
+                        <a:rPr lang="en-US" sz="1600" dirty="0">
+                          <a:solidFill>
+                            <a:schemeClr val="tx1"/>
+                          </a:solidFill>
+                        </a:rPr>
+                        <a:t>[2]: age &gt; 65, PLT &lt; 100, anaemia, ASXL1;</a:t>
+                      </a:r>
+                      <a:endParaRPr lang="en-US" sz="1600" dirty="0"/>
+                    </a:p>
+                    <a:p>
+                      <a:pPr indent="0" marL="0">
+                        <a:buNone/>
+                      </a:pPr>
+                      <a:r>
+                        <a:rPr lang="en-US" sz="1600" dirty="0">
+                          <a:solidFill>
+                            <a:schemeClr val="tx1"/>
+                          </a:solidFill>
+                        </a:rPr>
+                        <a:t>[3]: WBC &gt; 15</a:t>
+                      </a:r>
+                      <a:endParaRPr lang="en-US" sz="1600" dirty="0"/>
                     </a:p>
                   </a:txBody>
                   <a:tcPr marL="25400" marR="101600" marT="63500" marB="63500" anchor="ctr">
@@ -8886,28 +8886,28 @@
                         <a:buNone/>
                       </a:pPr>
                       <a:r>
-                        <a:rPr lang="en-US" sz="1500" dirty="0">
+                        <a:rPr lang="en-US" sz="1600" dirty="0">
                           <a:solidFill>
                             <a:schemeClr val="tx1"/>
                           </a:solidFill>
                         </a:rPr>
                         <a:t>Low ≤ 4 (NR); int 5–7 (38.5);</a:t>
                       </a:r>
-                      <a:endParaRPr lang="en-US" sz="1500" dirty="0"/>
-                    </a:p>
-                    <a:p>
-                      <a:pPr indent="0" marL="0">
-                        <a:buNone/>
-                      </a:pPr>
-                      <a:r>
-                        <a:rPr lang="en-US" sz="1500" dirty="0">
+                      <a:endParaRPr lang="en-US" sz="1600" dirty="0"/>
+                    </a:p>
+                    <a:p>
+                      <a:pPr indent="0" marL="0">
+                        <a:buNone/>
+                      </a:pPr>
+                      <a:r>
+                        <a:rPr lang="en-US" sz="1600" dirty="0">
                           <a:solidFill>
                             <a:schemeClr val="tx1"/>
                           </a:solidFill>
                         </a:rPr>
                         <a:t>high ≥ 8 (14.4)</a:t>
                       </a:r>
-                      <a:endParaRPr lang="en-US" sz="1500" dirty="0"/>
+                      <a:endParaRPr lang="en-US" sz="1600" dirty="0"/>
                     </a:p>
                   </a:txBody>
                   <a:tcPr marL="25400" marR="101600" marT="63500" marB="63500" anchor="ctr">
@@ -8942,28 +8942,28 @@
                         <a:buNone/>
                       </a:pPr>
                       <a:r>
-                        <a:rPr lang="en-US" sz="1500" dirty="0">
+                        <a:rPr lang="en-US" sz="1600" dirty="0">
                           <a:solidFill>
                             <a:schemeClr val="tx1"/>
                           </a:solidFill>
                         </a:rPr>
                         <a:t>CMML · MMM</a:t>
                       </a:r>
-                      <a:endParaRPr lang="en-US" sz="1500" dirty="0"/>
-                    </a:p>
-                    <a:p>
-                      <a:pPr indent="0" marL="0">
-                        <a:buNone/>
-                      </a:pPr>
-                      <a:r>
-                        <a:rPr lang="en-US" sz="1500" dirty="0">
+                      <a:endParaRPr lang="en-US" sz="1600" dirty="0"/>
+                    </a:p>
+                    <a:p>
+                      <a:pPr indent="0" marL="0">
+                        <a:buNone/>
+                      </a:pPr>
+                      <a:r>
+                        <a:rPr lang="en-US" sz="1600" dirty="0">
                           <a:solidFill>
                             <a:schemeClr val="tx1"/>
                           </a:solidFill>
                         </a:rPr>
                         <a:t>(Patnaik 2014)</a:t>
                       </a:r>
-                      <a:endParaRPr lang="en-US" sz="1500" dirty="0"/>
+                      <a:endParaRPr lang="en-US" sz="1600" dirty="0"/>
                     </a:p>
                   </a:txBody>
                   <a:tcPr marL="25400" marR="101600" marT="63500" marB="63500" anchor="ctr">
@@ -8996,28 +8996,28 @@
                         <a:buNone/>
                       </a:pPr>
                       <a:r>
-                        <a:rPr lang="en-US" sz="1500" dirty="0">
-                          <a:solidFill>
-                            <a:schemeClr val="tx1"/>
-                          </a:solidFill>
-                        </a:rPr>
-                        <a:t>Hb &lt; 10 [2]; AMC &gt; 10 [2]; IMC &gt; 0% [2];</a:t>
-                      </a:r>
-                      <a:endParaRPr lang="en-US" sz="1500" dirty="0"/>
-                    </a:p>
-                    <a:p>
-                      <a:pPr indent="0" marL="0">
-                        <a:buNone/>
-                      </a:pPr>
-                      <a:r>
-                        <a:rPr lang="en-US" sz="1500" dirty="0">
-                          <a:solidFill>
-                            <a:schemeClr val="tx1"/>
-                          </a:solidFill>
-                        </a:rPr>
-                        <a:t>PLT &lt; 100 [1.5]; ASXL1 [1.5]</a:t>
-                      </a:r>
-                      <a:endParaRPr lang="en-US" sz="1500" dirty="0"/>
+                        <a:rPr lang="en-US" sz="1600" dirty="0">
+                          <a:solidFill>
+                            <a:schemeClr val="tx1"/>
+                          </a:solidFill>
+                        </a:rPr>
+                        <a:t>[2]: Hb &lt; 10, AMC &gt; 10, IMC &gt; 0%;</a:t>
+                      </a:r>
+                      <a:endParaRPr lang="en-US" sz="1600" dirty="0"/>
+                    </a:p>
+                    <a:p>
+                      <a:pPr indent="0" marL="0">
+                        <a:buNone/>
+                      </a:pPr>
+                      <a:r>
+                        <a:rPr lang="en-US" sz="1600" dirty="0">
+                          <a:solidFill>
+                            <a:schemeClr val="tx1"/>
+                          </a:solidFill>
+                        </a:rPr>
+                        <a:t>[1.5]: PLT &lt; 100, ASXL1</a:t>
+                      </a:r>
+                      <a:endParaRPr lang="en-US" sz="1600" dirty="0"/>
                     </a:p>
                   </a:txBody>
                   <a:tcPr marL="25400" marR="101600" marT="63500" marB="63500" anchor="ctr">
@@ -9050,28 +9050,28 @@
                         <a:buNone/>
                       </a:pPr>
                       <a:r>
-                        <a:rPr lang="en-US" sz="1500" dirty="0">
-                          <a:solidFill>
-                            <a:schemeClr val="tx1"/>
-                          </a:solidFill>
-                        </a:rPr>
-                        <a:t>Low 0 (97); int-1 1.5–2 (59);</a:t>
-                      </a:r>
-                      <a:endParaRPr lang="en-US" sz="1500" dirty="0"/>
-                    </a:p>
-                    <a:p>
-                      <a:pPr indent="0" marL="0">
-                        <a:buNone/>
-                      </a:pPr>
-                      <a:r>
-                        <a:rPr lang="en-US" sz="1500" dirty="0">
-                          <a:solidFill>
-                            <a:schemeClr val="tx1"/>
-                          </a:solidFill>
-                        </a:rPr>
-                        <a:t>int-2 2.5–4.5 (31); high ≥ 5 (16)</a:t>
-                      </a:r>
-                      <a:endParaRPr lang="en-US" sz="1500" dirty="0"/>
+                        <a:rPr lang="en-US" sz="1600" dirty="0">
+                          <a:solidFill>
+                            <a:schemeClr val="tx1"/>
+                          </a:solidFill>
+                        </a:rPr>
+                        <a:t>Low 0 (97); I-1 1.5–2 (59);</a:t>
+                      </a:r>
+                      <a:endParaRPr lang="en-US" sz="1600" dirty="0"/>
+                    </a:p>
+                    <a:p>
+                      <a:pPr indent="0" marL="0">
+                        <a:buNone/>
+                      </a:pPr>
+                      <a:r>
+                        <a:rPr lang="en-US" sz="1600" dirty="0">
+                          <a:solidFill>
+                            <a:schemeClr val="tx1"/>
+                          </a:solidFill>
+                        </a:rPr>
+                        <a:t>I-2 2.5–4.5 (31); high ≥ 5 (16)</a:t>
+                      </a:r>
+                      <a:endParaRPr lang="en-US" sz="1600" dirty="0"/>
                     </a:p>
                   </a:txBody>
                   <a:tcPr marL="25400" marR="101600" marT="63500" marB="63500" anchor="ctr">
@@ -9106,28 +9106,28 @@
                         <a:buNone/>
                       </a:pPr>
                       <a:r>
-                        <a:rPr lang="en-US" sz="1500" dirty="0">
+                        <a:rPr lang="en-US" sz="1600" dirty="0">
                           <a:solidFill>
                             <a:schemeClr val="tx1"/>
                           </a:solidFill>
                         </a:rPr>
                         <a:t>MDS/MPN-N · MDACC</a:t>
                       </a:r>
-                      <a:endParaRPr lang="en-US" sz="1500" dirty="0"/>
-                    </a:p>
-                    <a:p>
-                      <a:pPr indent="0" marL="0">
-                        <a:buNone/>
-                      </a:pPr>
-                      <a:r>
-                        <a:rPr lang="en-US" sz="1500" dirty="0">
+                      <a:endParaRPr lang="en-US" sz="1600" dirty="0"/>
+                    </a:p>
+                    <a:p>
+                      <a:pPr indent="0" marL="0">
+                        <a:buNone/>
+                      </a:pPr>
+                      <a:r>
+                        <a:rPr lang="en-US" sz="1600" dirty="0">
                           <a:solidFill>
                             <a:schemeClr val="tx1"/>
                           </a:solidFill>
                         </a:rPr>
                         <a:t>(Onida 2002)</a:t>
                       </a:r>
-                      <a:endParaRPr lang="en-US" sz="1500" dirty="0"/>
+                      <a:endParaRPr lang="en-US" sz="1600" dirty="0"/>
                     </a:p>
                   </a:txBody>
                   <a:tcPr marL="25400" marR="101600" marT="63500" marB="63500" anchor="ctr">
@@ -9160,28 +9160,28 @@
                         <a:buNone/>
                       </a:pPr>
                       <a:r>
-                        <a:rPr lang="en-US" sz="1500" dirty="0">
+                        <a:rPr lang="en-US" sz="1600" dirty="0">
                           <a:solidFill>
                             <a:schemeClr val="tx1"/>
                           </a:solidFill>
                         </a:rPr>
                         <a:t>Age &gt; 65 [1]; Hb ≤ 10 [1];</a:t>
                       </a:r>
-                      <a:endParaRPr lang="en-US" sz="1500" dirty="0"/>
-                    </a:p>
-                    <a:p>
-                      <a:pPr indent="0" marL="0">
-                        <a:buNone/>
-                      </a:pPr>
-                      <a:r>
-                        <a:rPr lang="en-US" sz="1500" dirty="0">
+                      <a:endParaRPr lang="en-US" sz="1600" dirty="0"/>
+                    </a:p>
+                    <a:p>
+                      <a:pPr indent="0" marL="0">
+                        <a:buNone/>
+                      </a:pPr>
+                      <a:r>
+                        <a:rPr lang="en-US" sz="1600" dirty="0">
                           <a:solidFill>
                             <a:schemeClr val="tx1"/>
                           </a:solidFill>
                         </a:rPr>
                         <a:t>WBC &gt; 50 [1]</a:t>
                       </a:r>
-                      <a:endParaRPr lang="en-US" sz="1500" dirty="0"/>
+                      <a:endParaRPr lang="en-US" sz="1600" dirty="0"/>
                     </a:p>
                   </a:txBody>
                   <a:tcPr marL="25400" marR="101600" marT="63500" marB="63500" anchor="ctr">
@@ -9214,14 +9214,14 @@
                         <a:buNone/>
                       </a:pPr>
                       <a:r>
-                        <a:rPr lang="en-US" sz="1500" dirty="0">
+                        <a:rPr lang="en-US" sz="1600" dirty="0">
                           <a:solidFill>
                             <a:schemeClr val="tx1"/>
                           </a:solidFill>
                         </a:rPr>
                         <a:t>Low 0–1 (38); high 2–3 (9)</a:t>
                       </a:r>
-                      <a:endParaRPr lang="en-US" sz="1500" dirty="0"/>
+                      <a:endParaRPr lang="en-US" sz="1600" dirty="0"/>
                     </a:p>
                   </a:txBody>
                   <a:tcPr marL="25400" marR="101600" marT="63500" marB="63500" anchor="ctr">
@@ -9256,28 +9256,28 @@
                         <a:buNone/>
                       </a:pPr>
                       <a:r>
-                        <a:rPr lang="en-US" sz="1500" dirty="0">
+                        <a:rPr lang="en-US" sz="1600" dirty="0">
                           <a:solidFill>
                             <a:schemeClr val="tx1"/>
                           </a:solidFill>
                         </a:rPr>
                         <a:t>SF3B1-T · Mayo</a:t>
                       </a:r>
-                      <a:endParaRPr lang="en-US" sz="1500" dirty="0"/>
-                    </a:p>
-                    <a:p>
-                      <a:pPr indent="0" marL="0">
-                        <a:buNone/>
-                      </a:pPr>
-                      <a:r>
-                        <a:rPr lang="en-US" sz="1500" dirty="0">
+                      <a:endParaRPr lang="en-US" sz="1600" dirty="0"/>
+                    </a:p>
+                    <a:p>
+                      <a:pPr indent="0" marL="0">
+                        <a:buNone/>
+                      </a:pPr>
+                      <a:r>
+                        <a:rPr lang="en-US" sz="1600" dirty="0">
                           <a:solidFill>
                             <a:schemeClr val="tx1"/>
                           </a:solidFill>
                         </a:rPr>
                         <a:t>(Patnaik 2016)</a:t>
                       </a:r>
-                      <a:endParaRPr lang="en-US" sz="1500" dirty="0"/>
+                      <a:endParaRPr lang="en-US" sz="1600" dirty="0"/>
                     </a:p>
                   </a:txBody>
                   <a:tcPr marL="25400" marR="101600" marT="63500" marB="63500" anchor="ctr">
@@ -9310,28 +9310,28 @@
                         <a:buNone/>
                       </a:pPr>
                       <a:r>
-                        <a:rPr lang="en-US" sz="1500" dirty="0">
+                        <a:rPr lang="en-US" sz="1600" dirty="0">
                           <a:solidFill>
                             <a:schemeClr val="tx1"/>
                           </a:solidFill>
                         </a:rPr>
                         <a:t>Hb &lt; 10 [1]; abnormal karyotype [2];</a:t>
                       </a:r>
-                      <a:endParaRPr lang="en-US" sz="1500" dirty="0"/>
-                    </a:p>
-                    <a:p>
-                      <a:pPr indent="0" marL="0">
-                        <a:buNone/>
-                      </a:pPr>
-                      <a:r>
-                        <a:rPr lang="en-US" sz="1500" dirty="0">
+                      <a:endParaRPr lang="en-US" sz="1600" dirty="0"/>
+                    </a:p>
+                    <a:p>
+                      <a:pPr indent="0" marL="0">
+                        <a:buNone/>
+                      </a:pPr>
+                      <a:r>
+                        <a:rPr lang="en-US" sz="1600" dirty="0">
                           <a:solidFill>
                             <a:schemeClr val="tx1"/>
                           </a:solidFill>
                         </a:rPr>
                         <a:t>ASXL1 [1]; SETBP1 [1]</a:t>
                       </a:r>
-                      <a:endParaRPr lang="en-US" sz="1500" dirty="0"/>
+                      <a:endParaRPr lang="en-US" sz="1600" dirty="0"/>
                     </a:p>
                   </a:txBody>
                   <a:tcPr marL="25400" marR="101600" marT="63500" marB="63500" anchor="ctr">
@@ -9364,28 +9364,28 @@
                         <a:buNone/>
                       </a:pPr>
                       <a:r>
-                        <a:rPr lang="en-US" sz="1500" dirty="0">
+                        <a:rPr lang="en-US" sz="1600" dirty="0">
                           <a:solidFill>
                             <a:schemeClr val="tx1"/>
                           </a:solidFill>
                         </a:rPr>
                         <a:t>Low 0 (80); int 1 (42);</a:t>
                       </a:r>
-                      <a:endParaRPr lang="en-US" sz="1500" dirty="0"/>
-                    </a:p>
-                    <a:p>
-                      <a:pPr indent="0" marL="0">
-                        <a:buNone/>
-                      </a:pPr>
-                      <a:r>
-                        <a:rPr lang="en-US" sz="1500" dirty="0">
+                      <a:endParaRPr lang="en-US" sz="1600" dirty="0"/>
+                    </a:p>
+                    <a:p>
+                      <a:pPr indent="0" marL="0">
+                        <a:buNone/>
+                      </a:pPr>
+                      <a:r>
+                        <a:rPr lang="en-US" sz="1600" dirty="0">
                           <a:solidFill>
                             <a:schemeClr val="tx1"/>
                           </a:solidFill>
                         </a:rPr>
                         <a:t>high ≥ 2 (11)</a:t>
                       </a:r>
-                      <a:endParaRPr lang="en-US" sz="1500" dirty="0"/>
+                      <a:endParaRPr lang="en-US" sz="1600" dirty="0"/>
                     </a:p>
                   </a:txBody>
                   <a:tcPr marL="25400" marR="101600" marT="63500" marB="63500" anchor="ctr">
@@ -9420,14 +9420,14 @@
                         <a:buNone/>
                       </a:pPr>
                       <a:r>
-                        <a:rPr lang="en-US" sz="1500" dirty="0">
+                        <a:rPr lang="en-US" sz="1600" dirty="0">
                           <a:solidFill>
                             <a:schemeClr val="tx1"/>
                           </a:solidFill>
                         </a:rPr>
                         <a:t>MDS/MPN-NOS</a:t>
                       </a:r>
-                      <a:endParaRPr lang="en-US" sz="1500" dirty="0"/>
+                      <a:endParaRPr lang="en-US" sz="1600" dirty="0"/>
                     </a:p>
                   </a:txBody>
                   <a:tcPr marL="25400" marR="101600" marT="63500" marB="63500" anchor="ctr">
@@ -9460,14 +9460,14 @@
                         <a:buNone/>
                       </a:pPr>
                       <a:r>
-                        <a:rPr lang="en-US" sz="1500" dirty="0">
+                        <a:rPr lang="en-US" sz="1600" dirty="0">
                           <a:solidFill>
                             <a:schemeClr val="tx1"/>
                           </a:solidFill>
                         </a:rPr>
                         <a:t>No specific score or molecular marker</a:t>
                       </a:r>
-                      <a:endParaRPr lang="en-US" sz="1500" dirty="0"/>
+                      <a:endParaRPr lang="en-US" sz="1600" dirty="0"/>
                     </a:p>
                   </a:txBody>
                   <a:tcPr marL="25400" marR="101600" marT="63500" marB="63500" anchor="ctr">
@@ -9500,14 +9500,14 @@
                         <a:buNone/>
                       </a:pPr>
                       <a:r>
-                        <a:rPr lang="en-US" sz="1500" dirty="0">
+                        <a:rPr lang="en-US" sz="1600" dirty="0">
                           <a:solidFill>
                             <a:schemeClr val="tx1"/>
                           </a:solidFill>
                         </a:rPr>
                         <a:t>Median OS 12.4–33 (4 series)</a:t>
                       </a:r>
-                      <a:endParaRPr lang="en-US" sz="1500" dirty="0"/>
+                      <a:endParaRPr lang="en-US" sz="1600" dirty="0"/>
                     </a:p>
                   </a:txBody>
                   <a:tcPr marL="25400" marR="101600" marT="63500" marB="63500" anchor="ctr">
@@ -9566,7 +9566,7 @@
                   <a:schemeClr val="tx1"/>
                 </a:solidFill>
               </a:rPr>
-              <a:t>GFM anaemia: Hb &lt; 10 g/dL (F) or &lt; 11 g/dL (M); counts × 10⁹/L; Hb in g/dL</a:t>
+              <a:t>GFM anaemia: Hb &lt; 10 g/dL (F), &lt; 11 g/dL (M); I-1/I-2, intermediate-1/-2; counts × 10⁹/L</a:t>
             </a:r>
             <a:endParaRPr lang="en-US" sz="1600" dirty="0"/>
           </a:p>
@@ -10744,14 +10744,14 @@
                         <a:buNone/>
                       </a:pPr>
                       <a:r>
-                        <a:rPr lang="en-US" sz="1500" b="1" dirty="0">
+                        <a:rPr lang="en-US" sz="1600" b="1" dirty="0">
                           <a:solidFill>
                             <a:schemeClr val="tx1"/>
                           </a:solidFill>
                         </a:rPr>
                         <a:t>Situation</a:t>
                       </a:r>
-                      <a:endParaRPr lang="en-US" sz="1500" dirty="0"/>
+                      <a:endParaRPr lang="en-US" sz="1600" dirty="0"/>
                     </a:p>
                   </a:txBody>
                   <a:tcPr marL="25400" marR="101600" marT="63500" marB="63500" anchor="ctr">
@@ -10790,14 +10790,14 @@
                         <a:buNone/>
                       </a:pPr>
                       <a:r>
-                        <a:rPr lang="en-US" sz="1500" b="1" dirty="0">
+                        <a:rPr lang="en-US" sz="1600" b="1" dirty="0">
                           <a:solidFill>
                             <a:schemeClr val="tx1"/>
                           </a:solidFill>
                         </a:rPr>
                         <a:t>Bridge or control (Ch. 76)</a:t>
                       </a:r>
-                      <a:endParaRPr lang="en-US" sz="1500" dirty="0"/>
+                      <a:endParaRPr lang="en-US" sz="1600" dirty="0"/>
                     </a:p>
                   </a:txBody>
                   <a:tcPr marL="25400" marR="101600" marT="63500" marB="63500" anchor="ctr">
@@ -10838,14 +10838,14 @@
                         <a:buNone/>
                       </a:pPr>
                       <a:r>
-                        <a:rPr lang="en-US" sz="1500" dirty="0">
+                        <a:rPr lang="en-US" sz="1600" dirty="0">
                           <a:solidFill>
                             <a:schemeClr val="tx1"/>
                           </a:solidFill>
                         </a:rPr>
                         <a:t>High risk, marrow blasts &lt; 10%</a:t>
                       </a:r>
-                      <a:endParaRPr lang="en-US" sz="1500" dirty="0"/>
+                      <a:endParaRPr lang="en-US" sz="1600" dirty="0"/>
                     </a:p>
                   </a:txBody>
                   <a:tcPr marL="25400" marR="101600" marT="63500" marB="63500" anchor="ctr">
@@ -10878,14 +10878,14 @@
                         <a:buNone/>
                       </a:pPr>
                       <a:r>
-                        <a:rPr lang="en-US" sz="1500" dirty="0">
+                        <a:rPr lang="en-US" sz="1600" dirty="0">
                           <a:solidFill>
                             <a:schemeClr val="tx1"/>
                           </a:solidFill>
                         </a:rPr>
                         <a:t>Upfront allo-HCT preferred</a:t>
                       </a:r>
-                      <a:endParaRPr lang="en-US" sz="1500" dirty="0"/>
+                      <a:endParaRPr lang="en-US" sz="1600" dirty="0"/>
                     </a:p>
                   </a:txBody>
                   <a:tcPr marL="25400" marR="101600" marT="63500" marB="63500" anchor="ctr">
@@ -10920,14 +10920,14 @@
                         <a:buNone/>
                       </a:pPr>
                       <a:r>
-                        <a:rPr lang="en-US" sz="1500" dirty="0">
+                        <a:rPr lang="en-US" sz="1600" dirty="0">
                           <a:solidFill>
                             <a:schemeClr val="tx1"/>
                           </a:solidFill>
                         </a:rPr>
                         <a:t>CMML: rising WBC or organ infiltration</a:t>
                       </a:r>
-                      <a:endParaRPr lang="en-US" sz="1500" dirty="0"/>
+                      <a:endParaRPr lang="en-US" sz="1600" dirty="0"/>
                     </a:p>
                   </a:txBody>
                   <a:tcPr marL="25400" marR="101600" marT="63500" marB="63500" anchor="ctr">
@@ -10960,14 +10960,14 @@
                         <a:buNone/>
                       </a:pPr>
                       <a:r>
-                        <a:rPr lang="en-US" sz="1500" dirty="0">
+                        <a:rPr lang="en-US" sz="1600" dirty="0">
                           <a:solidFill>
                             <a:schemeClr val="tx1"/>
                           </a:solidFill>
                         </a:rPr>
                         <a:t>Hydroxyurea is the drug of choice</a:t>
                       </a:r>
-                      <a:endParaRPr lang="en-US" sz="1500" dirty="0"/>
+                      <a:endParaRPr lang="en-US" sz="1600" dirty="0"/>
                     </a:p>
                   </a:txBody>
                   <a:tcPr marL="25400" marR="101600" marT="63500" marB="63500" anchor="ctr">
@@ -11002,14 +11002,14 @@
                         <a:buNone/>
                       </a:pPr>
                       <a:r>
-                        <a:rPr lang="en-US" sz="1500" dirty="0">
+                        <a:rPr lang="en-US" sz="1600" dirty="0">
                           <a:solidFill>
                             <a:schemeClr val="tx1"/>
                           </a:solidFill>
                         </a:rPr>
                         <a:t>CMML-2 or marrow blasts &gt; 10%</a:t>
                       </a:r>
-                      <a:endParaRPr lang="en-US" sz="1500" dirty="0"/>
+                      <a:endParaRPr lang="en-US" sz="1600" dirty="0"/>
                     </a:p>
                   </a:txBody>
                   <a:tcPr marL="25400" marR="101600" marT="63500" marB="63500" anchor="ctr">
@@ -11042,14 +11042,14 @@
                         <a:buNone/>
                       </a:pPr>
                       <a:r>
-                        <a:rPr lang="en-US" sz="1500" dirty="0">
+                        <a:rPr lang="en-US" sz="1600" dirty="0">
                           <a:solidFill>
                             <a:schemeClr val="tx1"/>
                           </a:solidFill>
                         </a:rPr>
                         <a:t>HMA (ORR 40–50%) or AML-like induction</a:t>
                       </a:r>
-                      <a:endParaRPr lang="en-US" sz="1500" dirty="0"/>
+                      <a:endParaRPr lang="en-US" sz="1600" dirty="0"/>
                     </a:p>
                   </a:txBody>
                   <a:tcPr marL="25400" marR="101600" marT="63500" marB="63500" anchor="ctr">
@@ -11084,14 +11084,14 @@
                         <a:buNone/>
                       </a:pPr>
                       <a:r>
-                        <a:rPr lang="en-US" sz="1500" dirty="0">
+                        <a:rPr lang="en-US" sz="1600" dirty="0">
                           <a:solidFill>
                             <a:schemeClr val="tx1"/>
                           </a:solidFill>
                         </a:rPr>
                         <a:t>MDS/MPN-N: leukocytosis</a:t>
                       </a:r>
-                      <a:endParaRPr lang="en-US" sz="1500" dirty="0"/>
+                      <a:endParaRPr lang="en-US" sz="1600" dirty="0"/>
                     </a:p>
                   </a:txBody>
                   <a:tcPr marL="25400" marR="101600" marT="63500" marB="63500" anchor="ctr">
@@ -11124,14 +11124,14 @@
                         <a:buNone/>
                       </a:pPr>
                       <a:r>
-                        <a:rPr lang="en-US" sz="1500" dirty="0">
+                        <a:rPr lang="en-US" sz="1600" dirty="0">
                           <a:solidFill>
                             <a:schemeClr val="tx1"/>
                           </a:solidFill>
                         </a:rPr>
                         <a:t>HU or IFN-α; induction if high blasts or AML</a:t>
                       </a:r>
-                      <a:endParaRPr lang="en-US" sz="1500" dirty="0"/>
+                      <a:endParaRPr lang="en-US" sz="1600" dirty="0"/>
                     </a:p>
                   </a:txBody>
                   <a:tcPr marL="25400" marR="101600" marT="63500" marB="63500" anchor="ctr">
@@ -11166,14 +11166,14 @@
                         <a:buNone/>
                       </a:pPr>
                       <a:r>
-                        <a:rPr lang="en-US" sz="1500" dirty="0">
+                        <a:rPr lang="en-US" sz="1600" dirty="0">
                           <a:solidFill>
                             <a:schemeClr val="tx1"/>
                           </a:solidFill>
                         </a:rPr>
                         <a:t>MDS/MPN-N: mutations</a:t>
                       </a:r>
-                      <a:endParaRPr lang="en-US" sz="1500" dirty="0"/>
+                      <a:endParaRPr lang="en-US" sz="1600" dirty="0"/>
                     </a:p>
                   </a:txBody>
                   <a:tcPr marL="25400" marR="101600" marT="63500" marB="63500" anchor="ctr">
@@ -11206,14 +11206,14 @@
                         <a:buNone/>
                       </a:pPr>
                       <a:r>
-                        <a:rPr lang="en-US" sz="1500" dirty="0">
+                        <a:rPr lang="en-US" sz="1600" dirty="0">
                           <a:solidFill>
                             <a:schemeClr val="tx1"/>
                           </a:solidFill>
                         </a:rPr>
                         <a:t>ASXL1 43%, SETBP1 30%, ETNK1 16%; JAK2 0–7%</a:t>
                       </a:r>
-                      <a:endParaRPr lang="en-US" sz="1500" dirty="0"/>
+                      <a:endParaRPr lang="en-US" sz="1600" dirty="0"/>
                     </a:p>
                   </a:txBody>
                   <a:tcPr marL="25400" marR="101600" marT="63500" marB="63500" anchor="ctr">
@@ -11248,14 +11248,14 @@
                         <a:buNone/>
                       </a:pPr>
                       <a:r>
-                        <a:rPr lang="en-US" sz="1500" dirty="0">
+                        <a:rPr lang="en-US" sz="1600" dirty="0">
                           <a:solidFill>
                             <a:schemeClr val="tx1"/>
                           </a:solidFill>
                         </a:rPr>
                         <a:t>MDS/MPN-SF3B1-T</a:t>
                       </a:r>
-                      <a:endParaRPr lang="en-US" sz="1500" dirty="0"/>
+                      <a:endParaRPr lang="en-US" sz="1600" dirty="0"/>
                     </a:p>
                   </a:txBody>
                   <a:tcPr marL="25400" marR="101600" marT="63500" marB="63500" anchor="ctr">
@@ -11288,14 +11288,14 @@
                         <a:buNone/>
                       </a:pPr>
                       <a:r>
-                        <a:rPr lang="en-US" sz="1500" dirty="0">
+                        <a:rPr lang="en-US" sz="1600" dirty="0">
                           <a:solidFill>
                             <a:schemeClr val="tx1"/>
                           </a:solidFill>
                         </a:rPr>
                         <a:t>Lenalidomide for transfusions; antiplatelet, cytoreduction</a:t>
                       </a:r>
-                      <a:endParaRPr lang="en-US" sz="1500" dirty="0"/>
+                      <a:endParaRPr lang="en-US" sz="1600" dirty="0"/>
                     </a:p>
                   </a:txBody>
                   <a:tcPr marL="25400" marR="101600" marT="63500" marB="63500" anchor="ctr">
@@ -11330,14 +11330,14 @@
                         <a:buNone/>
                       </a:pPr>
                       <a:r>
-                        <a:rPr lang="en-US" sz="1500" dirty="0">
+                        <a:rPr lang="en-US" sz="1600" dirty="0">
                           <a:solidFill>
                             <a:schemeClr val="tx1"/>
                           </a:solidFill>
                         </a:rPr>
                         <a:t>MDS/MPN-NOS</a:t>
                       </a:r>
-                      <a:endParaRPr lang="en-US" sz="1500" dirty="0"/>
+                      <a:endParaRPr lang="en-US" sz="1600" dirty="0"/>
                     </a:p>
                   </a:txBody>
                   <a:tcPr marL="25400" marR="101600" marT="63500" marB="63500" anchor="ctr">
@@ -11370,28 +11370,28 @@
                         <a:buNone/>
                       </a:pPr>
                       <a:r>
-                        <a:rPr lang="en-US" sz="1500" dirty="0">
-                          <a:solidFill>
-                            <a:schemeClr val="tx1"/>
-                          </a:solidFill>
-                        </a:rPr>
-                        <a:t>HU or IFN-α if proliferative; HMA or lenalidomide</a:t>
-                      </a:r>
-                      <a:endParaRPr lang="en-US" sz="1500" dirty="0"/>
-                    </a:p>
-                    <a:p>
-                      <a:pPr indent="0" marL="0">
-                        <a:buNone/>
-                      </a:pPr>
-                      <a:r>
-                        <a:rPr lang="en-US" sz="1500" dirty="0">
-                          <a:solidFill>
-                            <a:schemeClr val="tx1"/>
-                          </a:solidFill>
-                        </a:rPr>
-                        <a:t>if cytopenic</a:t>
-                      </a:r>
-                      <a:endParaRPr lang="en-US" sz="1500" dirty="0"/>
+                        <a:rPr lang="en-US" sz="1600" dirty="0">
+                          <a:solidFill>
+                            <a:schemeClr val="tx1"/>
+                          </a:solidFill>
+                        </a:rPr>
+                        <a:t>HU/IFN-α if proliferative;</a:t>
+                      </a:r>
+                      <a:endParaRPr lang="en-US" sz="1600" dirty="0"/>
+                    </a:p>
+                    <a:p>
+                      <a:pPr indent="0" marL="0">
+                        <a:buNone/>
+                      </a:pPr>
+                      <a:r>
+                        <a:rPr lang="en-US" sz="1600" dirty="0">
+                          <a:solidFill>
+                            <a:schemeClr val="tx1"/>
+                          </a:solidFill>
+                        </a:rPr>
+                        <a:t>HMA or lenalidomide if cytopenic</a:t>
+                      </a:r>
+                      <a:endParaRPr lang="en-US" sz="1600" dirty="0"/>
                     </a:p>
                   </a:txBody>
                   <a:tcPr marL="25400" marR="101600" marT="63500" marB="63500" anchor="ctr">
@@ -11426,14 +11426,14 @@
                         <a:buNone/>
                       </a:pPr>
                       <a:r>
-                        <a:rPr lang="en-US" sz="1500" dirty="0">
+                        <a:rPr lang="en-US" sz="1600" dirty="0">
                           <a:solidFill>
                             <a:schemeClr val="tx1"/>
                           </a:solidFill>
                         </a:rPr>
                         <a:t>Progression to AML (any entity)</a:t>
                       </a:r>
-                      <a:endParaRPr lang="en-US" sz="1500" dirty="0"/>
+                      <a:endParaRPr lang="en-US" sz="1600" dirty="0"/>
                     </a:p>
                   </a:txBody>
                   <a:tcPr marL="25400" marR="101600" marT="63500" marB="63500" anchor="ctr">
@@ -11466,14 +11466,14 @@
                         <a:buNone/>
                       </a:pPr>
                       <a:r>
-                        <a:rPr lang="en-US" sz="1500" dirty="0">
+                        <a:rPr lang="en-US" sz="1600" dirty="0">
                           <a:solidFill>
                             <a:schemeClr val="tx1"/>
                           </a:solidFill>
                         </a:rPr>
                         <a:t>Induction chemotherapy as a bridge</a:t>
                       </a:r>
-                      <a:endParaRPr lang="en-US" sz="1500" dirty="0"/>
+                      <a:endParaRPr lang="en-US" sz="1600" dirty="0"/>
                     </a:p>
                   </a:txBody>
                   <a:tcPr marL="25400" marR="101600" marT="63500" marB="63500" anchor="ctr">
@@ -11722,14 +11722,14 @@
                         <a:buNone/>
                       </a:pPr>
                       <a:r>
-                        <a:rPr lang="en-US" sz="1600" b="1" dirty="0">
+                        <a:rPr lang="en-US" sz="1700" b="1" dirty="0">
                           <a:solidFill>
                             <a:schemeClr val="tx1"/>
                           </a:solidFill>
                         </a:rPr>
                         <a:t>Decision</a:t>
                       </a:r>
-                      <a:endParaRPr lang="en-US" sz="1600" dirty="0"/>
+                      <a:endParaRPr lang="en-US" sz="1700" dirty="0"/>
                     </a:p>
                   </a:txBody>
                   <a:tcPr marL="25400" marR="101600" marT="63500" marB="63500" anchor="ctr">
@@ -11768,14 +11768,14 @@
                         <a:buNone/>
                       </a:pPr>
                       <a:r>
-                        <a:rPr lang="en-US" sz="1600" b="1" dirty="0">
+                        <a:rPr lang="en-US" sz="1700" b="1" dirty="0">
                           <a:solidFill>
                             <a:schemeClr val="tx1"/>
                           </a:solidFill>
                         </a:rPr>
                         <a:t>Chapter guidance</a:t>
                       </a:r>
-                      <a:endParaRPr lang="en-US" sz="1600" dirty="0"/>
+                      <a:endParaRPr lang="en-US" sz="1700" dirty="0"/>
                     </a:p>
                   </a:txBody>
                   <a:tcPr marL="25400" marR="101600" marT="63500" marB="63500" anchor="ctr">
@@ -11816,14 +11816,14 @@
                         <a:buNone/>
                       </a:pPr>
                       <a:r>
-                        <a:rPr lang="en-US" sz="1600" dirty="0">
+                        <a:rPr lang="en-US" sz="1700" dirty="0">
                           <a:solidFill>
                             <a:schemeClr val="tx1"/>
                           </a:solidFill>
                         </a:rPr>
                         <a:t>Age &lt; 60 and HCT-CI &lt; 3</a:t>
                       </a:r>
-                      <a:endParaRPr lang="en-US" sz="1600" dirty="0"/>
+                      <a:endParaRPr lang="en-US" sz="1700" dirty="0"/>
                     </a:p>
                   </a:txBody>
                   <a:tcPr marL="25400" marR="101600" marT="63500" marB="63500" anchor="ctr">
@@ -11856,14 +11856,14 @@
                         <a:buNone/>
                       </a:pPr>
                       <a:r>
-                        <a:rPr lang="en-US" sz="1600" dirty="0">
+                        <a:rPr lang="en-US" sz="1700" dirty="0">
                           <a:solidFill>
                             <a:schemeClr val="tx1"/>
                           </a:solidFill>
                         </a:rPr>
                         <a:t>MAC: BU-CY, TBF, TTF or FB4; esp. proliferative</a:t>
                       </a:r>
-                      <a:endParaRPr lang="en-US" sz="1600" dirty="0"/>
+                      <a:endParaRPr lang="en-US" sz="1700" dirty="0"/>
                     </a:p>
                   </a:txBody>
                   <a:tcPr marL="25400" marR="101600" marT="63500" marB="63500" anchor="ctr">
@@ -11898,14 +11898,14 @@
                         <a:buNone/>
                       </a:pPr>
                       <a:r>
-                        <a:rPr lang="en-US" sz="1600" dirty="0">
+                        <a:rPr lang="en-US" sz="1700" dirty="0">
                           <a:solidFill>
                             <a:schemeClr val="tx1"/>
                           </a:solidFill>
                         </a:rPr>
                         <a:t>Older, comorbid or in remission</a:t>
                       </a:r>
-                      <a:endParaRPr lang="en-US" sz="1600" dirty="0"/>
+                      <a:endParaRPr lang="en-US" sz="1700" dirty="0"/>
                     </a:p>
                   </a:txBody>
                   <a:tcPr marL="25400" marR="101600" marT="63500" marB="63500" anchor="ctr">
@@ -11938,14 +11938,14 @@
                         <a:buNone/>
                       </a:pPr>
                       <a:r>
-                        <a:rPr lang="en-US" sz="1600" dirty="0">
+                        <a:rPr lang="en-US" sz="1700" dirty="0">
                           <a:solidFill>
                             <a:schemeClr val="tx1"/>
                           </a:solidFill>
                         </a:rPr>
                         <a:t>RIC: BU/FLU, TREO10/FLU, reduced TBF/TTF</a:t>
                       </a:r>
-                      <a:endParaRPr lang="en-US" sz="1600" dirty="0"/>
+                      <a:endParaRPr lang="en-US" sz="1700" dirty="0"/>
                     </a:p>
                   </a:txBody>
                   <a:tcPr marL="25400" marR="101600" marT="63500" marB="63500" anchor="ctr">
@@ -11980,14 +11980,14 @@
                         <a:buNone/>
                       </a:pPr>
                       <a:r>
-                        <a:rPr lang="en-US" sz="1600" dirty="0">
+                        <a:rPr lang="en-US" sz="1700" dirty="0">
                           <a:solidFill>
                             <a:schemeClr val="tx1"/>
                           </a:solidFill>
                         </a:rPr>
                         <a:t>Largest CMML series</a:t>
                       </a:r>
-                      <a:endParaRPr lang="en-US" sz="1600" dirty="0"/>
+                      <a:endParaRPr lang="en-US" sz="1700" dirty="0"/>
                     </a:p>
                   </a:txBody>
                   <a:tcPr marL="25400" marR="101600" marT="63500" marB="63500" anchor="ctr">
@@ -12020,14 +12020,14 @@
                         <a:buNone/>
                       </a:pPr>
                       <a:r>
-                        <a:rPr lang="en-US" sz="1600" dirty="0">
+                        <a:rPr lang="en-US" sz="1700" dirty="0">
                           <a:solidFill>
                             <a:schemeClr val="tx1"/>
                           </a:solidFill>
                         </a:rPr>
                         <a:t>MAC and RIC about equal; no outcome difference</a:t>
                       </a:r>
-                      <a:endParaRPr lang="en-US" sz="1600" dirty="0"/>
+                      <a:endParaRPr lang="en-US" sz="1700" dirty="0"/>
                     </a:p>
                   </a:txBody>
                   <a:tcPr marL="25400" marR="101600" marT="63500" marB="63500" anchor="ctr">
@@ -12062,14 +12062,14 @@
                         <a:buNone/>
                       </a:pPr>
                       <a:r>
-                        <a:rPr lang="en-US" sz="1600" dirty="0">
+                        <a:rPr lang="en-US" sz="1700" dirty="0">
                           <a:solidFill>
                             <a:schemeClr val="tx1"/>
                           </a:solidFill>
                         </a:rPr>
                         <a:t>Advanced CMML</a:t>
                       </a:r>
-                      <a:endParaRPr lang="en-US" sz="1600" dirty="0"/>
+                      <a:endParaRPr lang="en-US" sz="1700" dirty="0"/>
                     </a:p>
                   </a:txBody>
                   <a:tcPr marL="25400" marR="101600" marT="63500" marB="63500" anchor="ctr">
@@ -12102,28 +12102,28 @@
                         <a:buNone/>
                       </a:pPr>
                       <a:r>
-                        <a:rPr lang="en-US" sz="1600" dirty="0">
+                        <a:rPr lang="en-US" sz="1700" dirty="0">
                           <a:solidFill>
                             <a:schemeClr val="tx1"/>
                           </a:solidFill>
                         </a:rPr>
                         <a:t>Fractionated 6–8 Gy TBI/FLU: improved outcome</a:t>
                       </a:r>
-                      <a:endParaRPr lang="en-US" sz="1600" dirty="0"/>
-                    </a:p>
-                    <a:p>
-                      <a:pPr indent="0" marL="0">
-                        <a:buNone/>
-                      </a:pPr>
-                      <a:r>
-                        <a:rPr lang="en-US" sz="1600" dirty="0">
+                      <a:endParaRPr lang="en-US" sz="1700" dirty="0"/>
+                    </a:p>
+                    <a:p>
+                      <a:pPr indent="0" marL="0">
+                        <a:buNone/>
+                      </a:pPr>
+                      <a:r>
+                        <a:rPr lang="en-US" sz="1700" dirty="0">
                           <a:solidFill>
                             <a:schemeClr val="tx1"/>
                           </a:solidFill>
                         </a:rPr>
                         <a:t>(one report)</a:t>
                       </a:r>
-                      <a:endParaRPr lang="en-US" sz="1600" dirty="0"/>
+                      <a:endParaRPr lang="en-US" sz="1700" dirty="0"/>
                     </a:p>
                   </a:txBody>
                   <a:tcPr marL="25400" marR="101600" marT="63500" marB="63500" anchor="ctr">
@@ -12158,14 +12158,14 @@
                         <a:buNone/>
                       </a:pPr>
                       <a:r>
-                        <a:rPr lang="en-US" sz="1600" dirty="0">
+                        <a:rPr lang="en-US" sz="1700" dirty="0">
                           <a:solidFill>
                             <a:schemeClr val="tx1"/>
                           </a:solidFill>
                         </a:rPr>
                         <a:t>Stem cell source</a:t>
                       </a:r>
-                      <a:endParaRPr lang="en-US" sz="1600" dirty="0"/>
+                      <a:endParaRPr lang="en-US" sz="1700" dirty="0"/>
                     </a:p>
                   </a:txBody>
                   <a:tcPr marL="25400" marR="101600" marT="63500" marB="63500" anchor="ctr">
@@ -12198,28 +12198,28 @@
                         <a:buNone/>
                       </a:pPr>
                       <a:r>
-                        <a:rPr lang="en-US" sz="1600" dirty="0">
+                        <a:rPr lang="en-US" sz="1700" dirty="0">
                           <a:solidFill>
                             <a:schemeClr val="tx1"/>
                           </a:solidFill>
                         </a:rPr>
                         <a:t>Open; PBSC may cut graft failure and relapse,</a:t>
                       </a:r>
-                      <a:endParaRPr lang="en-US" sz="1600" dirty="0"/>
-                    </a:p>
-                    <a:p>
-                      <a:pPr indent="0" marL="0">
-                        <a:buNone/>
-                      </a:pPr>
-                      <a:r>
-                        <a:rPr lang="en-US" sz="1600" dirty="0">
+                      <a:endParaRPr lang="en-US" sz="1700" dirty="0"/>
+                    </a:p>
+                    <a:p>
+                      <a:pPr indent="0" marL="0">
+                        <a:buNone/>
+                      </a:pPr>
+                      <a:r>
+                        <a:rPr lang="en-US" sz="1700" dirty="0">
                           <a:solidFill>
                             <a:schemeClr val="tx1"/>
                           </a:solidFill>
                         </a:rPr>
                         <a:t>esp. with RIC</a:t>
                       </a:r>
-                      <a:endParaRPr lang="en-US" sz="1600" dirty="0"/>
+                      <a:endParaRPr lang="en-US" sz="1700" dirty="0"/>
                     </a:p>
                   </a:txBody>
                   <a:tcPr marL="25400" marR="101600" marT="63500" marB="63500" anchor="ctr">
@@ -12254,14 +12254,14 @@
                         <a:buNone/>
                       </a:pPr>
                       <a:r>
-                        <a:rPr lang="en-US" sz="1600" dirty="0">
+                        <a:rPr lang="en-US" sz="1700" dirty="0">
                           <a:solidFill>
                             <a:schemeClr val="tx1"/>
                           </a:solidFill>
                         </a:rPr>
                         <a:t>Autologous HCT</a:t>
                       </a:r>
-                      <a:endParaRPr lang="en-US" sz="1600" dirty="0"/>
+                      <a:endParaRPr lang="en-US" sz="1700" dirty="0"/>
                     </a:p>
                   </a:txBody>
                   <a:tcPr marL="25400" marR="101600" marT="63500" marB="63500" anchor="ctr">
@@ -12294,14 +12294,14 @@
                         <a:buNone/>
                       </a:pPr>
                       <a:r>
-                        <a:rPr lang="en-US" sz="1600" dirty="0">
+                        <a:rPr lang="en-US" sz="1700" dirty="0">
                           <a:solidFill>
                             <a:schemeClr val="tx1"/>
                           </a:solidFill>
                         </a:rPr>
                         <a:t>Not recommended: no polyclonal harvest</a:t>
                       </a:r>
-                      <a:endParaRPr lang="en-US" sz="1600" dirty="0"/>
+                      <a:endParaRPr lang="en-US" sz="1700" dirty="0"/>
                     </a:p>
                   </a:txBody>
                   <a:tcPr marL="25400" marR="101600" marT="63500" marB="63500" anchor="ctr">
@@ -12336,14 +12336,14 @@
                         <a:buNone/>
                       </a:pPr>
                       <a:r>
-                        <a:rPr lang="en-US" sz="1600" dirty="0">
+                        <a:rPr lang="en-US" sz="1700" dirty="0">
                           <a:solidFill>
                             <a:schemeClr val="tx1"/>
                           </a:solidFill>
                         </a:rPr>
                         <a:t>After HCT</a:t>
                       </a:r>
-                      <a:endParaRPr lang="en-US" sz="1600" dirty="0"/>
+                      <a:endParaRPr lang="en-US" sz="1700" dirty="0"/>
                     </a:p>
                   </a:txBody>
                   <a:tcPr marL="25400" marR="101600" marT="63500" marB="63500" anchor="ctr">
@@ -12376,28 +12376,28 @@
                         <a:buNone/>
                       </a:pPr>
                       <a:r>
-                        <a:rPr lang="en-US" sz="1600" dirty="0">
-                          <a:solidFill>
-                            <a:schemeClr val="tx1"/>
-                          </a:solidFill>
-                        </a:rPr>
-                        <a:t>cGVHD lowers relapse; DLI at low burden;</a:t>
-                      </a:r>
-                      <a:endParaRPr lang="en-US" sz="1600" dirty="0"/>
-                    </a:p>
-                    <a:p>
-                      <a:pPr indent="0" marL="0">
-                        <a:buNone/>
-                      </a:pPr>
-                      <a:r>
-                        <a:rPr lang="en-US" sz="1600" dirty="0">
+                        <a:rPr lang="en-US" sz="1700" dirty="0">
+                          <a:solidFill>
+                            <a:schemeClr val="tx1"/>
+                          </a:solidFill>
+                        </a:rPr>
+                        <a:t>cGVHD: less relapse; DLI at low burden;</a:t>
+                      </a:r>
+                      <a:endParaRPr lang="en-US" sz="1700" dirty="0"/>
+                    </a:p>
+                    <a:p>
+                      <a:pPr indent="0" marL="0">
+                        <a:buNone/>
+                      </a:pPr>
+                      <a:r>
+                        <a:rPr lang="en-US" sz="1700" dirty="0">
                           <a:solidFill>
                             <a:schemeClr val="tx1"/>
                           </a:solidFill>
                         </a:rPr>
                         <a:t>HMA ± DLI under study</a:t>
                       </a:r>
-                      <a:endParaRPr lang="en-US" sz="1600" dirty="0"/>
+                      <a:endParaRPr lang="en-US" sz="1700" dirty="0"/>
                     </a:p>
                   </a:txBody>
                   <a:tcPr marL="25400" marR="101600" marT="63500" marB="63500" anchor="ctr">
@@ -17003,14 +17003,14 @@
                         <a:buNone/>
                       </a:pPr>
                       <a:r>
-                        <a:rPr lang="en-US" sz="1500" b="1" dirty="0">
+                        <a:rPr lang="en-US" sz="1600" b="1" dirty="0">
                           <a:solidFill>
                             <a:schemeClr val="tx1"/>
                           </a:solidFill>
                         </a:rPr>
                         <a:t>Study</a:t>
                       </a:r>
-                      <a:endParaRPr lang="en-US" sz="1500" dirty="0"/>
+                      <a:endParaRPr lang="en-US" sz="1600" dirty="0"/>
                     </a:p>
                   </a:txBody>
                   <a:tcPr marL="25400" marR="101600" marT="63500" marB="63500" anchor="ctr">
@@ -17049,14 +17049,14 @@
                         <a:buNone/>
                       </a:pPr>
                       <a:r>
-                        <a:rPr lang="en-US" sz="1500" b="1" dirty="0">
+                        <a:rPr lang="en-US" sz="1600" b="1" dirty="0">
                           <a:solidFill>
                             <a:schemeClr val="tx1"/>
                           </a:solidFill>
                         </a:rPr>
                         <a:t>n; median age</a:t>
                       </a:r>
-                      <a:endParaRPr lang="en-US" sz="1500" dirty="0"/>
+                      <a:endParaRPr lang="en-US" sz="1600" dirty="0"/>
                     </a:p>
                   </a:txBody>
                   <a:tcPr marL="25400" marR="101600" marT="63500" marB="63500" anchor="ctr">
@@ -17095,14 +17095,14 @@
                         <a:buNone/>
                       </a:pPr>
                       <a:r>
-                        <a:rPr lang="en-US" sz="1500" b="1" dirty="0">
+                        <a:rPr lang="en-US" sz="1600" b="1" dirty="0">
                           <a:solidFill>
                             <a:schemeClr val="tx1"/>
                           </a:solidFill>
                         </a:rPr>
                         <a:t>MAC / RIC</a:t>
                       </a:r>
-                      <a:endParaRPr lang="en-US" sz="1500" dirty="0"/>
+                      <a:endParaRPr lang="en-US" sz="1600" dirty="0"/>
                     </a:p>
                   </a:txBody>
                   <a:tcPr marL="25400" marR="101600" marT="63500" marB="63500" anchor="ctr">
@@ -17141,14 +17141,14 @@
                         <a:buNone/>
                       </a:pPr>
                       <a:r>
-                        <a:rPr lang="en-US" sz="1500" b="1" dirty="0">
+                        <a:rPr lang="en-US" sz="1600" b="1" dirty="0">
                           <a:solidFill>
                             <a:schemeClr val="tx1"/>
                           </a:solidFill>
                         </a:rPr>
                         <a:t>TRM / relapse</a:t>
                       </a:r>
-                      <a:endParaRPr lang="en-US" sz="1500" dirty="0"/>
+                      <a:endParaRPr lang="en-US" sz="1600" dirty="0"/>
                     </a:p>
                   </a:txBody>
                   <a:tcPr marL="25400" marR="101600" marT="63500" marB="63500" anchor="ctr">
@@ -17187,14 +17187,14 @@
                         <a:buNone/>
                       </a:pPr>
                       <a:r>
-                        <a:rPr lang="en-US" sz="1500" b="1" dirty="0">
+                        <a:rPr lang="en-US" sz="1600" b="1" dirty="0">
                           <a:solidFill>
                             <a:schemeClr val="tx1"/>
                           </a:solidFill>
                         </a:rPr>
                         <a:t>Survival</a:t>
                       </a:r>
-                      <a:endParaRPr lang="en-US" sz="1500" dirty="0"/>
+                      <a:endParaRPr lang="en-US" sz="1600" dirty="0"/>
                     </a:p>
                   </a:txBody>
                   <a:tcPr marL="25400" marR="101600" marT="63500" marB="63500" anchor="ctr">
@@ -17235,14 +17235,14 @@
                         <a:buNone/>
                       </a:pPr>
                       <a:r>
-                        <a:rPr lang="en-US" sz="1500" dirty="0">
+                        <a:rPr lang="en-US" sz="1600" dirty="0">
                           <a:solidFill>
                             <a:schemeClr val="tx1"/>
                           </a:solidFill>
                         </a:rPr>
                         <a:t>Kröger 2002 (CMML)</a:t>
                       </a:r>
-                      <a:endParaRPr lang="en-US" sz="1500" dirty="0"/>
+                      <a:endParaRPr lang="en-US" sz="1600" dirty="0"/>
                     </a:p>
                   </a:txBody>
                   <a:tcPr marL="25400" marR="101600" marT="63500" marB="63500" anchor="ctr">
@@ -17275,14 +17275,14 @@
                         <a:buNone/>
                       </a:pPr>
                       <a:r>
-                        <a:rPr lang="en-US" sz="1500" dirty="0">
+                        <a:rPr lang="en-US" sz="1600" dirty="0">
                           <a:solidFill>
                             <a:schemeClr val="tx1"/>
                           </a:solidFill>
                         </a:rPr>
                         <a:t>50; 44</a:t>
                       </a:r>
-                      <a:endParaRPr lang="en-US" sz="1500" dirty="0"/>
+                      <a:endParaRPr lang="en-US" sz="1600" dirty="0"/>
                     </a:p>
                   </a:txBody>
                   <a:tcPr marL="25400" marR="101600" marT="63500" marB="63500" anchor="ctr">
@@ -17315,14 +17315,14 @@
                         <a:buNone/>
                       </a:pPr>
                       <a:r>
-                        <a:rPr lang="en-US" sz="1500" dirty="0">
+                        <a:rPr lang="en-US" sz="1600" dirty="0">
                           <a:solidFill>
                             <a:schemeClr val="tx1"/>
                           </a:solidFill>
                         </a:rPr>
                         <a:t>50 / 0</a:t>
                       </a:r>
-                      <a:endParaRPr lang="en-US" sz="1500" dirty="0"/>
+                      <a:endParaRPr lang="en-US" sz="1600" dirty="0"/>
                     </a:p>
                   </a:txBody>
                   <a:tcPr marL="25400" marR="101600" marT="63500" marB="63500" anchor="ctr">
@@ -17355,14 +17355,14 @@
                         <a:buNone/>
                       </a:pPr>
                       <a:r>
-                        <a:rPr lang="en-US" sz="1500" dirty="0">
+                        <a:rPr lang="en-US" sz="1600" dirty="0">
                           <a:solidFill>
                             <a:schemeClr val="tx1"/>
                           </a:solidFill>
                         </a:rPr>
                         <a:t>52% / 28%</a:t>
                       </a:r>
-                      <a:endParaRPr lang="en-US" sz="1500" dirty="0"/>
+                      <a:endParaRPr lang="en-US" sz="1600" dirty="0"/>
                     </a:p>
                   </a:txBody>
                   <a:tcPr marL="25400" marR="101600" marT="63500" marB="63500" anchor="ctr">
@@ -17395,14 +17395,14 @@
                         <a:buNone/>
                       </a:pPr>
                       <a:r>
-                        <a:rPr lang="en-US" sz="1500" dirty="0">
+                        <a:rPr lang="en-US" sz="1600" dirty="0">
                           <a:solidFill>
                             <a:schemeClr val="tx1"/>
                           </a:solidFill>
                         </a:rPr>
                         <a:t>5-y OS 21%</a:t>
                       </a:r>
-                      <a:endParaRPr lang="en-US" sz="1500" dirty="0"/>
+                      <a:endParaRPr lang="en-US" sz="1600" dirty="0"/>
                     </a:p>
                   </a:txBody>
                   <a:tcPr marL="25400" marR="101600" marT="63500" marB="63500" anchor="ctr">
@@ -17437,14 +17437,14 @@
                         <a:buNone/>
                       </a:pPr>
                       <a:r>
-                        <a:rPr lang="en-US" sz="1500" dirty="0">
+                        <a:rPr lang="en-US" sz="1600" dirty="0">
                           <a:solidFill>
                             <a:schemeClr val="tx1"/>
                           </a:solidFill>
                         </a:rPr>
                         <a:t>Symeonidis 2015 (CMML)</a:t>
                       </a:r>
-                      <a:endParaRPr lang="en-US" sz="1500" dirty="0"/>
+                      <a:endParaRPr lang="en-US" sz="1600" dirty="0"/>
                     </a:p>
                   </a:txBody>
                   <a:tcPr marL="25400" marR="101600" marT="63500" marB="63500" anchor="ctr">
@@ -17477,14 +17477,14 @@
                         <a:buNone/>
                       </a:pPr>
                       <a:r>
-                        <a:rPr lang="en-US" sz="1500" dirty="0">
+                        <a:rPr lang="en-US" sz="1600" dirty="0">
                           <a:solidFill>
                             <a:schemeClr val="tx1"/>
                           </a:solidFill>
                         </a:rPr>
                         <a:t>513; 53</a:t>
                       </a:r>
-                      <a:endParaRPr lang="en-US" sz="1500" dirty="0"/>
+                      <a:endParaRPr lang="en-US" sz="1600" dirty="0"/>
                     </a:p>
                   </a:txBody>
                   <a:tcPr marL="25400" marR="101600" marT="63500" marB="63500" anchor="ctr">
@@ -17517,14 +17517,14 @@
                         <a:buNone/>
                       </a:pPr>
                       <a:r>
-                        <a:rPr lang="en-US" sz="1500" dirty="0">
+                        <a:rPr lang="en-US" sz="1600" dirty="0">
                           <a:solidFill>
                             <a:schemeClr val="tx1"/>
                           </a:solidFill>
                         </a:rPr>
                         <a:t>249 / 226</a:t>
                       </a:r>
-                      <a:endParaRPr lang="en-US" sz="1500" dirty="0"/>
+                      <a:endParaRPr lang="en-US" sz="1600" dirty="0"/>
                     </a:p>
                   </a:txBody>
                   <a:tcPr marL="25400" marR="101600" marT="63500" marB="63500" anchor="ctr">
@@ -17557,14 +17557,14 @@
                         <a:buNone/>
                       </a:pPr>
                       <a:r>
-                        <a:rPr lang="en-US" sz="1500" dirty="0">
+                        <a:rPr lang="en-US" sz="1600" dirty="0">
                           <a:solidFill>
                             <a:schemeClr val="tx1"/>
                           </a:solidFill>
                         </a:rPr>
                         <a:t>4-y 41% / 32%</a:t>
                       </a:r>
-                      <a:endParaRPr lang="en-US" sz="1500" dirty="0"/>
+                      <a:endParaRPr lang="en-US" sz="1600" dirty="0"/>
                     </a:p>
                   </a:txBody>
                   <a:tcPr marL="25400" marR="101600" marT="63500" marB="63500" anchor="ctr">
@@ -17597,14 +17597,14 @@
                         <a:buNone/>
                       </a:pPr>
                       <a:r>
-                        <a:rPr lang="en-US" sz="1500" dirty="0">
+                        <a:rPr lang="en-US" sz="1600" dirty="0">
                           <a:solidFill>
                             <a:schemeClr val="tx1"/>
                           </a:solidFill>
                         </a:rPr>
                         <a:t>4-y OS 33%</a:t>
                       </a:r>
-                      <a:endParaRPr lang="en-US" sz="1500" dirty="0"/>
+                      <a:endParaRPr lang="en-US" sz="1600" dirty="0"/>
                     </a:p>
                   </a:txBody>
                   <a:tcPr marL="25400" marR="101600" marT="63500" marB="63500" anchor="ctr">
@@ -17639,14 +17639,14 @@
                         <a:buNone/>
                       </a:pPr>
                       <a:r>
-                        <a:rPr lang="en-US" sz="1500" dirty="0">
+                        <a:rPr lang="en-US" sz="1600" dirty="0">
                           <a:solidFill>
                             <a:schemeClr val="tx1"/>
                           </a:solidFill>
                         </a:rPr>
                         <a:t>Liu 2017 (CMML)</a:t>
                       </a:r>
-                      <a:endParaRPr lang="en-US" sz="1500" dirty="0"/>
+                      <a:endParaRPr lang="en-US" sz="1600" dirty="0"/>
                     </a:p>
                   </a:txBody>
                   <a:tcPr marL="25400" marR="101600" marT="63500" marB="63500" anchor="ctr">
@@ -17679,14 +17679,14 @@
                         <a:buNone/>
                       </a:pPr>
                       <a:r>
-                        <a:rPr lang="en-US" sz="1500" dirty="0">
+                        <a:rPr lang="en-US" sz="1600" dirty="0">
                           <a:solidFill>
                             <a:schemeClr val="tx1"/>
                           </a:solidFill>
                         </a:rPr>
                         <a:t>209; 57</a:t>
                       </a:r>
-                      <a:endParaRPr lang="en-US" sz="1500" dirty="0"/>
+                      <a:endParaRPr lang="en-US" sz="1600" dirty="0"/>
                     </a:p>
                   </a:txBody>
                   <a:tcPr marL="25400" marR="101600" marT="63500" marB="63500" anchor="ctr">
@@ -17719,14 +17719,14 @@
                         <a:buNone/>
                       </a:pPr>
                       <a:r>
-                        <a:rPr lang="en-US" sz="1500" dirty="0">
+                        <a:rPr lang="en-US" sz="1600" dirty="0">
                           <a:solidFill>
                             <a:schemeClr val="tx1"/>
                           </a:solidFill>
                         </a:rPr>
                         <a:t>105 / 99</a:t>
                       </a:r>
-                      <a:endParaRPr lang="en-US" sz="1500" dirty="0"/>
+                      <a:endParaRPr lang="en-US" sz="1600" dirty="0"/>
                     </a:p>
                   </a:txBody>
                   <a:tcPr marL="25400" marR="101600" marT="63500" marB="63500" anchor="ctr">
@@ -17759,14 +17759,14 @@
                         <a:buNone/>
                       </a:pPr>
                       <a:r>
-                        <a:rPr lang="en-US" sz="1500" dirty="0">
+                        <a:rPr lang="en-US" sz="1600" dirty="0">
                           <a:solidFill>
                             <a:schemeClr val="tx1"/>
                           </a:solidFill>
                         </a:rPr>
                         <a:t>5-y 28% / 52%</a:t>
                       </a:r>
-                      <a:endParaRPr lang="en-US" sz="1500" dirty="0"/>
+                      <a:endParaRPr lang="en-US" sz="1600" dirty="0"/>
                     </a:p>
                   </a:txBody>
                   <a:tcPr marL="25400" marR="101600" marT="63500" marB="63500" anchor="ctr">
@@ -17799,14 +17799,14 @@
                         <a:buNone/>
                       </a:pPr>
                       <a:r>
-                        <a:rPr lang="en-US" sz="1500" dirty="0">
+                        <a:rPr lang="en-US" sz="1600" dirty="0">
                           <a:solidFill>
                             <a:schemeClr val="tx1"/>
                           </a:solidFill>
                         </a:rPr>
                         <a:t>5-y OS 30%</a:t>
                       </a:r>
-                      <a:endParaRPr lang="en-US" sz="1500" dirty="0"/>
+                      <a:endParaRPr lang="en-US" sz="1600" dirty="0"/>
                     </a:p>
                   </a:txBody>
                   <a:tcPr marL="25400" marR="101600" marT="63500" marB="63500" anchor="ctr">
@@ -17841,14 +17841,14 @@
                         <a:buNone/>
                       </a:pPr>
                       <a:r>
-                        <a:rPr lang="en-US" sz="1500" dirty="0">
+                        <a:rPr lang="en-US" sz="1600" dirty="0">
                           <a:solidFill>
                             <a:schemeClr val="tx1"/>
                           </a:solidFill>
                         </a:rPr>
                         <a:t>Itonaga 2018 (CMML)</a:t>
                       </a:r>
-                      <a:endParaRPr lang="en-US" sz="1500" dirty="0"/>
+                      <a:endParaRPr lang="en-US" sz="1600" dirty="0"/>
                     </a:p>
                   </a:txBody>
                   <a:tcPr marL="25400" marR="101600" marT="63500" marB="63500" anchor="ctr">
@@ -17881,14 +17881,14 @@
                         <a:buNone/>
                       </a:pPr>
                       <a:r>
-                        <a:rPr lang="en-US" sz="1500" dirty="0">
+                        <a:rPr lang="en-US" sz="1600" dirty="0">
                           <a:solidFill>
                             <a:schemeClr val="tx1"/>
                           </a:solidFill>
                         </a:rPr>
                         <a:t>159; 54</a:t>
                       </a:r>
-                      <a:endParaRPr lang="en-US" sz="1500" dirty="0"/>
+                      <a:endParaRPr lang="en-US" sz="1600" dirty="0"/>
                     </a:p>
                   </a:txBody>
                   <a:tcPr marL="25400" marR="101600" marT="63500" marB="63500" anchor="ctr">
@@ -17921,14 +17921,14 @@
                         <a:buNone/>
                       </a:pPr>
                       <a:r>
-                        <a:rPr lang="en-US" sz="1500" dirty="0">
+                        <a:rPr lang="en-US" sz="1600" dirty="0">
                           <a:solidFill>
                             <a:schemeClr val="tx1"/>
                           </a:solidFill>
                         </a:rPr>
                         <a:t>92 / 67</a:t>
                       </a:r>
-                      <a:endParaRPr lang="en-US" sz="1500" dirty="0"/>
+                      <a:endParaRPr lang="en-US" sz="1600" dirty="0"/>
                     </a:p>
                   </a:txBody>
                   <a:tcPr marL="25400" marR="101600" marT="63500" marB="63500" anchor="ctr">
@@ -17961,14 +17961,14 @@
                         <a:buNone/>
                       </a:pPr>
                       <a:r>
-                        <a:rPr lang="en-US" sz="1500" dirty="0">
+                        <a:rPr lang="en-US" sz="1600" dirty="0">
                           <a:solidFill>
                             <a:schemeClr val="tx1"/>
                           </a:solidFill>
                         </a:rPr>
                         <a:t>28% / 39%</a:t>
                       </a:r>
-                      <a:endParaRPr lang="en-US" sz="1500" dirty="0"/>
+                      <a:endParaRPr lang="en-US" sz="1600" dirty="0"/>
                     </a:p>
                   </a:txBody>
                   <a:tcPr marL="25400" marR="101600" marT="63500" marB="63500" anchor="ctr">
@@ -18001,14 +18001,14 @@
                         <a:buNone/>
                       </a:pPr>
                       <a:r>
-                        <a:rPr lang="en-US" sz="1500" dirty="0">
+                        <a:rPr lang="en-US" sz="1600" dirty="0">
                           <a:solidFill>
                             <a:schemeClr val="tx1"/>
                           </a:solidFill>
                         </a:rPr>
                         <a:t>3-y OS 33%</a:t>
                       </a:r>
-                      <a:endParaRPr lang="en-US" sz="1500" dirty="0"/>
+                      <a:endParaRPr lang="en-US" sz="1600" dirty="0"/>
                     </a:p>
                   </a:txBody>
                   <a:tcPr marL="25400" marR="101600" marT="63500" marB="63500" anchor="ctr">
@@ -18043,14 +18043,14 @@
                         <a:buNone/>
                       </a:pPr>
                       <a:r>
-                        <a:rPr lang="en-US" sz="1500" dirty="0">
+                        <a:rPr lang="en-US" sz="1600" dirty="0">
                           <a:solidFill>
                             <a:schemeClr val="tx1"/>
                           </a:solidFill>
                         </a:rPr>
                         <a:t>Rovó 2023 (CMML)</a:t>
                       </a:r>
-                      <a:endParaRPr lang="en-US" sz="1500" dirty="0"/>
+                      <a:endParaRPr lang="en-US" sz="1600" dirty="0"/>
                     </a:p>
                   </a:txBody>
                   <a:tcPr marL="25400" marR="101600" marT="63500" marB="63500" anchor="ctr">
@@ -18083,14 +18083,14 @@
                         <a:buNone/>
                       </a:pPr>
                       <a:r>
-                        <a:rPr lang="en-US" sz="1500" dirty="0">
+                        <a:rPr lang="en-US" sz="1600" dirty="0">
                           <a:solidFill>
                             <a:schemeClr val="tx1"/>
                           </a:solidFill>
                         </a:rPr>
                         <a:t>1466; 60</a:t>
                       </a:r>
-                      <a:endParaRPr lang="en-US" sz="1500" dirty="0"/>
+                      <a:endParaRPr lang="en-US" sz="1600" dirty="0"/>
                     </a:p>
                   </a:txBody>
                   <a:tcPr marL="25400" marR="101600" marT="63500" marB="63500" anchor="ctr">
@@ -18123,14 +18123,14 @@
                         <a:buNone/>
                       </a:pPr>
                       <a:r>
-                        <a:rPr lang="en-US" sz="1500" dirty="0">
+                        <a:rPr lang="en-US" sz="1600" dirty="0">
                           <a:solidFill>
                             <a:schemeClr val="tx1"/>
                           </a:solidFill>
                         </a:rPr>
                         <a:t>36% / 64%</a:t>
                       </a:r>
-                      <a:endParaRPr lang="en-US" sz="1500" dirty="0"/>
+                      <a:endParaRPr lang="en-US" sz="1600" dirty="0"/>
                     </a:p>
                   </a:txBody>
                   <a:tcPr marL="25400" marR="101600" marT="63500" marB="63500" anchor="ctr">
@@ -18163,14 +18163,14 @@
                         <a:buNone/>
                       </a:pPr>
                       <a:r>
-                        <a:rPr lang="en-US" sz="1500" dirty="0">
+                        <a:rPr lang="en-US" sz="1600" dirty="0">
                           <a:solidFill>
                             <a:schemeClr val="tx1"/>
                           </a:solidFill>
                         </a:rPr>
                         <a:t>32% / 37%</a:t>
                       </a:r>
-                      <a:endParaRPr lang="en-US" sz="1500" dirty="0"/>
+                      <a:endParaRPr lang="en-US" sz="1600" dirty="0"/>
                     </a:p>
                   </a:txBody>
                   <a:tcPr marL="25400" marR="101600" marT="63500" marB="63500" anchor="ctr">
@@ -18203,14 +18203,14 @@
                         <a:buNone/>
                       </a:pPr>
                       <a:r>
-                        <a:rPr lang="en-US" sz="1500" dirty="0">
+                        <a:rPr lang="en-US" sz="1600" dirty="0">
                           <a:solidFill>
                             <a:schemeClr val="tx1"/>
                           </a:solidFill>
                         </a:rPr>
                         <a:t>5-y OS 37%</a:t>
                       </a:r>
-                      <a:endParaRPr lang="en-US" sz="1500" dirty="0"/>
+                      <a:endParaRPr lang="en-US" sz="1600" dirty="0"/>
                     </a:p>
                   </a:txBody>
                   <a:tcPr marL="25400" marR="101600" marT="63500" marB="63500" anchor="ctr">
@@ -18245,14 +18245,14 @@
                         <a:buNone/>
                       </a:pPr>
                       <a:r>
-                        <a:rPr lang="en-US" sz="1500" dirty="0">
+                        <a:rPr lang="en-US" sz="1600" dirty="0">
                           <a:solidFill>
                             <a:schemeClr val="tx1"/>
                           </a:solidFill>
                         </a:rPr>
                         <a:t>Onida 2017 (MDS/MPN-N)</a:t>
                       </a:r>
-                      <a:endParaRPr lang="en-US" sz="1500" dirty="0"/>
+                      <a:endParaRPr lang="en-US" sz="1600" dirty="0"/>
                     </a:p>
                   </a:txBody>
                   <a:tcPr marL="25400" marR="101600" marT="63500" marB="63500" anchor="ctr">
@@ -18285,14 +18285,14 @@
                         <a:buNone/>
                       </a:pPr>
                       <a:r>
-                        <a:rPr lang="en-US" sz="1500" dirty="0">
+                        <a:rPr lang="en-US" sz="1600" dirty="0">
                           <a:solidFill>
                             <a:schemeClr val="tx1"/>
                           </a:solidFill>
                         </a:rPr>
                         <a:t>42</a:t>
                       </a:r>
-                      <a:endParaRPr lang="en-US" sz="1500" dirty="0"/>
+                      <a:endParaRPr lang="en-US" sz="1600" dirty="0"/>
                     </a:p>
                   </a:txBody>
                   <a:tcPr marL="25400" marR="101600" marT="63500" marB="63500" anchor="ctr">
@@ -18325,14 +18325,14 @@
                         <a:buNone/>
                       </a:pPr>
                       <a:r>
-                        <a:rPr lang="en-US" sz="1500" dirty="0">
+                        <a:rPr lang="en-US" sz="1600" dirty="0">
                           <a:solidFill>
                             <a:schemeClr val="tx1"/>
                           </a:solidFill>
                         </a:rPr>
                         <a:t>MAC 76%</a:t>
                       </a:r>
-                      <a:endParaRPr lang="en-US" sz="1500" dirty="0"/>
+                      <a:endParaRPr lang="en-US" sz="1600" dirty="0"/>
                     </a:p>
                   </a:txBody>
                   <a:tcPr marL="25400" marR="101600" marT="63500" marB="63500" anchor="ctr">
@@ -18365,14 +18365,14 @@
                         <a:buNone/>
                       </a:pPr>
                       <a:r>
-                        <a:rPr lang="en-US" sz="1500" dirty="0">
+                        <a:rPr lang="en-US" sz="1600" dirty="0">
                           <a:solidFill>
                             <a:schemeClr val="tx1"/>
                           </a:solidFill>
                         </a:rPr>
                         <a:t>Relapse 40%</a:t>
                       </a:r>
-                      <a:endParaRPr lang="en-US" sz="1500" dirty="0"/>
+                      <a:endParaRPr lang="en-US" sz="1600" dirty="0"/>
                     </a:p>
                   </a:txBody>
                   <a:tcPr marL="25400" marR="101600" marT="63500" marB="63500" anchor="ctr">
@@ -18405,14 +18405,14 @@
                         <a:buNone/>
                       </a:pPr>
                       <a:r>
-                        <a:rPr lang="en-US" sz="1500" dirty="0">
+                        <a:rPr lang="en-US" sz="1600" dirty="0">
                           <a:solidFill>
                             <a:schemeClr val="tx1"/>
                           </a:solidFill>
                         </a:rPr>
                         <a:t>5-y OS 51%, RFS 36%</a:t>
                       </a:r>
-                      <a:endParaRPr lang="en-US" sz="1500" dirty="0"/>
+                      <a:endParaRPr lang="en-US" sz="1600" dirty="0"/>
                     </a:p>
                   </a:txBody>
                   <a:tcPr marL="25400" marR="101600" marT="63500" marB="63500" anchor="ctr">
@@ -18661,14 +18661,14 @@
                         <a:buNone/>
                       </a:pPr>
                       <a:r>
-                        <a:rPr lang="en-US" sz="1500" b="1" dirty="0">
+                        <a:rPr lang="en-US" sz="1600" b="1" dirty="0">
                           <a:solidFill>
                             <a:schemeClr val="tx1"/>
                           </a:solidFill>
                         </a:rPr>
                         <a:t>Setting</a:t>
                       </a:r>
-                      <a:endParaRPr lang="en-US" sz="1500" dirty="0"/>
+                      <a:endParaRPr lang="en-US" sz="1600" dirty="0"/>
                     </a:p>
                   </a:txBody>
                   <a:tcPr marL="25400" marR="101600" marT="63500" marB="63500" anchor="ctr">
@@ -18707,14 +18707,14 @@
                         <a:buNone/>
                       </a:pPr>
                       <a:r>
-                        <a:rPr lang="en-US" sz="1500" b="1" dirty="0">
+                        <a:rPr lang="en-US" sz="1600" b="1" dirty="0">
                           <a:solidFill>
                             <a:schemeClr val="tx1"/>
                           </a:solidFill>
                         </a:rPr>
                         <a:t>Chapter guidance</a:t>
                       </a:r>
-                      <a:endParaRPr lang="en-US" sz="1500" dirty="0"/>
+                      <a:endParaRPr lang="en-US" sz="1600" dirty="0"/>
                     </a:p>
                   </a:txBody>
                   <a:tcPr marL="25400" marR="101600" marT="63500" marB="63500" anchor="ctr">
@@ -18755,14 +18755,14 @@
                         <a:buNone/>
                       </a:pPr>
                       <a:r>
-                        <a:rPr lang="en-US" sz="1500" dirty="0">
+                        <a:rPr lang="en-US" sz="1600" dirty="0">
                           <a:solidFill>
                             <a:schemeClr val="tx1"/>
                           </a:solidFill>
                         </a:rPr>
                         <a:t>RCC with −7, del(7q) or ≥ 2 aberrations</a:t>
                       </a:r>
-                      <a:endParaRPr lang="en-US" sz="1500" dirty="0"/>
+                      <a:endParaRPr lang="en-US" sz="1600" dirty="0"/>
                     </a:p>
                   </a:txBody>
                   <a:tcPr marL="25400" marR="101600" marT="63500" marB="63500" anchor="ctr">
@@ -18795,14 +18795,14 @@
                         <a:buNone/>
                       </a:pPr>
                       <a:r>
-                        <a:rPr lang="en-US" sz="1500" dirty="0">
+                        <a:rPr lang="en-US" sz="1600" dirty="0">
                           <a:solidFill>
                             <a:schemeClr val="tx1"/>
                           </a:solidFill>
                         </a:rPr>
                         <a:t>Transplant early; MAC (TREO-based); OS ~90%</a:t>
                       </a:r>
-                      <a:endParaRPr lang="en-US" sz="1500" dirty="0"/>
+                      <a:endParaRPr lang="en-US" sz="1600" dirty="0"/>
                     </a:p>
                   </a:txBody>
                   <a:tcPr marL="25400" marR="101600" marT="63500" marB="63500" anchor="ctr">
@@ -18837,14 +18837,14 @@
                         <a:buNone/>
                       </a:pPr>
                       <a:r>
-                        <a:rPr lang="en-US" sz="1500" dirty="0">
+                        <a:rPr lang="en-US" sz="1600" dirty="0">
                           <a:solidFill>
                             <a:schemeClr val="tx1"/>
                           </a:solidFill>
                         </a:rPr>
                         <a:t>Hypocellular RCC, normal karyotype</a:t>
                       </a:r>
-                      <a:endParaRPr lang="en-US" sz="1500" dirty="0"/>
+                      <a:endParaRPr lang="en-US" sz="1600" dirty="0"/>
                     </a:p>
                   </a:txBody>
                   <a:tcPr marL="25400" marR="101600" marT="63500" marB="63500" anchor="ctr">
@@ -18877,28 +18877,28 @@
                         <a:buNone/>
                       </a:pPr>
                       <a:r>
-                        <a:rPr lang="en-US" sz="1500" dirty="0">
+                        <a:rPr lang="en-US" sz="1600" dirty="0">
                           <a:solidFill>
                             <a:schemeClr val="tx1"/>
                           </a:solidFill>
                         </a:rPr>
                         <a:t>RIC: TT/FLU OS 94% (Strahm 2017); now TREO/FLU;</a:t>
                       </a:r>
-                      <a:endParaRPr lang="en-US" sz="1500" dirty="0"/>
-                    </a:p>
-                    <a:p>
-                      <a:pPr indent="0" marL="0">
-                        <a:buNone/>
-                      </a:pPr>
-                      <a:r>
-                        <a:rPr lang="en-US" sz="1500" dirty="0">
+                      <a:endParaRPr lang="en-US" sz="1600" dirty="0"/>
+                    </a:p>
+                    <a:p>
+                      <a:pPr indent="0" marL="0">
+                        <a:buNone/>
+                      </a:pPr>
+                      <a:r>
+                        <a:rPr lang="en-US" sz="1600" dirty="0">
                           <a:solidFill>
                             <a:schemeClr val="tx1"/>
                           </a:solidFill>
                         </a:rPr>
                         <a:t>BM graft</a:t>
                       </a:r>
-                      <a:endParaRPr lang="en-US" sz="1500" dirty="0"/>
+                      <a:endParaRPr lang="en-US" sz="1600" dirty="0"/>
                     </a:p>
                   </a:txBody>
                   <a:tcPr marL="25400" marR="101600" marT="63500" marB="63500" anchor="ctr">
@@ -18933,14 +18933,14 @@
                         <a:buNone/>
                       </a:pPr>
                       <a:r>
-                        <a:rPr lang="en-US" sz="1500" dirty="0">
+                        <a:rPr lang="en-US" sz="1600" dirty="0">
                           <a:solidFill>
                             <a:schemeClr val="tx1"/>
                           </a:solidFill>
                         </a:rPr>
                         <a:t>Mild RCC, no −7, ANC &gt; 1 × 10⁹/L</a:t>
                       </a:r>
-                      <a:endParaRPr lang="en-US" sz="1500" dirty="0"/>
+                      <a:endParaRPr lang="en-US" sz="1600" dirty="0"/>
                     </a:p>
                   </a:txBody>
                   <a:tcPr marL="25400" marR="101600" marT="63500" marB="63500" anchor="ctr">
@@ -18973,14 +18973,14 @@
                         <a:buNone/>
                       </a:pPr>
                       <a:r>
-                        <a:rPr lang="en-US" sz="1500" dirty="0">
+                        <a:rPr lang="en-US" sz="1600" dirty="0">
                           <a:solidFill>
                             <a:schemeClr val="tx1"/>
                           </a:solidFill>
                         </a:rPr>
                         <a:t>Watch and observe</a:t>
                       </a:r>
-                      <a:endParaRPr lang="en-US" sz="1500" dirty="0"/>
+                      <a:endParaRPr lang="en-US" sz="1600" dirty="0"/>
                     </a:p>
                   </a:txBody>
                   <a:tcPr marL="25400" marR="101600" marT="63500" marB="63500" anchor="ctr">
@@ -19015,14 +19015,14 @@
                         <a:buNone/>
                       </a:pPr>
                       <a:r>
-                        <a:rPr lang="en-US" sz="1500" dirty="0">
+                        <a:rPr lang="en-US" sz="1600" dirty="0">
                           <a:solidFill>
                             <a:schemeClr val="tx1"/>
                           </a:solidFill>
                         </a:rPr>
                         <a:t>Primary MDS-EB</a:t>
                       </a:r>
-                      <a:endParaRPr lang="en-US" sz="1500" dirty="0"/>
+                      <a:endParaRPr lang="en-US" sz="1600" dirty="0"/>
                     </a:p>
                   </a:txBody>
                   <a:tcPr marL="25400" marR="101600" marT="63500" marB="63500" anchor="ctr">
@@ -19055,14 +19055,14 @@
                         <a:buNone/>
                       </a:pPr>
                       <a:r>
-                        <a:rPr lang="en-US" sz="1500" dirty="0">
+                        <a:rPr lang="en-US" sz="1600" dirty="0">
                           <a:solidFill>
                             <a:schemeClr val="tx1"/>
                           </a:solidFill>
                         </a:rPr>
                         <a:t>MAC BU/CY/MEL: 5-y OS 63% (Strahm 2011)</a:t>
                       </a:r>
-                      <a:endParaRPr lang="en-US" sz="1500" dirty="0"/>
+                      <a:endParaRPr lang="en-US" sz="1600" dirty="0"/>
                     </a:p>
                   </a:txBody>
                   <a:tcPr marL="25400" marR="101600" marT="63500" marB="63500" anchor="ctr">
@@ -19097,14 +19097,14 @@
                         <a:buNone/>
                       </a:pPr>
                       <a:r>
-                        <a:rPr lang="en-US" sz="1500" dirty="0">
+                        <a:rPr lang="en-US" sz="1600" dirty="0">
                           <a:solidFill>
                             <a:schemeClr val="tx1"/>
                           </a:solidFill>
                         </a:rPr>
                         <a:t>UBTF-TD (~1/3 of de novo MDS-EB)</a:t>
                       </a:r>
-                      <a:endParaRPr lang="en-US" sz="1500" dirty="0"/>
+                      <a:endParaRPr lang="en-US" sz="1600" dirty="0"/>
                     </a:p>
                   </a:txBody>
                   <a:tcPr marL="25400" marR="101600" marT="63500" marB="63500" anchor="ctr">
@@ -19137,14 +19137,14 @@
                         <a:buNone/>
                       </a:pPr>
                       <a:r>
-                        <a:rPr lang="en-US" sz="1500" dirty="0">
+                        <a:rPr lang="en-US" sz="1600" dirty="0">
                           <a:solidFill>
                             <a:schemeClr val="tx1"/>
                           </a:solidFill>
                         </a:rPr>
                         <a:t>Poor response to AML-type chemo; worse after HCT</a:t>
                       </a:r>
-                      <a:endParaRPr lang="en-US" sz="1500" dirty="0"/>
+                      <a:endParaRPr lang="en-US" sz="1600" dirty="0"/>
                     </a:p>
                   </a:txBody>
                   <a:tcPr marL="25400" marR="101600" marT="63500" marB="63500" anchor="ctr">
@@ -19179,14 +19179,14 @@
                         <a:buNone/>
                       </a:pPr>
                       <a:r>
-                        <a:rPr lang="en-US" sz="1500" dirty="0">
+                        <a:rPr lang="en-US" sz="1600" dirty="0">
                           <a:solidFill>
                             <a:schemeClr val="tx1"/>
                           </a:solidFill>
                         </a:rPr>
                         <a:t>GATA2 or SAMD9/SAMD9L germline</a:t>
                       </a:r>
-                      <a:endParaRPr lang="en-US" sz="1500" dirty="0"/>
+                      <a:endParaRPr lang="en-US" sz="1600" dirty="0"/>
                     </a:p>
                   </a:txBody>
                   <a:tcPr marL="25400" marR="101600" marT="63500" marB="63500" anchor="ctr">
@@ -19219,14 +19219,14 @@
                         <a:buNone/>
                       </a:pPr>
                       <a:r>
-                        <a:rPr lang="en-US" sz="1500" dirty="0">
+                        <a:rPr lang="en-US" sz="1600" dirty="0">
                           <a:solidFill>
                             <a:schemeClr val="tx1"/>
                           </a:solidFill>
                         </a:rPr>
                         <a:t>Same outcome when stratified; screen family donors</a:t>
                       </a:r>
-                      <a:endParaRPr lang="en-US" sz="1500" dirty="0"/>
+                      <a:endParaRPr lang="en-US" sz="1600" dirty="0"/>
                     </a:p>
                   </a:txBody>
                   <a:tcPr marL="25400" marR="101600" marT="63500" marB="63500" anchor="ctr">
@@ -19261,14 +19261,14 @@
                         <a:buNone/>
                       </a:pPr>
                       <a:r>
-                        <a:rPr lang="en-US" sz="1500" dirty="0">
+                        <a:rPr lang="en-US" sz="1600" dirty="0">
                           <a:solidFill>
                             <a:schemeClr val="tx1"/>
                           </a:solidFill>
                         </a:rPr>
                         <a:t>Therapy-related MDS</a:t>
                       </a:r>
-                      <a:endParaRPr lang="en-US" sz="1500" dirty="0"/>
+                      <a:endParaRPr lang="en-US" sz="1600" dirty="0"/>
                     </a:p>
                   </a:txBody>
                   <a:tcPr marL="25400" marR="101600" marT="63500" marB="63500" anchor="ctr">
@@ -19301,28 +19301,28 @@
                         <a:buNone/>
                       </a:pPr>
                       <a:r>
-                        <a:rPr lang="en-US" sz="1500" dirty="0">
+                        <a:rPr lang="en-US" sz="1600" dirty="0">
                           <a:solidFill>
                             <a:schemeClr val="tx1"/>
                           </a:solidFill>
                         </a:rPr>
                         <a:t>OS ≤ 20% with complex karyotype or TP53;</a:t>
                       </a:r>
-                      <a:endParaRPr lang="en-US" sz="1500" dirty="0"/>
-                    </a:p>
-                    <a:p>
-                      <a:pPr indent="0" marL="0">
-                        <a:buNone/>
-                      </a:pPr>
-                      <a:r>
-                        <a:rPr lang="en-US" sz="1500" dirty="0">
+                      <a:endParaRPr lang="en-US" sz="1600" dirty="0"/>
+                    </a:p>
+                    <a:p>
+                      <a:pPr indent="0" marL="0">
+                        <a:buNone/>
+                      </a:pPr>
+                      <a:r>
+                        <a:rPr lang="en-US" sz="1600" dirty="0">
                           <a:solidFill>
                             <a:schemeClr val="tx1"/>
                           </a:solidFill>
                         </a:rPr>
                         <a:t>~50% otherwise</a:t>
                       </a:r>
-                      <a:endParaRPr lang="en-US" sz="1500" dirty="0"/>
+                      <a:endParaRPr lang="en-US" sz="1600" dirty="0"/>
                     </a:p>
                   </a:txBody>
                   <a:tcPr marL="25400" marR="101600" marT="63500" marB="63500" anchor="ctr">
@@ -19571,14 +19571,14 @@
                         <a:buNone/>
                       </a:pPr>
                       <a:r>
-                        <a:rPr lang="en-US" sz="1500" b="1" dirty="0">
+                        <a:rPr lang="en-US" sz="1600" b="1" dirty="0">
                           <a:solidFill>
                             <a:schemeClr val="tx1"/>
                           </a:solidFill>
                         </a:rPr>
                         <a:t>Variable</a:t>
                       </a:r>
-                      <a:endParaRPr lang="en-US" sz="1500" dirty="0"/>
+                      <a:endParaRPr lang="en-US" sz="1600" dirty="0"/>
                     </a:p>
                   </a:txBody>
                   <a:tcPr marL="25400" marR="101600" marT="63500" marB="63500" anchor="ctr">
@@ -19617,14 +19617,14 @@
                         <a:buNone/>
                       </a:pPr>
                       <a:r>
-                        <a:rPr lang="en-US" sz="1500" b="1" dirty="0">
+                        <a:rPr lang="en-US" sz="1600" b="1" dirty="0">
                           <a:solidFill>
                             <a:schemeClr val="tx1"/>
                           </a:solidFill>
                         </a:rPr>
                         <a:t>Categories and points</a:t>
                       </a:r>
-                      <a:endParaRPr lang="en-US" sz="1500" dirty="0"/>
+                      <a:endParaRPr lang="en-US" sz="1600" dirty="0"/>
                     </a:p>
                   </a:txBody>
                   <a:tcPr marL="25400" marR="101600" marT="63500" marB="63500" anchor="ctr">
@@ -19665,14 +19665,14 @@
                         <a:buNone/>
                       </a:pPr>
                       <a:r>
-                        <a:rPr lang="en-US" sz="1500" dirty="0">
+                        <a:rPr lang="en-US" sz="1600" dirty="0">
                           <a:solidFill>
                             <a:schemeClr val="tx1"/>
                           </a:solidFill>
                         </a:rPr>
                         <a:t>Marrow blasts</a:t>
                       </a:r>
-                      <a:endParaRPr lang="en-US" sz="1500" dirty="0"/>
+                      <a:endParaRPr lang="en-US" sz="1600" dirty="0"/>
                     </a:p>
                   </a:txBody>
                   <a:tcPr marL="25400" marR="101600" marT="63500" marB="63500" anchor="ctr">
@@ -19705,14 +19705,14 @@
                         <a:buNone/>
                       </a:pPr>
                       <a:r>
-                        <a:rPr lang="en-US" sz="1500" dirty="0">
+                        <a:rPr lang="en-US" sz="1600" dirty="0">
                           <a:solidFill>
                             <a:schemeClr val="tx1"/>
                           </a:solidFill>
                         </a:rPr>
                         <a:t>&lt; 3% [0]; 3–4% [1]; 5–10% [2]; &gt; 10% [3]</a:t>
                       </a:r>
-                      <a:endParaRPr lang="en-US" sz="1500" dirty="0"/>
+                      <a:endParaRPr lang="en-US" sz="1600" dirty="0"/>
                     </a:p>
                   </a:txBody>
                   <a:tcPr marL="25400" marR="101600" marT="63500" marB="63500" anchor="ctr">
@@ -19747,14 +19747,14 @@
                         <a:buNone/>
                       </a:pPr>
                       <a:r>
-                        <a:rPr lang="en-US" sz="1500" dirty="0">
+                        <a:rPr lang="en-US" sz="1600" dirty="0">
                           <a:solidFill>
                             <a:schemeClr val="tx1"/>
                           </a:solidFill>
                         </a:rPr>
                         <a:t>Karyotype</a:t>
                       </a:r>
-                      <a:endParaRPr lang="en-US" sz="1500" dirty="0"/>
+                      <a:endParaRPr lang="en-US" sz="1600" dirty="0"/>
                     </a:p>
                   </a:txBody>
                   <a:tcPr marL="25400" marR="101600" marT="63500" marB="63500" anchor="ctr">
@@ -19787,14 +19787,14 @@
                         <a:buNone/>
                       </a:pPr>
                       <a:r>
-                        <a:rPr lang="en-US" sz="1500" dirty="0">
-                          <a:solidFill>
-                            <a:schemeClr val="tx1"/>
-                          </a:solidFill>
-                        </a:rPr>
-                        <a:t>Very good [0]; good [1]; intermediate [2]; poor [3]; very poor [4]</a:t>
-                      </a:r>
-                      <a:endParaRPr lang="en-US" sz="1500" dirty="0"/>
+                        <a:rPr lang="en-US" sz="1600" dirty="0">
+                          <a:solidFill>
+                            <a:schemeClr val="tx1"/>
+                          </a:solidFill>
+                        </a:rPr>
+                        <a:t>Very good [0]; good [1]; int [2]; poor [3]; very poor [4]</a:t>
+                      </a:r>
+                      <a:endParaRPr lang="en-US" sz="1600" dirty="0"/>
                     </a:p>
                   </a:txBody>
                   <a:tcPr marL="25400" marR="101600" marT="63500" marB="63500" anchor="ctr">
@@ -19829,14 +19829,14 @@
                         <a:buNone/>
                       </a:pPr>
                       <a:r>
-                        <a:rPr lang="en-US" sz="1500" dirty="0">
+                        <a:rPr lang="en-US" sz="1600" dirty="0">
                           <a:solidFill>
                             <a:schemeClr val="tx1"/>
                           </a:solidFill>
                         </a:rPr>
                         <a:t>Cytopenia</a:t>
                       </a:r>
-                      <a:endParaRPr lang="en-US" sz="1500" dirty="0"/>
+                      <a:endParaRPr lang="en-US" sz="1600" dirty="0"/>
                     </a:p>
                   </a:txBody>
                   <a:tcPr marL="25400" marR="101600" marT="63500" marB="63500" anchor="ctr">
@@ -19869,14 +19869,14 @@
                         <a:buNone/>
                       </a:pPr>
                       <a:r>
-                        <a:rPr lang="en-US" sz="1500" dirty="0">
+                        <a:rPr lang="en-US" sz="1600" dirty="0">
                           <a:solidFill>
                             <a:schemeClr val="tx1"/>
                           </a:solidFill>
                         </a:rPr>
                         <a:t>None [0]; mild [0.5]; moderate [1]; severe anaemia [1.5]</a:t>
                       </a:r>
-                      <a:endParaRPr lang="en-US" sz="1500" dirty="0"/>
+                      <a:endParaRPr lang="en-US" sz="1600" dirty="0"/>
                     </a:p>
                   </a:txBody>
                   <a:tcPr marL="25400" marR="101600" marT="63500" marB="63500" anchor="ctr">
@@ -19911,14 +19911,14 @@
                         <a:buNone/>
                       </a:pPr>
                       <a:r>
-                        <a:rPr lang="en-US" sz="1500" dirty="0">
+                        <a:rPr lang="en-US" sz="1600" dirty="0">
                           <a:solidFill>
                             <a:schemeClr val="tx1"/>
                           </a:solidFill>
                         </a:rPr>
                         <a:t>  Very good karyotype</a:t>
                       </a:r>
-                      <a:endParaRPr lang="en-US" sz="1500" dirty="0"/>
+                      <a:endParaRPr lang="en-US" sz="1600" dirty="0"/>
                     </a:p>
                   </a:txBody>
                   <a:tcPr marL="25400" marR="101600" marT="63500" marB="63500" anchor="ctr">
@@ -19951,14 +19951,14 @@
                         <a:buNone/>
                       </a:pPr>
                       <a:r>
-                        <a:rPr lang="en-US" sz="1500" dirty="0">
+                        <a:rPr lang="en-US" sz="1600" dirty="0">
                           <a:solidFill>
                             <a:schemeClr val="tx1"/>
                           </a:solidFill>
                         </a:rPr>
                         <a:t>−Y, del(11q)</a:t>
                       </a:r>
-                      <a:endParaRPr lang="en-US" sz="1500" dirty="0"/>
+                      <a:endParaRPr lang="en-US" sz="1600" dirty="0"/>
                     </a:p>
                   </a:txBody>
                   <a:tcPr marL="25400" marR="101600" marT="63500" marB="63500" anchor="ctr">
@@ -19993,14 +19993,14 @@
                         <a:buNone/>
                       </a:pPr>
                       <a:r>
-                        <a:rPr lang="en-US" sz="1500" dirty="0">
+                        <a:rPr lang="en-US" sz="1600" dirty="0">
                           <a:solidFill>
                             <a:schemeClr val="tx1"/>
                           </a:solidFill>
                         </a:rPr>
                         <a:t>  Good karyotype</a:t>
                       </a:r>
-                      <a:endParaRPr lang="en-US" sz="1500" dirty="0"/>
+                      <a:endParaRPr lang="en-US" sz="1600" dirty="0"/>
                     </a:p>
                   </a:txBody>
                   <a:tcPr marL="25400" marR="101600" marT="63500" marB="63500" anchor="ctr">
@@ -20033,14 +20033,14 @@
                         <a:buNone/>
                       </a:pPr>
                       <a:r>
-                        <a:rPr lang="en-US" sz="1500" dirty="0">
+                        <a:rPr lang="en-US" sz="1600" dirty="0">
                           <a:solidFill>
                             <a:schemeClr val="tx1"/>
                           </a:solidFill>
                         </a:rPr>
                         <a:t>Normal, del(5q), del(12p), del(20q), double incl. del(5q)</a:t>
                       </a:r>
-                      <a:endParaRPr lang="en-US" sz="1500" dirty="0"/>
+                      <a:endParaRPr lang="en-US" sz="1600" dirty="0"/>
                     </a:p>
                   </a:txBody>
                   <a:tcPr marL="25400" marR="101600" marT="63500" marB="63500" anchor="ctr">
@@ -20075,14 +20075,14 @@
                         <a:buNone/>
                       </a:pPr>
                       <a:r>
-                        <a:rPr lang="en-US" sz="1500" dirty="0">
+                        <a:rPr lang="en-US" sz="1600" dirty="0">
                           <a:solidFill>
                             <a:schemeClr val="tx1"/>
                           </a:solidFill>
                         </a:rPr>
                         <a:t>  Intermediate karyotype</a:t>
                       </a:r>
-                      <a:endParaRPr lang="en-US" sz="1500" dirty="0"/>
+                      <a:endParaRPr lang="en-US" sz="1600" dirty="0"/>
                     </a:p>
                   </a:txBody>
                   <a:tcPr marL="25400" marR="101600" marT="63500" marB="63500" anchor="ctr">
@@ -20115,14 +20115,14 @@
                         <a:buNone/>
                       </a:pPr>
                       <a:r>
-                        <a:rPr lang="en-US" sz="1500" dirty="0">
+                        <a:rPr lang="en-US" sz="1600" dirty="0">
                           <a:solidFill>
                             <a:schemeClr val="tx1"/>
                           </a:solidFill>
                         </a:rPr>
                         <a:t>del(7q), −8, −19, i(17q), any other single or double clone</a:t>
                       </a:r>
-                      <a:endParaRPr lang="en-US" sz="1500" dirty="0"/>
+                      <a:endParaRPr lang="en-US" sz="1600" dirty="0"/>
                     </a:p>
                   </a:txBody>
                   <a:tcPr marL="25400" marR="101600" marT="63500" marB="63500" anchor="ctr">
@@ -20157,14 +20157,14 @@
                         <a:buNone/>
                       </a:pPr>
                       <a:r>
-                        <a:rPr lang="en-US" sz="1500" dirty="0">
+                        <a:rPr lang="en-US" sz="1600" dirty="0">
                           <a:solidFill>
                             <a:schemeClr val="tx1"/>
                           </a:solidFill>
                         </a:rPr>
                         <a:t>  Poor karyotype</a:t>
                       </a:r>
-                      <a:endParaRPr lang="en-US" sz="1500" dirty="0"/>
+                      <a:endParaRPr lang="en-US" sz="1600" dirty="0"/>
                     </a:p>
                   </a:txBody>
                   <a:tcPr marL="25400" marR="101600" marT="63500" marB="63500" anchor="ctr">
@@ -20197,14 +20197,14 @@
                         <a:buNone/>
                       </a:pPr>
                       <a:r>
-                        <a:rPr lang="en-US" sz="1500" dirty="0">
+                        <a:rPr lang="en-US" sz="1600" dirty="0">
                           <a:solidFill>
                             <a:schemeClr val="tx1"/>
                           </a:solidFill>
                         </a:rPr>
                         <a:t>−7, inv(3)/t(3q)/del(3q), double incl. −7/del(7q), 3 abn.</a:t>
                       </a:r>
-                      <a:endParaRPr lang="en-US" sz="1500" dirty="0"/>
+                      <a:endParaRPr lang="en-US" sz="1600" dirty="0"/>
                     </a:p>
                   </a:txBody>
                   <a:tcPr marL="25400" marR="101600" marT="63500" marB="63500" anchor="ctr">
@@ -20239,14 +20239,14 @@
                         <a:buNone/>
                       </a:pPr>
                       <a:r>
-                        <a:rPr lang="en-US" sz="1500" dirty="0">
+                        <a:rPr lang="en-US" sz="1600" dirty="0">
                           <a:solidFill>
                             <a:schemeClr val="tx1"/>
                           </a:solidFill>
                         </a:rPr>
                         <a:t>  Very poor karyotype</a:t>
                       </a:r>
-                      <a:endParaRPr lang="en-US" sz="1500" dirty="0"/>
+                      <a:endParaRPr lang="en-US" sz="1600" dirty="0"/>
                     </a:p>
                   </a:txBody>
                   <a:tcPr marL="25400" marR="101600" marT="63500" marB="63500" anchor="ctr">
@@ -20279,14 +20279,14 @@
                         <a:buNone/>
                       </a:pPr>
                       <a:r>
-                        <a:rPr lang="en-US" sz="1500" dirty="0">
+                        <a:rPr lang="en-US" sz="1600" dirty="0">
                           <a:solidFill>
                             <a:schemeClr val="tx1"/>
                           </a:solidFill>
                         </a:rPr>
                         <a:t>Complex, &gt; 3 abnormalities</a:t>
                       </a:r>
-                      <a:endParaRPr lang="en-US" sz="1500" dirty="0"/>
+                      <a:endParaRPr lang="en-US" sz="1600" dirty="0"/>
                     </a:p>
                   </a:txBody>
                   <a:tcPr marL="25400" marR="101600" marT="63500" marB="63500" anchor="ctr">
@@ -20573,14 +20573,14 @@
                         <a:buNone/>
                       </a:pPr>
                       <a:r>
-                        <a:rPr lang="en-US" sz="1500" b="1" dirty="0">
+                        <a:rPr lang="en-US" sz="1600" b="1" dirty="0">
                           <a:solidFill>
                             <a:schemeClr val="tx1"/>
                           </a:solidFill>
                         </a:rPr>
                         <a:t>Subtype (share)</a:t>
                       </a:r>
-                      <a:endParaRPr lang="en-US" sz="1500" dirty="0"/>
+                      <a:endParaRPr lang="en-US" sz="1600" dirty="0"/>
                     </a:p>
                   </a:txBody>
                   <a:tcPr marL="25400" marR="101600" marT="63500" marB="63500" anchor="ctr">
@@ -20619,14 +20619,14 @@
                         <a:buNone/>
                       </a:pPr>
                       <a:r>
-                        <a:rPr lang="en-US" sz="1500" b="1" dirty="0">
+                        <a:rPr lang="en-US" sz="1600" b="1" dirty="0">
                           <a:solidFill>
                             <a:schemeClr val="tx1"/>
                           </a:solidFill>
                         </a:rPr>
                         <a:t>Features</a:t>
                       </a:r>
-                      <a:endParaRPr lang="en-US" sz="1500" dirty="0"/>
+                      <a:endParaRPr lang="en-US" sz="1600" dirty="0"/>
                     </a:p>
                   </a:txBody>
                   <a:tcPr marL="25400" marR="101600" marT="63500" marB="63500" anchor="ctr">
@@ -20665,14 +20665,14 @@
                         <a:buNone/>
                       </a:pPr>
                       <a:r>
-                        <a:rPr lang="en-US" sz="1500" b="1" dirty="0">
+                        <a:rPr lang="en-US" sz="1600" b="1" dirty="0">
                           <a:solidFill>
                             <a:schemeClr val="tx1"/>
                           </a:solidFill>
                         </a:rPr>
                         <a:t>Risk</a:t>
                       </a:r>
-                      <a:endParaRPr lang="en-US" sz="1500" dirty="0"/>
+                      <a:endParaRPr lang="en-US" sz="1600" dirty="0"/>
                     </a:p>
                   </a:txBody>
                   <a:tcPr marL="25400" marR="101600" marT="63500" marB="63500" anchor="ctr">
@@ -20711,14 +20711,14 @@
                         <a:buNone/>
                       </a:pPr>
                       <a:r>
-                        <a:rPr lang="en-US" sz="1500" b="1" dirty="0">
+                        <a:rPr lang="en-US" sz="1600" b="1" dirty="0">
                           <a:solidFill>
                             <a:schemeClr val="tx1"/>
                           </a:solidFill>
                         </a:rPr>
                         <a:t>HCT</a:t>
                       </a:r>
-                      <a:endParaRPr lang="en-US" sz="1500" dirty="0"/>
+                      <a:endParaRPr lang="en-US" sz="1600" dirty="0"/>
                     </a:p>
                   </a:txBody>
                   <a:tcPr marL="25400" marR="101600" marT="63500" marB="63500" anchor="ctr">
@@ -20759,14 +20759,14 @@
                         <a:buNone/>
                       </a:pPr>
                       <a:r>
-                        <a:rPr lang="en-US" sz="1500" dirty="0">
+                        <a:rPr lang="en-US" sz="1600" dirty="0">
                           <a:solidFill>
                             <a:schemeClr val="tx1"/>
                           </a:solidFill>
                         </a:rPr>
                         <a:t>PTPN11 (41%)</a:t>
                       </a:r>
-                      <a:endParaRPr lang="en-US" sz="1500" dirty="0"/>
+                      <a:endParaRPr lang="en-US" sz="1600" dirty="0"/>
                     </a:p>
                   </a:txBody>
                   <a:tcPr marL="25400" marR="101600" marT="63500" marB="63500" anchor="ctr">
@@ -20799,14 +20799,14 @@
                         <a:buNone/>
                       </a:pPr>
                       <a:r>
-                        <a:rPr lang="en-US" sz="1500" dirty="0">
+                        <a:rPr lang="en-US" sz="1600" dirty="0">
                           <a:solidFill>
                             <a:schemeClr val="tx1"/>
                           </a:solidFill>
                         </a:rPr>
                         <a:t>Somatic; exclude Noonan syndrome</a:t>
                       </a:r>
-                      <a:endParaRPr lang="en-US" sz="1500" dirty="0"/>
+                      <a:endParaRPr lang="en-US" sz="1600" dirty="0"/>
                     </a:p>
                   </a:txBody>
                   <a:tcPr marL="25400" marR="101600" marT="63500" marB="63500" anchor="ctr">
@@ -20839,14 +20839,14 @@
                         <a:buNone/>
                       </a:pPr>
                       <a:r>
-                        <a:rPr lang="en-US" sz="1500" dirty="0">
+                        <a:rPr lang="en-US" sz="1600" dirty="0">
                           <a:solidFill>
                             <a:schemeClr val="tx1"/>
                           </a:solidFill>
                         </a:rPr>
                         <a:t>Most often high</a:t>
                       </a:r>
-                      <a:endParaRPr lang="en-US" sz="1500" dirty="0"/>
+                      <a:endParaRPr lang="en-US" sz="1600" dirty="0"/>
                     </a:p>
                   </a:txBody>
                   <a:tcPr marL="25400" marR="101600" marT="63500" marB="63500" anchor="ctr">
@@ -20879,14 +20879,14 @@
                         <a:buNone/>
                       </a:pPr>
                       <a:r>
-                        <a:rPr lang="en-US" sz="1500" dirty="0">
+                        <a:rPr lang="en-US" sz="1600" dirty="0">
                           <a:solidFill>
                             <a:schemeClr val="tx1"/>
                           </a:solidFill>
                         </a:rPr>
                         <a:t>Indicated</a:t>
                       </a:r>
-                      <a:endParaRPr lang="en-US" sz="1500" dirty="0"/>
+                      <a:endParaRPr lang="en-US" sz="1600" dirty="0"/>
                     </a:p>
                   </a:txBody>
                   <a:tcPr marL="25400" marR="101600" marT="63500" marB="63500" anchor="ctr">
@@ -20921,14 +20921,14 @@
                         <a:buNone/>
                       </a:pPr>
                       <a:r>
-                        <a:rPr lang="en-US" sz="1500" dirty="0">
+                        <a:rPr lang="en-US" sz="1600" dirty="0">
                           <a:solidFill>
                             <a:schemeClr val="tx1"/>
                           </a:solidFill>
                         </a:rPr>
                         <a:t>NF1 (12%)</a:t>
                       </a:r>
-                      <a:endParaRPr lang="en-US" sz="1500" dirty="0"/>
+                      <a:endParaRPr lang="en-US" sz="1600" dirty="0"/>
                     </a:p>
                   </a:txBody>
                   <a:tcPr marL="25400" marR="101600" marT="63500" marB="63500" anchor="ctr">
@@ -20961,14 +20961,14 @@
                         <a:buNone/>
                       </a:pPr>
                       <a:r>
-                        <a:rPr lang="en-US" sz="1500" dirty="0">
+                        <a:rPr lang="en-US" sz="1600" dirty="0">
                           <a:solidFill>
                             <a:schemeClr val="tx1"/>
                           </a:solidFill>
                         </a:rPr>
                         <a:t>Germline NF1; older, higher platelets</a:t>
                       </a:r>
-                      <a:endParaRPr lang="en-US" sz="1500" dirty="0"/>
+                      <a:endParaRPr lang="en-US" sz="1600" dirty="0"/>
                     </a:p>
                   </a:txBody>
                   <a:tcPr marL="25400" marR="101600" marT="63500" marB="63500" anchor="ctr">
@@ -21001,14 +21001,14 @@
                         <a:buNone/>
                       </a:pPr>
                       <a:r>
-                        <a:rPr lang="en-US" sz="1500" dirty="0">
+                        <a:rPr lang="en-US" sz="1600" dirty="0">
                           <a:solidFill>
                             <a:schemeClr val="tx1"/>
                           </a:solidFill>
                         </a:rPr>
                         <a:t>Often high</a:t>
                       </a:r>
-                      <a:endParaRPr lang="en-US" sz="1500" dirty="0"/>
+                      <a:endParaRPr lang="en-US" sz="1600" dirty="0"/>
                     </a:p>
                   </a:txBody>
                   <a:tcPr marL="25400" marR="101600" marT="63500" marB="63500" anchor="ctr">
@@ -21041,14 +21041,14 @@
                         <a:buNone/>
                       </a:pPr>
                       <a:r>
-                        <a:rPr lang="en-US" sz="1500" dirty="0">
+                        <a:rPr lang="en-US" sz="1600" dirty="0">
                           <a:solidFill>
                             <a:schemeClr val="tx1"/>
                           </a:solidFill>
                         </a:rPr>
                         <a:t>Indicated</a:t>
                       </a:r>
-                      <a:endParaRPr lang="en-US" sz="1500" dirty="0"/>
+                      <a:endParaRPr lang="en-US" sz="1600" dirty="0"/>
                     </a:p>
                   </a:txBody>
                   <a:tcPr marL="25400" marR="101600" marT="63500" marB="63500" anchor="ctr">
@@ -21083,14 +21083,14 @@
                         <a:buNone/>
                       </a:pPr>
                       <a:r>
-                        <a:rPr lang="en-US" sz="1500" dirty="0">
+                        <a:rPr lang="en-US" sz="1600" dirty="0">
                           <a:solidFill>
                             <a:schemeClr val="tx1"/>
                           </a:solidFill>
                         </a:rPr>
                         <a:t>NRAS (16%)</a:t>
                       </a:r>
-                      <a:endParaRPr lang="en-US" sz="1500" dirty="0"/>
+                      <a:endParaRPr lang="en-US" sz="1600" dirty="0"/>
                     </a:p>
                   </a:txBody>
                   <a:tcPr marL="25400" marR="101600" marT="63500" marB="63500" anchor="ctr">
@@ -21123,14 +21123,14 @@
                         <a:buNone/>
                       </a:pPr>
                       <a:r>
-                        <a:rPr lang="en-US" sz="1500" dirty="0">
+                        <a:rPr lang="en-US" sz="1600" dirty="0">
                           <a:solidFill>
                             <a:schemeClr val="tx1"/>
                           </a:solidFill>
                         </a:rPr>
                         <a:t>Somatic; some regress spontaneously</a:t>
                       </a:r>
-                      <a:endParaRPr lang="en-US" sz="1500" dirty="0"/>
+                      <a:endParaRPr lang="en-US" sz="1600" dirty="0"/>
                     </a:p>
                   </a:txBody>
                   <a:tcPr marL="25400" marR="101600" marT="63500" marB="63500" anchor="ctr">
@@ -21163,14 +21163,14 @@
                         <a:buNone/>
                       </a:pPr>
                       <a:r>
-                        <a:rPr lang="en-US" sz="1500" dirty="0">
+                        <a:rPr lang="en-US" sz="1600" dirty="0">
                           <a:solidFill>
                             <a:schemeClr val="tx1"/>
                           </a:solidFill>
                         </a:rPr>
                         <a:t>Heterogeneous</a:t>
                       </a:r>
-                      <a:endParaRPr lang="en-US" sz="1500" dirty="0"/>
+                      <a:endParaRPr lang="en-US" sz="1600" dirty="0"/>
                     </a:p>
                   </a:txBody>
                   <a:tcPr marL="25400" marR="101600" marT="63500" marB="63500" anchor="ctr">
@@ -21203,14 +21203,14 @@
                         <a:buNone/>
                       </a:pPr>
                       <a:r>
-                        <a:rPr lang="en-US" sz="1500" dirty="0">
+                        <a:rPr lang="en-US" sz="1600" dirty="0">
                           <a:solidFill>
                             <a:schemeClr val="tx1"/>
                           </a:solidFill>
                         </a:rPr>
                         <a:t>High-risk only</a:t>
                       </a:r>
-                      <a:endParaRPr lang="en-US" sz="1500" dirty="0"/>
+                      <a:endParaRPr lang="en-US" sz="1600" dirty="0"/>
                     </a:p>
                   </a:txBody>
                   <a:tcPr marL="25400" marR="101600" marT="63500" marB="63500" anchor="ctr">
@@ -21245,14 +21245,14 @@
                         <a:buNone/>
                       </a:pPr>
                       <a:r>
-                        <a:rPr lang="en-US" sz="1500" dirty="0">
+                        <a:rPr lang="en-US" sz="1600" dirty="0">
                           <a:solidFill>
                             <a:schemeClr val="tx1"/>
                           </a:solidFill>
                         </a:rPr>
                         <a:t>KRAS (14%)</a:t>
                       </a:r>
-                      <a:endParaRPr lang="en-US" sz="1500" dirty="0"/>
+                      <a:endParaRPr lang="en-US" sz="1600" dirty="0"/>
                     </a:p>
                   </a:txBody>
                   <a:tcPr marL="25400" marR="101600" marT="63500" marB="63500" anchor="ctr">
@@ -21285,14 +21285,14 @@
                         <a:buNone/>
                       </a:pPr>
                       <a:r>
-                        <a:rPr lang="en-US" sz="1500" dirty="0">
+                        <a:rPr lang="en-US" sz="1600" dirty="0">
                           <a:solidFill>
                             <a:schemeClr val="tx1"/>
                           </a:solidFill>
                         </a:rPr>
                         <a:t>Median age 0.9 y; monosomy 7 frequent</a:t>
                       </a:r>
-                      <a:endParaRPr lang="en-US" sz="1500" dirty="0"/>
+                      <a:endParaRPr lang="en-US" sz="1600" dirty="0"/>
                     </a:p>
                   </a:txBody>
                   <a:tcPr marL="25400" marR="101600" marT="63500" marB="63500" anchor="ctr">
@@ -21325,14 +21325,14 @@
                         <a:buNone/>
                       </a:pPr>
                       <a:r>
-                        <a:rPr lang="en-US" sz="1500" dirty="0">
+                        <a:rPr lang="en-US" sz="1600" dirty="0">
                           <a:solidFill>
                             <a:schemeClr val="tx1"/>
                           </a:solidFill>
                         </a:rPr>
                         <a:t>Low or int</a:t>
                       </a:r>
-                      <a:endParaRPr lang="en-US" sz="1500" dirty="0"/>
+                      <a:endParaRPr lang="en-US" sz="1600" dirty="0"/>
                     </a:p>
                   </a:txBody>
                   <a:tcPr marL="25400" marR="101600" marT="63500" marB="63500" anchor="ctr">
@@ -21365,14 +21365,14 @@
                         <a:buNone/>
                       </a:pPr>
                       <a:r>
-                        <a:rPr lang="en-US" sz="1500" dirty="0">
+                        <a:rPr lang="en-US" sz="1600" dirty="0">
                           <a:solidFill>
                             <a:schemeClr val="tx1"/>
                           </a:solidFill>
                         </a:rPr>
                         <a:t>Most; some CR on AZA</a:t>
                       </a:r>
-                      <a:endParaRPr lang="en-US" sz="1500" dirty="0"/>
+                      <a:endParaRPr lang="en-US" sz="1600" dirty="0"/>
                     </a:p>
                   </a:txBody>
                   <a:tcPr marL="25400" marR="101600" marT="63500" marB="63500" anchor="ctr">
@@ -21407,14 +21407,14 @@
                         <a:buNone/>
                       </a:pPr>
                       <a:r>
-                        <a:rPr lang="en-US" sz="1500" dirty="0">
+                        <a:rPr lang="en-US" sz="1600" dirty="0">
                           <a:solidFill>
                             <a:schemeClr val="tx1"/>
                           </a:solidFill>
                         </a:rPr>
                         <a:t>CBL (12%)</a:t>
                       </a:r>
-                      <a:endParaRPr lang="en-US" sz="1500" dirty="0"/>
+                      <a:endParaRPr lang="en-US" sz="1600" dirty="0"/>
                     </a:p>
                   </a:txBody>
                   <a:tcPr marL="25400" marR="101600" marT="63500" marB="63500" anchor="ctr">
@@ -21447,14 +21447,14 @@
                         <a:buNone/>
                       </a:pPr>
                       <a:r>
-                        <a:rPr lang="en-US" sz="1500" dirty="0">
+                        <a:rPr lang="en-US" sz="1600" dirty="0">
                           <a:solidFill>
                             <a:schemeClr val="tx1"/>
                           </a:solidFill>
                         </a:rPr>
                         <a:t>Germline; vasculopathy risk</a:t>
                       </a:r>
-                      <a:endParaRPr lang="en-US" sz="1500" dirty="0"/>
+                      <a:endParaRPr lang="en-US" sz="1600" dirty="0"/>
                     </a:p>
                   </a:txBody>
                   <a:tcPr marL="25400" marR="101600" marT="63500" marB="63500" anchor="ctr">
@@ -21487,14 +21487,14 @@
                         <a:buNone/>
                       </a:pPr>
                       <a:r>
-                        <a:rPr lang="en-US" sz="1500" dirty="0">
+                        <a:rPr lang="en-US" sz="1600" dirty="0">
                           <a:solidFill>
                             <a:schemeClr val="tx1"/>
                           </a:solidFill>
                         </a:rPr>
                         <a:t>Generally low</a:t>
                       </a:r>
-                      <a:endParaRPr lang="en-US" sz="1500" dirty="0"/>
+                      <a:endParaRPr lang="en-US" sz="1600" dirty="0"/>
                     </a:p>
                   </a:txBody>
                   <a:tcPr marL="25400" marR="101600" marT="63500" marB="63500" anchor="ctr">
@@ -21527,14 +21527,14 @@
                         <a:buNone/>
                       </a:pPr>
                       <a:r>
-                        <a:rPr lang="en-US" sz="1500" dirty="0">
+                        <a:rPr lang="en-US" sz="1600" dirty="0">
                           <a:solidFill>
                             <a:schemeClr val="tx1"/>
                           </a:solidFill>
                         </a:rPr>
                         <a:t>Rarely required</a:t>
                       </a:r>
-                      <a:endParaRPr lang="en-US" sz="1500" dirty="0"/>
+                      <a:endParaRPr lang="en-US" sz="1600" dirty="0"/>
                     </a:p>
                   </a:txBody>
                   <a:tcPr marL="25400" marR="101600" marT="63500" marB="63500" anchor="ctr">
@@ -21571,7 +21571,7 @@
         </p:nvSpPr>
         <p:spPr>
           <a:xfrm>
-            <a:off x="685800" y="5486400"/>
+            <a:off x="685800" y="4343400"/>
             <a:ext cx="10817352" cy="411480"/>
           </a:xfrm>
           <a:prstGeom prst="rect">
@@ -21593,7 +21593,7 @@
                   <a:schemeClr val="tx1"/>
                 </a:solidFill>
               </a:rPr>
-              <a:t>Pre-HCT azacitidine; BU/CY/MEL with BM graft; relapse risk: age ≥ 2 y, HbF ≥ 15%, secondary mutations, high methylation</a:t>
+              <a:t>Pre-HCT azacitidine; BU/CY/MEL, BM graft · relapse risk: age ≥ 2 y, HbF ≥ 15%, secondary mutations, high methylation</a:t>
             </a:r>
             <a:endParaRPr lang="en-US" sz="1600" dirty="0"/>
           </a:p>
@@ -23067,14 +23067,14 @@
                         <a:buNone/>
                       </a:pPr>
                       <a:r>
-                        <a:rPr lang="en-US" sz="1500" b="1" dirty="0">
+                        <a:rPr lang="en-US" sz="1600" b="1" dirty="0">
                           <a:solidFill>
                             <a:schemeClr val="tx1"/>
                           </a:solidFill>
                         </a:rPr>
                         <a:t>Item</a:t>
                       </a:r>
-                      <a:endParaRPr lang="en-US" sz="1500" dirty="0"/>
+                      <a:endParaRPr lang="en-US" sz="1600" dirty="0"/>
                     </a:p>
                   </a:txBody>
                   <a:tcPr marL="25400" marR="101600" marT="63500" marB="63500" anchor="ctr">
@@ -23113,14 +23113,14 @@
                         <a:buNone/>
                       </a:pPr>
                       <a:r>
-                        <a:rPr lang="en-US" sz="1500" b="1" dirty="0">
+                        <a:rPr lang="en-US" sz="1600" b="1" dirty="0">
                           <a:solidFill>
                             <a:schemeClr val="tx1"/>
                           </a:solidFill>
                         </a:rPr>
                         <a:t>Chapter detail</a:t>
                       </a:r>
-                      <a:endParaRPr lang="en-US" sz="1500" dirty="0"/>
+                      <a:endParaRPr lang="en-US" sz="1600" dirty="0"/>
                     </a:p>
                   </a:txBody>
                   <a:tcPr marL="25400" marR="101600" marT="63500" marB="63500" anchor="ctr">
@@ -23161,14 +23161,14 @@
                         <a:buNone/>
                       </a:pPr>
                       <a:r>
-                        <a:rPr lang="en-US" sz="1500" dirty="0">
+                        <a:rPr lang="en-US" sz="1600" dirty="0">
                           <a:solidFill>
                             <a:schemeClr val="tx1"/>
                           </a:solidFill>
                         </a:rPr>
                         <a:t>Poor-risk cytogenetics</a:t>
                       </a:r>
-                      <a:endParaRPr lang="en-US" sz="1500" dirty="0"/>
+                      <a:endParaRPr lang="en-US" sz="1600" dirty="0"/>
                     </a:p>
                   </a:txBody>
                   <a:tcPr marL="25400" marR="101600" marT="63500" marB="63500" anchor="ctr">
@@ -23201,14 +23201,14 @@
                         <a:buNone/>
                       </a:pPr>
                       <a:r>
-                        <a:rPr lang="en-US" sz="1500" dirty="0">
+                        <a:rPr lang="en-US" sz="1600" dirty="0">
                           <a:solidFill>
                             <a:schemeClr val="tx1"/>
                           </a:solidFill>
                         </a:rPr>
                         <a:t>Poor or very poor karyotype</a:t>
                       </a:r>
-                      <a:endParaRPr lang="en-US" sz="1500" dirty="0"/>
+                      <a:endParaRPr lang="en-US" sz="1600" dirty="0"/>
                     </a:p>
                   </a:txBody>
                   <a:tcPr marL="25400" marR="101600" marT="63500" marB="63500" anchor="ctr">
@@ -23243,14 +23243,14 @@
                         <a:buNone/>
                       </a:pPr>
                       <a:r>
-                        <a:rPr lang="en-US" sz="1500" dirty="0">
+                        <a:rPr lang="en-US" sz="1600" dirty="0">
                           <a:solidFill>
                             <a:schemeClr val="tx1"/>
                           </a:solidFill>
                         </a:rPr>
                         <a:t>Persistent blast increase</a:t>
                       </a:r>
-                      <a:endParaRPr lang="en-US" sz="1500" dirty="0"/>
+                      <a:endParaRPr lang="en-US" sz="1600" dirty="0"/>
                     </a:p>
                   </a:txBody>
                   <a:tcPr marL="25400" marR="101600" marT="63500" marB="63500" anchor="ctr">
@@ -23283,14 +23283,14 @@
                         <a:buNone/>
                       </a:pPr>
                       <a:r>
-                        <a:rPr lang="en-US" sz="1500" dirty="0">
+                        <a:rPr lang="en-US" sz="1600" dirty="0">
                           <a:solidFill>
                             <a:schemeClr val="tx1"/>
                           </a:solidFill>
                         </a:rPr>
                         <a:t>Rise &gt; 50%, or &gt; 15% marrow blasts</a:t>
                       </a:r>
-                      <a:endParaRPr lang="en-US" sz="1500" dirty="0"/>
+                      <a:endParaRPr lang="en-US" sz="1600" dirty="0"/>
                     </a:p>
                   </a:txBody>
                   <a:tcPr marL="25400" marR="101600" marT="63500" marB="63500" anchor="ctr">
@@ -23325,14 +23325,14 @@
                         <a:buNone/>
                       </a:pPr>
                       <a:r>
-                        <a:rPr lang="en-US" sz="1500" dirty="0">
+                        <a:rPr lang="en-US" sz="1600" dirty="0">
                           <a:solidFill>
                             <a:schemeClr val="tx1"/>
                           </a:solidFill>
                         </a:rPr>
                         <a:t>Life-threatening cytopenias</a:t>
                       </a:r>
-                      <a:endParaRPr lang="en-US" sz="1500" dirty="0"/>
+                      <a:endParaRPr lang="en-US" sz="1600" dirty="0"/>
                     </a:p>
                   </a:txBody>
                   <a:tcPr marL="25400" marR="101600" marT="63500" marB="63500" anchor="ctr">
@@ -23365,14 +23365,14 @@
                         <a:buNone/>
                       </a:pPr>
                       <a:r>
-                        <a:rPr lang="en-US" sz="1500" dirty="0">
+                        <a:rPr lang="en-US" sz="1600" dirty="0">
                           <a:solidFill>
                             <a:schemeClr val="tx1"/>
                           </a:solidFill>
                         </a:rPr>
                         <a:t>Trigger for HCT in lower-risk MDS</a:t>
                       </a:r>
-                      <a:endParaRPr lang="en-US" sz="1500" dirty="0"/>
+                      <a:endParaRPr lang="en-US" sz="1600" dirty="0"/>
                     </a:p>
                   </a:txBody>
                   <a:tcPr marL="25400" marR="101600" marT="63500" marB="63500" anchor="ctr">
@@ -23407,14 +23407,14 @@
                         <a:buNone/>
                       </a:pPr>
                       <a:r>
-                        <a:rPr lang="en-US" sz="1500" dirty="0">
+                        <a:rPr lang="en-US" sz="1600" dirty="0">
                           <a:solidFill>
                             <a:schemeClr val="tx1"/>
                           </a:solidFill>
                         </a:rPr>
                         <a:t>High transfusion burden</a:t>
                       </a:r>
-                      <a:endParaRPr lang="en-US" sz="1500" dirty="0"/>
+                      <a:endParaRPr lang="en-US" sz="1600" dirty="0"/>
                     </a:p>
                   </a:txBody>
                   <a:tcPr marL="25400" marR="101600" marT="63500" marB="63500" anchor="ctr">
@@ -23447,14 +23447,14 @@
                         <a:buNone/>
                       </a:pPr>
                       <a:r>
-                        <a:rPr lang="en-US" sz="1500" dirty="0">
+                        <a:rPr lang="en-US" sz="1600" dirty="0">
                           <a:solidFill>
                             <a:schemeClr val="tx1"/>
                           </a:solidFill>
                         </a:rPr>
                         <a:t>&gt; 2 units per month for 6 months</a:t>
                       </a:r>
-                      <a:endParaRPr lang="en-US" sz="1500" dirty="0"/>
+                      <a:endParaRPr lang="en-US" sz="1600" dirty="0"/>
                     </a:p>
                   </a:txBody>
                   <a:tcPr marL="25400" marR="101600" marT="63500" marB="63500" anchor="ctr">
@@ -23489,14 +23489,14 @@
                         <a:buNone/>
                       </a:pPr>
                       <a:r>
-                        <a:rPr lang="en-US" sz="1500" dirty="0">
+                        <a:rPr lang="en-US" sz="1600" dirty="0">
                           <a:solidFill>
                             <a:schemeClr val="tx1"/>
                           </a:solidFill>
                         </a:rPr>
                         <a:t>No adverse karyotype or blast rise</a:t>
                       </a:r>
-                      <a:endParaRPr lang="en-US" sz="1500" dirty="0"/>
+                      <a:endParaRPr lang="en-US" sz="1600" dirty="0"/>
                     </a:p>
                   </a:txBody>
                   <a:tcPr marL="25400" marR="101600" marT="63500" marB="63500" anchor="ctr">
@@ -23529,14 +23529,14 @@
                         <a:buNone/>
                       </a:pPr>
                       <a:r>
-                        <a:rPr lang="en-US" sz="1500" dirty="0">
+                        <a:rPr lang="en-US" sz="1600" dirty="0">
                           <a:solidFill>
                             <a:schemeClr val="tx1"/>
                           </a:solidFill>
                         </a:rPr>
                         <a:t>Consider molecular testing</a:t>
                       </a:r>
-                      <a:endParaRPr lang="en-US" sz="1500" dirty="0"/>
+                      <a:endParaRPr lang="en-US" sz="1600" dirty="0"/>
                     </a:p>
                   </a:txBody>
                   <a:tcPr marL="25400" marR="101600" marT="63500" marB="63500" anchor="ctr">
@@ -23571,28 +23571,28 @@
                         <a:buNone/>
                       </a:pPr>
                       <a:r>
-                        <a:rPr lang="en-US" sz="1500" dirty="0">
+                        <a:rPr lang="en-US" sz="1600" dirty="0">
                           <a:solidFill>
                             <a:schemeClr val="tx1"/>
                           </a:solidFill>
                         </a:rPr>
                         <a:t>Robin 2015; Kröger 2021;</a:t>
                       </a:r>
-                      <a:endParaRPr lang="en-US" sz="1500" dirty="0"/>
-                    </a:p>
-                    <a:p>
-                      <a:pPr indent="0" marL="0">
-                        <a:buNone/>
-                      </a:pPr>
-                      <a:r>
-                        <a:rPr lang="en-US" sz="1500" dirty="0">
+                      <a:endParaRPr lang="en-US" sz="1600" dirty="0"/>
+                    </a:p>
+                    <a:p>
+                      <a:pPr indent="0" marL="0">
+                        <a:buNone/>
+                      </a:pPr>
+                      <a:r>
+                        <a:rPr lang="en-US" sz="1600" dirty="0">
                           <a:solidFill>
                             <a:schemeClr val="tx1"/>
                           </a:solidFill>
                         </a:rPr>
                         <a:t>Nakamura 2021</a:t>
                       </a:r>
-                      <a:endParaRPr lang="en-US" sz="1500" dirty="0"/>
+                      <a:endParaRPr lang="en-US" sz="1600" dirty="0"/>
                     </a:p>
                   </a:txBody>
                   <a:tcPr marL="25400" marR="101600" marT="63500" marB="63500" anchor="ctr">
@@ -23625,28 +23625,28 @@
                         <a:buNone/>
                       </a:pPr>
                       <a:r>
-                        <a:rPr lang="en-US" sz="1500" dirty="0">
-                          <a:solidFill>
-                            <a:schemeClr val="tx1"/>
-                          </a:solidFill>
-                        </a:rPr>
-                        <a:t>Prospective, by donor availability: HR-MDS</a:t>
-                      </a:r>
-                      <a:endParaRPr lang="en-US" sz="1500" dirty="0"/>
-                    </a:p>
-                    <a:p>
-                      <a:pPr indent="0" marL="0">
-                        <a:buNone/>
-                      </a:pPr>
-                      <a:r>
-                        <a:rPr lang="en-US" sz="1500" dirty="0">
-                          <a:solidFill>
-                            <a:schemeClr val="tx1"/>
-                          </a:solidFill>
-                        </a:rPr>
-                        <a:t>with a donor gains life expectancy</a:t>
-                      </a:r>
-                      <a:endParaRPr lang="en-US" sz="1500" dirty="0"/>
+                        <a:rPr lang="en-US" sz="1600" dirty="0">
+                          <a:solidFill>
+                            <a:schemeClr val="tx1"/>
+                          </a:solidFill>
+                        </a:rPr>
+                        <a:t>Donor-availability trials: HR-MDS</a:t>
+                      </a:r>
+                      <a:endParaRPr lang="en-US" sz="1600" dirty="0"/>
+                    </a:p>
+                    <a:p>
+                      <a:pPr indent="0" marL="0">
+                        <a:buNone/>
+                      </a:pPr>
+                      <a:r>
+                        <a:rPr lang="en-US" sz="1600" dirty="0">
+                          <a:solidFill>
+                            <a:schemeClr val="tx1"/>
+                          </a:solidFill>
+                        </a:rPr>
+                        <a:t>with a donor lives longer</a:t>
+                      </a:r>
+                      <a:endParaRPr lang="en-US" sz="1600" dirty="0"/>
                     </a:p>
                   </a:txBody>
                   <a:tcPr marL="25400" marR="101600" marT="63500" marB="63500" anchor="ctr">
@@ -23681,14 +23681,14 @@
                         <a:buNone/>
                       </a:pPr>
                       <a:r>
-                        <a:rPr lang="en-US" sz="1500" dirty="0">
+                        <a:rPr lang="en-US" sz="1600" dirty="0">
                           <a:solidFill>
                             <a:schemeClr val="tx1"/>
                           </a:solidFill>
                         </a:rPr>
                         <a:t>Cutler 2004; Koreth 2013</a:t>
                       </a:r>
-                      <a:endParaRPr lang="en-US" sz="1500" dirty="0"/>
+                      <a:endParaRPr lang="en-US" sz="1600" dirty="0"/>
                     </a:p>
                   </a:txBody>
                   <a:tcPr marL="25400" marR="101600" marT="63500" marB="63500" anchor="ctr">
@@ -23721,14 +23721,14 @@
                         <a:buNone/>
                       </a:pPr>
                       <a:r>
-                        <a:rPr lang="en-US" sz="1500" dirty="0">
+                        <a:rPr lang="en-US" sz="1600" dirty="0">
                           <a:solidFill>
                             <a:schemeClr val="tx1"/>
                           </a:solidFill>
                         </a:rPr>
                         <a:t>LR-MDS: no benefit from upfront HCT</a:t>
                       </a:r>
-                      <a:endParaRPr lang="en-US" sz="1500" dirty="0"/>
+                      <a:endParaRPr lang="en-US" sz="1600" dirty="0"/>
                     </a:p>
                   </a:txBody>
                   <a:tcPr marL="25400" marR="101600" marT="63500" marB="63500" anchor="ctr">
@@ -23763,14 +23763,14 @@
                         <a:buNone/>
                       </a:pPr>
                       <a:r>
-                        <a:rPr lang="en-US" sz="1500" dirty="0">
+                        <a:rPr lang="en-US" sz="1600" dirty="0">
                           <a:solidFill>
                             <a:schemeClr val="tx1"/>
                           </a:solidFill>
                         </a:rPr>
                         <a:t>de Witte 2017; DeFilipp 2023</a:t>
                       </a:r>
-                      <a:endParaRPr lang="en-US" sz="1500" dirty="0"/>
+                      <a:endParaRPr lang="en-US" sz="1600" dirty="0"/>
                     </a:p>
                   </a:txBody>
                   <a:tcPr marL="25400" marR="101600" marT="63500" marB="63500" anchor="ctr">
@@ -23803,28 +23803,28 @@
                         <a:buNone/>
                       </a:pPr>
                       <a:r>
-                        <a:rPr lang="en-US" sz="1500" dirty="0">
-                          <a:solidFill>
-                            <a:schemeClr val="tx1"/>
-                          </a:solidFill>
-                        </a:rPr>
-                        <a:t>HCT for HR-MDS, and LR-MDS with poor-risk</a:t>
-                      </a:r>
-                      <a:endParaRPr lang="en-US" sz="1500" dirty="0"/>
-                    </a:p>
-                    <a:p>
-                      <a:pPr indent="0" marL="0">
-                        <a:buNone/>
-                      </a:pPr>
-                      <a:r>
-                        <a:rPr lang="en-US" sz="1500" dirty="0">
-                          <a:solidFill>
-                            <a:schemeClr val="tx1"/>
-                          </a:solidFill>
-                        </a:rPr>
-                        <a:t>features or treatment failure</a:t>
-                      </a:r>
-                      <a:endParaRPr lang="en-US" sz="1500" dirty="0"/>
+                        <a:rPr lang="en-US" sz="1600" dirty="0">
+                          <a:solidFill>
+                            <a:schemeClr val="tx1"/>
+                          </a:solidFill>
+                        </a:rPr>
+                        <a:t>HCT for HR-MDS; LR-MDS with poor-risk</a:t>
+                      </a:r>
+                      <a:endParaRPr lang="en-US" sz="1600" dirty="0"/>
+                    </a:p>
+                    <a:p>
+                      <a:pPr indent="0" marL="0">
+                        <a:buNone/>
+                      </a:pPr>
+                      <a:r>
+                        <a:rPr lang="en-US" sz="1600" dirty="0">
+                          <a:solidFill>
+                            <a:schemeClr val="tx1"/>
+                          </a:solidFill>
+                        </a:rPr>
+                        <a:t>features or failed therapy</a:t>
+                      </a:r>
+                      <a:endParaRPr lang="en-US" sz="1600" dirty="0"/>
                     </a:p>
                   </a:txBody>
                   <a:tcPr marL="25400" marR="101600" marT="63500" marB="63500" anchor="ctr">
@@ -26375,7 +26375,7 @@
                             <a:schemeClr val="tx1"/>
                           </a:solidFill>
                         </a:rPr>
-                        <a:t>Low/int DRI: lower DFS with RIC</a:t>
+                        <a:t>Low/int DRI: RIC lower DFS (HR 1.19);</a:t>
                       </a:r>
                       <a:endParaRPr lang="en-US" sz="1700" dirty="0"/>
                     </a:p>
@@ -26389,7 +26389,7 @@
                             <a:schemeClr val="tx1"/>
                           </a:solidFill>
                         </a:rPr>
-                        <a:t>(HR 1.19); high/very high: similar</a:t>
+                        <a:t>high/very high: similar</a:t>
                       </a:r>
                       <a:endParaRPr lang="en-US" sz="1700" dirty="0"/>
                     </a:p>
@@ -26812,14 +26812,14 @@
                         <a:buNone/>
                       </a:pPr>
                       <a:r>
-                        <a:rPr lang="en-US" sz="1500" b="1" dirty="0">
+                        <a:rPr lang="en-US" sz="1600" b="1" dirty="0">
                           <a:solidFill>
                             <a:schemeClr val="tx1"/>
                           </a:solidFill>
                         </a:rPr>
                         <a:t>Domain</a:t>
                       </a:r>
-                      <a:endParaRPr lang="en-US" sz="1500" dirty="0"/>
+                      <a:endParaRPr lang="en-US" sz="1600" dirty="0"/>
                     </a:p>
                   </a:txBody>
                   <a:tcPr marL="25400" marR="101600" marT="63500" marB="63500" anchor="ctr">
@@ -26858,14 +26858,14 @@
                         <a:buNone/>
                       </a:pPr>
                       <a:r>
-                        <a:rPr lang="en-US" sz="1500" b="1" dirty="0">
+                        <a:rPr lang="en-US" sz="1600" b="1" dirty="0">
                           <a:solidFill>
                             <a:schemeClr val="tx1"/>
                           </a:solidFill>
                         </a:rPr>
                         <a:t>Finding (Ch. 74)</a:t>
                       </a:r>
-                      <a:endParaRPr lang="en-US" sz="1500" dirty="0"/>
+                      <a:endParaRPr lang="en-US" sz="1600" dirty="0"/>
                     </a:p>
                   </a:txBody>
                   <a:tcPr marL="25400" marR="101600" marT="63500" marB="63500" anchor="ctr">
@@ -26906,14 +26906,14 @@
                         <a:buNone/>
                       </a:pPr>
                       <a:r>
-                        <a:rPr lang="en-US" sz="1500" dirty="0">
+                        <a:rPr lang="en-US" sz="1600" dirty="0">
                           <a:solidFill>
                             <a:schemeClr val="tx1"/>
                           </a:solidFill>
                         </a:rPr>
                         <a:t>Disease</a:t>
                       </a:r>
-                      <a:endParaRPr lang="en-US" sz="1500" dirty="0"/>
+                      <a:endParaRPr lang="en-US" sz="1600" dirty="0"/>
                     </a:p>
                   </a:txBody>
                   <a:tcPr marL="25400" marR="101600" marT="63500" marB="63500" anchor="ctr">
@@ -26946,14 +26946,14 @@
                         <a:buNone/>
                       </a:pPr>
                       <a:r>
-                        <a:rPr lang="en-US" sz="1500" dirty="0">
+                        <a:rPr lang="en-US" sz="1600" dirty="0">
                           <a:solidFill>
                             <a:schemeClr val="tx1"/>
                           </a:solidFill>
                         </a:rPr>
                         <a:t>Poor/very poor karyotype incl. monosomal; HR-MDS</a:t>
                       </a:r>
-                      <a:endParaRPr lang="en-US" sz="1500" dirty="0"/>
+                      <a:endParaRPr lang="en-US" sz="1600" dirty="0"/>
                     </a:p>
                   </a:txBody>
                   <a:tcPr marL="25400" marR="101600" marT="63500" marB="63500" anchor="ctr">
@@ -26988,14 +26988,14 @@
                         <a:buNone/>
                       </a:pPr>
                       <a:r>
-                        <a:rPr lang="en-US" sz="1500" dirty="0">
+                        <a:rPr lang="en-US" sz="1600" dirty="0">
                           <a:solidFill>
                             <a:schemeClr val="tx1"/>
                           </a:solidFill>
                         </a:rPr>
                         <a:t>Mutations (Lindsley 2017)</a:t>
                       </a:r>
-                      <a:endParaRPr lang="en-US" sz="1500" dirty="0"/>
+                      <a:endParaRPr lang="en-US" sz="1600" dirty="0"/>
                     </a:p>
                   </a:txBody>
                   <a:tcPr marL="25400" marR="101600" marT="63500" marB="63500" anchor="ctr">
@@ -27028,14 +27028,14 @@
                         <a:buNone/>
                       </a:pPr>
                       <a:r>
-                        <a:rPr lang="en-US" sz="1500" dirty="0">
+                        <a:rPr lang="en-US" sz="1600" dirty="0">
                           <a:solidFill>
                             <a:schemeClr val="tx1"/>
                           </a:solidFill>
                         </a:rPr>
                         <a:t>Biallelic TP53, ASXL1, RUNX1, RAS pathway</a:t>
                       </a:r>
-                      <a:endParaRPr lang="en-US" sz="1500" dirty="0"/>
+                      <a:endParaRPr lang="en-US" sz="1600" dirty="0"/>
                     </a:p>
                   </a:txBody>
                   <a:tcPr marL="25400" marR="101600" marT="63500" marB="63500" anchor="ctr">
@@ -27070,14 +27070,14 @@
                         <a:buNone/>
                       </a:pPr>
                       <a:r>
-                        <a:rPr lang="en-US" sz="1500" dirty="0">
+                        <a:rPr lang="en-US" sz="1600" dirty="0">
                           <a:solidFill>
                             <a:schemeClr val="tx1"/>
                           </a:solidFill>
                         </a:rPr>
                         <a:t>Patient</a:t>
                       </a:r>
-                      <a:endParaRPr lang="en-US" sz="1500" dirty="0"/>
+                      <a:endParaRPr lang="en-US" sz="1600" dirty="0"/>
                     </a:p>
                   </a:txBody>
                   <a:tcPr marL="25400" marR="101600" marT="63500" marB="63500" anchor="ctr">
@@ -27110,14 +27110,14 @@
                         <a:buNone/>
                       </a:pPr>
                       <a:r>
-                        <a:rPr lang="en-US" sz="1500" dirty="0">
+                        <a:rPr lang="en-US" sz="1600" dirty="0">
                           <a:solidFill>
                             <a:schemeClr val="tx1"/>
                           </a:solidFill>
                         </a:rPr>
                         <a:t>Age; HCT-CI</a:t>
                       </a:r>
-                      <a:endParaRPr lang="en-US" sz="1500" dirty="0"/>
+                      <a:endParaRPr lang="en-US" sz="1600" dirty="0"/>
                     </a:p>
                   </a:txBody>
                   <a:tcPr marL="25400" marR="101600" marT="63500" marB="63500" anchor="ctr">
@@ -27152,14 +27152,14 @@
                         <a:buNone/>
                       </a:pPr>
                       <a:r>
-                        <a:rPr lang="en-US" sz="1500" dirty="0">
+                        <a:rPr lang="en-US" sz="1600" dirty="0">
                           <a:solidFill>
                             <a:schemeClr val="tx1"/>
                           </a:solidFill>
                         </a:rPr>
                         <a:t>EBMT score (Gagelmann 2019)</a:t>
                       </a:r>
-                      <a:endParaRPr lang="en-US" sz="1500" dirty="0"/>
+                      <a:endParaRPr lang="en-US" sz="1600" dirty="0"/>
                     </a:p>
                   </a:txBody>
                   <a:tcPr marL="25400" marR="101600" marT="63500" marB="63500" anchor="ctr">
@@ -27192,28 +27192,28 @@
                         <a:buNone/>
                       </a:pPr>
                       <a:r>
-                        <a:rPr lang="en-US" sz="1500" dirty="0">
+                        <a:rPr lang="en-US" sz="1600" dirty="0">
                           <a:solidFill>
                             <a:schemeClr val="tx1"/>
                           </a:solidFill>
                         </a:rPr>
                         <a:t>Age, donor, PS, karyotype, recipient CMV,</a:t>
                       </a:r>
-                      <a:endParaRPr lang="en-US" sz="1500" dirty="0"/>
-                    </a:p>
-                    <a:p>
-                      <a:pPr indent="0" marL="0">
-                        <a:buNone/>
-                      </a:pPr>
-                      <a:r>
-                        <a:rPr lang="en-US" sz="1500" dirty="0">
+                      <a:endParaRPr lang="en-US" sz="1600" dirty="0"/>
+                    </a:p>
+                    <a:p>
+                      <a:pPr indent="0" marL="0">
+                        <a:buNone/>
+                      </a:pPr>
+                      <a:r>
+                        <a:rPr lang="en-US" sz="1600" dirty="0">
                           <a:solidFill>
                             <a:schemeClr val="tx1"/>
                           </a:solidFill>
                         </a:rPr>
                         <a:t>blasts, platelets</a:t>
                       </a:r>
-                      <a:endParaRPr lang="en-US" sz="1500" dirty="0"/>
+                      <a:endParaRPr lang="en-US" sz="1600" dirty="0"/>
                     </a:p>
                   </a:txBody>
                   <a:tcPr marL="25400" marR="101600" marT="63500" marB="63500" anchor="ctr">
@@ -27248,14 +27248,14 @@
                         <a:buNone/>
                       </a:pPr>
                       <a:r>
-                        <a:rPr lang="en-US" sz="1500" dirty="0">
+                        <a:rPr lang="en-US" sz="1600" dirty="0">
                           <a:solidFill>
                             <a:schemeClr val="tx1"/>
                           </a:solidFill>
                         </a:rPr>
                         <a:t>MSD or MUD</a:t>
                       </a:r>
-                      <a:endParaRPr lang="en-US" sz="1500" dirty="0"/>
+                      <a:endParaRPr lang="en-US" sz="1600" dirty="0"/>
                     </a:p>
                   </a:txBody>
                   <a:tcPr marL="25400" marR="101600" marT="63500" marB="63500" anchor="ctr">
@@ -27288,14 +27288,14 @@
                         <a:buNone/>
                       </a:pPr>
                       <a:r>
-                        <a:rPr lang="en-US" sz="1500" dirty="0">
+                        <a:rPr lang="en-US" sz="1600" dirty="0">
                           <a:solidFill>
                             <a:schemeClr val="tx1"/>
                           </a:solidFill>
                         </a:rPr>
                         <a:t>Both suitable options</a:t>
                       </a:r>
-                      <a:endParaRPr lang="en-US" sz="1500" dirty="0"/>
+                      <a:endParaRPr lang="en-US" sz="1600" dirty="0"/>
                     </a:p>
                   </a:txBody>
                   <a:tcPr marL="25400" marR="101600" marT="63500" marB="63500" anchor="ctr">
@@ -27330,14 +27330,14 @@
                         <a:buNone/>
                       </a:pPr>
                       <a:r>
-                        <a:rPr lang="en-US" sz="1500" dirty="0">
+                        <a:rPr lang="en-US" sz="1600" dirty="0">
                           <a:solidFill>
                             <a:schemeClr val="tx1"/>
                           </a:solidFill>
                         </a:rPr>
                         <a:t>Haploidentical</a:t>
                       </a:r>
-                      <a:endParaRPr lang="en-US" sz="1500" dirty="0"/>
+                      <a:endParaRPr lang="en-US" sz="1600" dirty="0"/>
                     </a:p>
                   </a:txBody>
                   <a:tcPr marL="25400" marR="101600" marT="63500" marB="63500" anchor="ctr">
@@ -27370,14 +27370,14 @@
                         <a:buNone/>
                       </a:pPr>
                       <a:r>
-                        <a:rPr lang="en-US" sz="1500" dirty="0">
+                        <a:rPr lang="en-US" sz="1600" dirty="0">
                           <a:solidFill>
                             <a:schemeClr val="tx1"/>
                           </a:solidFill>
                         </a:rPr>
                         <a:t>Promising, but excess NRM vs matched donors</a:t>
                       </a:r>
-                      <a:endParaRPr lang="en-US" sz="1500" dirty="0"/>
+                      <a:endParaRPr lang="en-US" sz="1600" dirty="0"/>
                     </a:p>
                   </a:txBody>
                   <a:tcPr marL="25400" marR="101600" marT="63500" marB="63500" anchor="ctr">
@@ -27412,14 +27412,14 @@
                         <a:buNone/>
                       </a:pPr>
                       <a:r>
-                        <a:rPr lang="en-US" sz="1500" dirty="0">
+                        <a:rPr lang="en-US" sz="1600" dirty="0">
                           <a:solidFill>
                             <a:schemeClr val="tx1"/>
                           </a:solidFill>
                         </a:rPr>
                         <a:t>Cord blood</a:t>
                       </a:r>
-                      <a:endParaRPr lang="en-US" sz="1500" dirty="0"/>
+                      <a:endParaRPr lang="en-US" sz="1600" dirty="0"/>
                     </a:p>
                   </a:txBody>
                   <a:tcPr marL="25400" marR="101600" marT="63500" marB="63500" anchor="ctr">
@@ -27452,14 +27452,14 @@
                         <a:buNone/>
                       </a:pPr>
                       <a:r>
-                        <a:rPr lang="en-US" sz="1500" dirty="0">
+                        <a:rPr lang="en-US" sz="1600" dirty="0">
                           <a:solidFill>
                             <a:schemeClr val="tx1"/>
                           </a:solidFill>
                         </a:rPr>
                         <a:t>Less used: low cell dose, slow recovery</a:t>
                       </a:r>
-                      <a:endParaRPr lang="en-US" sz="1500" dirty="0"/>
+                      <a:endParaRPr lang="en-US" sz="1600" dirty="0"/>
                     </a:p>
                   </a:txBody>
                   <a:tcPr marL="25400" marR="101600" marT="63500" marB="63500" anchor="ctr">
@@ -27494,28 +27494,28 @@
                         <a:buNone/>
                       </a:pPr>
                       <a:r>
-                        <a:rPr lang="en-US" sz="1500" dirty="0">
+                        <a:rPr lang="en-US" sz="1600" dirty="0">
                           <a:solidFill>
                             <a:schemeClr val="tx1"/>
                           </a:solidFill>
                         </a:rPr>
                         <a:t>Donor age (Kröger 2013;</a:t>
                       </a:r>
-                      <a:endParaRPr lang="en-US" sz="1500" dirty="0"/>
-                    </a:p>
-                    <a:p>
-                      <a:pPr indent="0" marL="0">
-                        <a:buNone/>
-                      </a:pPr>
-                      <a:r>
-                        <a:rPr lang="en-US" sz="1500" dirty="0">
+                      <a:endParaRPr lang="en-US" sz="1600" dirty="0"/>
+                    </a:p>
+                    <a:p>
+                      <a:pPr indent="0" marL="0">
+                        <a:buNone/>
+                      </a:pPr>
+                      <a:r>
+                        <a:rPr lang="en-US" sz="1600" dirty="0">
                           <a:solidFill>
                             <a:schemeClr val="tx1"/>
                           </a:solidFill>
                         </a:rPr>
                         <a:t>Murthy 2022)</a:t>
                       </a:r>
-                      <a:endParaRPr lang="en-US" sz="1500" dirty="0"/>
+                      <a:endParaRPr lang="en-US" sz="1600" dirty="0"/>
                     </a:p>
                   </a:txBody>
                   <a:tcPr marL="25400" marR="101600" marT="63500" marB="63500" anchor="ctr">
@@ -27548,14 +27548,14 @@
                         <a:buNone/>
                       </a:pPr>
                       <a:r>
-                        <a:rPr lang="en-US" sz="1500" dirty="0">
+                        <a:rPr lang="en-US" sz="1600" dirty="0">
                           <a:solidFill>
                             <a:schemeClr val="tx1"/>
                           </a:solidFill>
                         </a:rPr>
                         <a:t>Younger donors preferred</a:t>
                       </a:r>
-                      <a:endParaRPr lang="en-US" sz="1500" dirty="0"/>
+                      <a:endParaRPr lang="en-US" sz="1600" dirty="0"/>
                     </a:p>
                   </a:txBody>
                   <a:tcPr marL="25400" marR="101600" marT="63500" marB="63500" anchor="ctr">

--- a/slides/decks/s23-mds-mds-mpn.pptx
+++ b/slides/decks/s23-mds-mds-mpn.pptx
@@ -136,13 +136,13 @@
   <p:extLst>
     <p:ext uri="{521415D9-36F7-43E2-AB2F-B90AF26B5E84}">
       <p14:sectionLst xmlns:p14="http://schemas.microsoft.com/office/powerpoint/2010/main">
-        <p14:section name="Opening" id="{af6ecc9a-7612-f413-11a3-9d9f88a9fe47}">
+        <p14:section name="Opening" id="{bbd5c9d1-0a84-4f00-d6e0-5dba3267c084}">
           <p14:sldIdLst>
             <p14:sldId id="256"/>
             <p14:sldId id="257"/>
           </p14:sldIdLst>
         </p14:section>
-        <p14:section name="MDS" id="{81fa711c-9ee2-c5dd-5d5f-ecf6bd5a6e29}">
+        <p14:section name="MDS" id="{a10e9b72-016a-615b-aca3-9e8b64054eb3}">
           <p14:sldIdLst>
             <p14:sldId id="258"/>
             <p14:sldId id="259"/>
@@ -154,7 +154,7 @@
             <p14:sldId id="265"/>
           </p14:sldIdLst>
         </p14:section>
-        <p14:section name="MDS/MPN" id="{d23dffaa-739c-b19d-9bd3-04de136e4028}">
+        <p14:section name="MDS/MPN" id="{4fce9cdc-36e9-a8a1-dcac-ee46cb46e750}">
           <p14:sldIdLst>
             <p14:sldId id="266"/>
             <p14:sldId id="267"/>
@@ -164,7 +164,7 @@
             <p14:sldId id="271"/>
           </p14:sldIdLst>
         </p14:section>
-        <p14:section name="Board questions" id="{24ee9cdc-7f7f-9a6e-d11d-5f708a0c694b}">
+        <p14:section name="Board questions" id="{9ab88bef-e0ae-8238-9758-311eb94d0062}">
           <p14:sldIdLst>
             <p14:sldId id="272"/>
             <p14:sldId id="273"/>
@@ -174,7 +174,7 @@
             <p14:sldId id="277"/>
           </p14:sldIdLst>
         </p14:section>
-        <p14:section name="References" id="{0e34c627-1a89-4f1a-c241-19ed67ade465}">
+        <p14:section name="References" id="{ff100a29-0880-71b6-15ab-8b52ae6e0c9d}">
           <p14:sldIdLst>
             <p14:sldId id="278"/>
             <p14:sldId id="279"/>
@@ -183,7 +183,7 @@
             <p14:sldId id="282"/>
           </p14:sldIdLst>
         </p14:section>
-        <p14:section name="Backup" id="{e347709f-891a-464a-35aa-6c58073c4d58}">
+        <p14:section name="Backup" id="{7d8fe0f9-2eb0-c0ba-f8c7-b9f276d1c542}">
           <p14:sldIdLst>
             <p14:sldId id="283"/>
             <p14:sldId id="284"/>
@@ -21571,7 +21571,7 @@
         </p:nvSpPr>
         <p:spPr>
           <a:xfrm>
-            <a:off x="685800" y="4343400"/>
+            <a:off x="685800" y="4572000"/>
             <a:ext cx="10817352" cy="411480"/>
           </a:xfrm>
           <a:prstGeom prst="rect">
@@ -21593,7 +21593,7 @@
                   <a:schemeClr val="tx1"/>
                 </a:solidFill>
               </a:rPr>
-              <a:t>Pre-HCT azacitidine; BU/CY/MEL, BM graft · relapse risk: age ≥ 2 y, HbF ≥ 15%, secondary mutations, high methylation</a:t>
+              <a:t>Relapse risk: age ≥ 2 y, HbF ≥ 15%, secondary mutations, high DNA methylation</a:t>
             </a:r>
             <a:endParaRPr lang="en-US" sz="1600" dirty="0"/>
           </a:p>

--- a/slides/decks/s23-mds-mds-mpn.pptx
+++ b/slides/decks/s23-mds-mds-mpn.pptx
@@ -136,13 +136,13 @@
   <p:extLst>
     <p:ext uri="{521415D9-36F7-43E2-AB2F-B90AF26B5E84}">
       <p14:sectionLst xmlns:p14="http://schemas.microsoft.com/office/powerpoint/2010/main">
-        <p14:section name="Opening" id="{bbd5c9d1-0a84-4f00-d6e0-5dba3267c084}">
+        <p14:section name="Opening" id="{48787dfc-26b5-cc16-bc63-c68119666c6b}">
           <p14:sldIdLst>
             <p14:sldId id="256"/>
             <p14:sldId id="257"/>
           </p14:sldIdLst>
         </p14:section>
-        <p14:section name="MDS" id="{a10e9b72-016a-615b-aca3-9e8b64054eb3}">
+        <p14:section name="MDS" id="{3e84ab46-4e17-5d74-a141-d6779d875a3f}">
           <p14:sldIdLst>
             <p14:sldId id="258"/>
             <p14:sldId id="259"/>
@@ -154,7 +154,7 @@
             <p14:sldId id="265"/>
           </p14:sldIdLst>
         </p14:section>
-        <p14:section name="MDS/MPN" id="{4fce9cdc-36e9-a8a1-dcac-ee46cb46e750}">
+        <p14:section name="MDS/MPN" id="{5096424e-f03f-1c24-823c-bc92aa706090}">
           <p14:sldIdLst>
             <p14:sldId id="266"/>
             <p14:sldId id="267"/>
@@ -164,7 +164,7 @@
             <p14:sldId id="271"/>
           </p14:sldIdLst>
         </p14:section>
-        <p14:section name="Board questions" id="{9ab88bef-e0ae-8238-9758-311eb94d0062}">
+        <p14:section name="Board questions" id="{19f1ce95-98bd-14ea-b2d9-e19c950560f0}">
           <p14:sldIdLst>
             <p14:sldId id="272"/>
             <p14:sldId id="273"/>
@@ -174,7 +174,7 @@
             <p14:sldId id="277"/>
           </p14:sldIdLst>
         </p14:section>
-        <p14:section name="References" id="{ff100a29-0880-71b6-15ab-8b52ae6e0c9d}">
+        <p14:section name="References" id="{513a3a7e-541c-bf96-ce85-2d868fd9c486}">
           <p14:sldIdLst>
             <p14:sldId id="278"/>
             <p14:sldId id="279"/>
@@ -183,7 +183,7 @@
             <p14:sldId id="282"/>
           </p14:sldIdLst>
         </p14:section>
-        <p14:section name="Backup" id="{7d8fe0f9-2eb0-c0ba-f8c7-b9f276d1c542}">
+        <p14:section name="Backup" id="{351db643-c156-c94b-a4d8-f670e6a93ae3}">
           <p14:sldIdLst>
             <p14:sldId id="283"/>
             <p14:sldId id="284"/>
@@ -19571,14 +19571,14 @@
                         <a:buNone/>
                       </a:pPr>
                       <a:r>
-                        <a:rPr lang="en-US" sz="1600" b="1" dirty="0">
+                        <a:rPr lang="en-US" sz="1500" b="1" dirty="0">
                           <a:solidFill>
                             <a:schemeClr val="tx1"/>
                           </a:solidFill>
                         </a:rPr>
                         <a:t>Variable</a:t>
                       </a:r>
-                      <a:endParaRPr lang="en-US" sz="1600" dirty="0"/>
+                      <a:endParaRPr lang="en-US" sz="1500" dirty="0"/>
                     </a:p>
                   </a:txBody>
                   <a:tcPr marL="25400" marR="101600" marT="63500" marB="63500" anchor="ctr">
@@ -19617,14 +19617,14 @@
                         <a:buNone/>
                       </a:pPr>
                       <a:r>
-                        <a:rPr lang="en-US" sz="1600" b="1" dirty="0">
+                        <a:rPr lang="en-US" sz="1500" b="1" dirty="0">
                           <a:solidFill>
                             <a:schemeClr val="tx1"/>
                           </a:solidFill>
                         </a:rPr>
                         <a:t>Categories and points</a:t>
                       </a:r>
-                      <a:endParaRPr lang="en-US" sz="1600" dirty="0"/>
+                      <a:endParaRPr lang="en-US" sz="1500" dirty="0"/>
                     </a:p>
                   </a:txBody>
                   <a:tcPr marL="25400" marR="101600" marT="63500" marB="63500" anchor="ctr">
@@ -19665,14 +19665,14 @@
                         <a:buNone/>
                       </a:pPr>
                       <a:r>
-                        <a:rPr lang="en-US" sz="1600" dirty="0">
+                        <a:rPr lang="en-US" sz="1500" dirty="0">
                           <a:solidFill>
                             <a:schemeClr val="tx1"/>
                           </a:solidFill>
                         </a:rPr>
                         <a:t>Marrow blasts</a:t>
                       </a:r>
-                      <a:endParaRPr lang="en-US" sz="1600" dirty="0"/>
+                      <a:endParaRPr lang="en-US" sz="1500" dirty="0"/>
                     </a:p>
                   </a:txBody>
                   <a:tcPr marL="25400" marR="101600" marT="63500" marB="63500" anchor="ctr">
@@ -19705,14 +19705,14 @@
                         <a:buNone/>
                       </a:pPr>
                       <a:r>
-                        <a:rPr lang="en-US" sz="1600" dirty="0">
+                        <a:rPr lang="en-US" sz="1500" dirty="0">
                           <a:solidFill>
                             <a:schemeClr val="tx1"/>
                           </a:solidFill>
                         </a:rPr>
                         <a:t>&lt; 3% [0]; 3–4% [1]; 5–10% [2]; &gt; 10% [3]</a:t>
                       </a:r>
-                      <a:endParaRPr lang="en-US" sz="1600" dirty="0"/>
+                      <a:endParaRPr lang="en-US" sz="1500" dirty="0"/>
                     </a:p>
                   </a:txBody>
                   <a:tcPr marL="25400" marR="101600" marT="63500" marB="63500" anchor="ctr">
@@ -19747,14 +19747,14 @@
                         <a:buNone/>
                       </a:pPr>
                       <a:r>
-                        <a:rPr lang="en-US" sz="1600" dirty="0">
+                        <a:rPr lang="en-US" sz="1500" dirty="0">
                           <a:solidFill>
                             <a:schemeClr val="tx1"/>
                           </a:solidFill>
                         </a:rPr>
                         <a:t>Karyotype</a:t>
                       </a:r>
-                      <a:endParaRPr lang="en-US" sz="1600" dirty="0"/>
+                      <a:endParaRPr lang="en-US" sz="1500" dirty="0"/>
                     </a:p>
                   </a:txBody>
                   <a:tcPr marL="25400" marR="101600" marT="63500" marB="63500" anchor="ctr">
@@ -19787,14 +19787,14 @@
                         <a:buNone/>
                       </a:pPr>
                       <a:r>
-                        <a:rPr lang="en-US" sz="1600" dirty="0">
+                        <a:rPr lang="en-US" sz="1500" dirty="0">
                           <a:solidFill>
                             <a:schemeClr val="tx1"/>
                           </a:solidFill>
                         </a:rPr>
                         <a:t>Very good [0]; good [1]; int [2]; poor [3]; very poor [4]</a:t>
                       </a:r>
-                      <a:endParaRPr lang="en-US" sz="1600" dirty="0"/>
+                      <a:endParaRPr lang="en-US" sz="1500" dirty="0"/>
                     </a:p>
                   </a:txBody>
                   <a:tcPr marL="25400" marR="101600" marT="63500" marB="63500" anchor="ctr">
@@ -19829,14 +19829,14 @@
                         <a:buNone/>
                       </a:pPr>
                       <a:r>
-                        <a:rPr lang="en-US" sz="1600" dirty="0">
+                        <a:rPr lang="en-US" sz="1500" dirty="0">
                           <a:solidFill>
                             <a:schemeClr val="tx1"/>
                           </a:solidFill>
                         </a:rPr>
                         <a:t>Cytopenia</a:t>
                       </a:r>
-                      <a:endParaRPr lang="en-US" sz="1600" dirty="0"/>
+                      <a:endParaRPr lang="en-US" sz="1500" dirty="0"/>
                     </a:p>
                   </a:txBody>
                   <a:tcPr marL="25400" marR="101600" marT="63500" marB="63500" anchor="ctr">
@@ -19869,14 +19869,14 @@
                         <a:buNone/>
                       </a:pPr>
                       <a:r>
-                        <a:rPr lang="en-US" sz="1600" dirty="0">
+                        <a:rPr lang="en-US" sz="1500" dirty="0">
                           <a:solidFill>
                             <a:schemeClr val="tx1"/>
                           </a:solidFill>
                         </a:rPr>
                         <a:t>None [0]; mild [0.5]; moderate [1]; severe anaemia [1.5]</a:t>
                       </a:r>
-                      <a:endParaRPr lang="en-US" sz="1600" dirty="0"/>
+                      <a:endParaRPr lang="en-US" sz="1500" dirty="0"/>
                     </a:p>
                   </a:txBody>
                   <a:tcPr marL="25400" marR="101600" marT="63500" marB="63500" anchor="ctr">
@@ -19911,14 +19911,14 @@
                         <a:buNone/>
                       </a:pPr>
                       <a:r>
-                        <a:rPr lang="en-US" sz="1600" dirty="0">
+                        <a:rPr lang="en-US" sz="1500" dirty="0">
                           <a:solidFill>
                             <a:schemeClr val="tx1"/>
                           </a:solidFill>
                         </a:rPr>
                         <a:t>  Very good karyotype</a:t>
                       </a:r>
-                      <a:endParaRPr lang="en-US" sz="1600" dirty="0"/>
+                      <a:endParaRPr lang="en-US" sz="1500" dirty="0"/>
                     </a:p>
                   </a:txBody>
                   <a:tcPr marL="25400" marR="101600" marT="63500" marB="63500" anchor="ctr">
@@ -19951,14 +19951,14 @@
                         <a:buNone/>
                       </a:pPr>
                       <a:r>
-                        <a:rPr lang="en-US" sz="1600" dirty="0">
+                        <a:rPr lang="en-US" sz="1500" dirty="0">
                           <a:solidFill>
                             <a:schemeClr val="tx1"/>
                           </a:solidFill>
                         </a:rPr>
                         <a:t>−Y, del(11q)</a:t>
                       </a:r>
-                      <a:endParaRPr lang="en-US" sz="1600" dirty="0"/>
+                      <a:endParaRPr lang="en-US" sz="1500" dirty="0"/>
                     </a:p>
                   </a:txBody>
                   <a:tcPr marL="25400" marR="101600" marT="63500" marB="63500" anchor="ctr">
@@ -19993,14 +19993,14 @@
                         <a:buNone/>
                       </a:pPr>
                       <a:r>
-                        <a:rPr lang="en-US" sz="1600" dirty="0">
+                        <a:rPr lang="en-US" sz="1500" dirty="0">
                           <a:solidFill>
                             <a:schemeClr val="tx1"/>
                           </a:solidFill>
                         </a:rPr>
                         <a:t>  Good karyotype</a:t>
                       </a:r>
-                      <a:endParaRPr lang="en-US" sz="1600" dirty="0"/>
+                      <a:endParaRPr lang="en-US" sz="1500" dirty="0"/>
                     </a:p>
                   </a:txBody>
                   <a:tcPr marL="25400" marR="101600" marT="63500" marB="63500" anchor="ctr">
@@ -20033,14 +20033,14 @@
                         <a:buNone/>
                       </a:pPr>
                       <a:r>
-                        <a:rPr lang="en-US" sz="1600" dirty="0">
+                        <a:rPr lang="en-US" sz="1500" dirty="0">
                           <a:solidFill>
                             <a:schemeClr val="tx1"/>
                           </a:solidFill>
                         </a:rPr>
                         <a:t>Normal, del(5q), del(12p), del(20q), double incl. del(5q)</a:t>
                       </a:r>
-                      <a:endParaRPr lang="en-US" sz="1600" dirty="0"/>
+                      <a:endParaRPr lang="en-US" sz="1500" dirty="0"/>
                     </a:p>
                   </a:txBody>
                   <a:tcPr marL="25400" marR="101600" marT="63500" marB="63500" anchor="ctr">
@@ -20075,14 +20075,14 @@
                         <a:buNone/>
                       </a:pPr>
                       <a:r>
-                        <a:rPr lang="en-US" sz="1600" dirty="0">
+                        <a:rPr lang="en-US" sz="1500" dirty="0">
                           <a:solidFill>
                             <a:schemeClr val="tx1"/>
                           </a:solidFill>
                         </a:rPr>
                         <a:t>  Intermediate karyotype</a:t>
                       </a:r>
-                      <a:endParaRPr lang="en-US" sz="1600" dirty="0"/>
+                      <a:endParaRPr lang="en-US" sz="1500" dirty="0"/>
                     </a:p>
                   </a:txBody>
                   <a:tcPr marL="25400" marR="101600" marT="63500" marB="63500" anchor="ctr">
@@ -20115,14 +20115,14 @@
                         <a:buNone/>
                       </a:pPr>
                       <a:r>
-                        <a:rPr lang="en-US" sz="1600" dirty="0">
+                        <a:rPr lang="en-US" sz="1500" dirty="0">
                           <a:solidFill>
                             <a:schemeClr val="tx1"/>
                           </a:solidFill>
                         </a:rPr>
                         <a:t>del(7q), −8, −19, i(17q), any other single or double clone</a:t>
                       </a:r>
-                      <a:endParaRPr lang="en-US" sz="1600" dirty="0"/>
+                      <a:endParaRPr lang="en-US" sz="1500" dirty="0"/>
                     </a:p>
                   </a:txBody>
                   <a:tcPr marL="25400" marR="101600" marT="63500" marB="63500" anchor="ctr">
@@ -20157,14 +20157,14 @@
                         <a:buNone/>
                       </a:pPr>
                       <a:r>
-                        <a:rPr lang="en-US" sz="1600" dirty="0">
+                        <a:rPr lang="en-US" sz="1500" dirty="0">
                           <a:solidFill>
                             <a:schemeClr val="tx1"/>
                           </a:solidFill>
                         </a:rPr>
                         <a:t>  Poor karyotype</a:t>
                       </a:r>
-                      <a:endParaRPr lang="en-US" sz="1600" dirty="0"/>
+                      <a:endParaRPr lang="en-US" sz="1500" dirty="0"/>
                     </a:p>
                   </a:txBody>
                   <a:tcPr marL="25400" marR="101600" marT="63500" marB="63500" anchor="ctr">
@@ -20197,14 +20197,14 @@
                         <a:buNone/>
                       </a:pPr>
                       <a:r>
-                        <a:rPr lang="en-US" sz="1600" dirty="0">
+                        <a:rPr lang="en-US" sz="1500" dirty="0">
                           <a:solidFill>
                             <a:schemeClr val="tx1"/>
                           </a:solidFill>
                         </a:rPr>
                         <a:t>−7, inv(3)/t(3q)/del(3q), double incl. −7/del(7q), 3 abn.</a:t>
                       </a:r>
-                      <a:endParaRPr lang="en-US" sz="1600" dirty="0"/>
+                      <a:endParaRPr lang="en-US" sz="1500" dirty="0"/>
                     </a:p>
                   </a:txBody>
                   <a:tcPr marL="25400" marR="101600" marT="63500" marB="63500" anchor="ctr">
@@ -20239,14 +20239,14 @@
                         <a:buNone/>
                       </a:pPr>
                       <a:r>
-                        <a:rPr lang="en-US" sz="1600" dirty="0">
+                        <a:rPr lang="en-US" sz="1500" dirty="0">
                           <a:solidFill>
                             <a:schemeClr val="tx1"/>
                           </a:solidFill>
                         </a:rPr>
                         <a:t>  Very poor karyotype</a:t>
                       </a:r>
-                      <a:endParaRPr lang="en-US" sz="1600" dirty="0"/>
+                      <a:endParaRPr lang="en-US" sz="1500" dirty="0"/>
                     </a:p>
                   </a:txBody>
                   <a:tcPr marL="25400" marR="101600" marT="63500" marB="63500" anchor="ctr">
@@ -20279,14 +20279,14 @@
                         <a:buNone/>
                       </a:pPr>
                       <a:r>
-                        <a:rPr lang="en-US" sz="1600" dirty="0">
+                        <a:rPr lang="en-US" sz="1500" dirty="0">
                           <a:solidFill>
                             <a:schemeClr val="tx1"/>
                           </a:solidFill>
                         </a:rPr>
                         <a:t>Complex, &gt; 3 abnormalities</a:t>
                       </a:r>
-                      <a:endParaRPr lang="en-US" sz="1600" dirty="0"/>
+                      <a:endParaRPr lang="en-US" sz="1500" dirty="0"/>
                     </a:p>
                   </a:txBody>
                   <a:tcPr marL="25400" marR="101600" marT="63500" marB="63500" anchor="ctr">

--- a/slides/decks/s23-mds-mds-mpn.pptx
+++ b/slides/decks/s23-mds-mds-mpn.pptx
@@ -136,13 +136,13 @@
   <p:extLst>
     <p:ext uri="{521415D9-36F7-43E2-AB2F-B90AF26B5E84}">
       <p14:sectionLst xmlns:p14="http://schemas.microsoft.com/office/powerpoint/2010/main">
-        <p14:section name="Opening" id="{48787dfc-26b5-cc16-bc63-c68119666c6b}">
+        <p14:section name="Opening" id="{41916fdd-1f2a-8ce1-6e17-a2d0f1cb14e3}">
           <p14:sldIdLst>
             <p14:sldId id="256"/>
             <p14:sldId id="257"/>
           </p14:sldIdLst>
         </p14:section>
-        <p14:section name="MDS" id="{3e84ab46-4e17-5d74-a141-d6779d875a3f}">
+        <p14:section name="MDS" id="{0777c5d5-014b-4e5e-d637-7655e722a0c1}">
           <p14:sldIdLst>
             <p14:sldId id="258"/>
             <p14:sldId id="259"/>
@@ -154,7 +154,7 @@
             <p14:sldId id="265"/>
           </p14:sldIdLst>
         </p14:section>
-        <p14:section name="MDS/MPN" id="{5096424e-f03f-1c24-823c-bc92aa706090}">
+        <p14:section name="MDS/MPN" id="{7f5934f0-0ae4-2741-167e-bf3af4b54466}">
           <p14:sldIdLst>
             <p14:sldId id="266"/>
             <p14:sldId id="267"/>
@@ -164,7 +164,7 @@
             <p14:sldId id="271"/>
           </p14:sldIdLst>
         </p14:section>
-        <p14:section name="Board questions" id="{19f1ce95-98bd-14ea-b2d9-e19c950560f0}">
+        <p14:section name="Board questions" id="{dde73cf9-0fa7-860a-220b-35897606e373}">
           <p14:sldIdLst>
             <p14:sldId id="272"/>
             <p14:sldId id="273"/>
@@ -174,7 +174,7 @@
             <p14:sldId id="277"/>
           </p14:sldIdLst>
         </p14:section>
-        <p14:section name="References" id="{513a3a7e-541c-bf96-ce85-2d868fd9c486}">
+        <p14:section name="References" id="{5e25547b-69c4-f5e1-63ce-49e891059437}">
           <p14:sldIdLst>
             <p14:sldId id="278"/>
             <p14:sldId id="279"/>
@@ -183,7 +183,7 @@
             <p14:sldId id="282"/>
           </p14:sldIdLst>
         </p14:section>
-        <p14:section name="Backup" id="{351db643-c156-c94b-a4d8-f670e6a93ae3}">
+        <p14:section name="Backup" id="{0ee0a192-5fce-b4b2-459c-6047f9f44f4b}">
           <p14:sldIdLst>
             <p14:sldId id="283"/>
             <p14:sldId id="284"/>

--- a/slides/decks/s23-mds-mds-mpn.pptx
+++ b/slides/decks/s23-mds-mds-mpn.pptx
@@ -136,13 +136,13 @@
   <p:extLst>
     <p:ext uri="{521415D9-36F7-43E2-AB2F-B90AF26B5E84}">
       <p14:sectionLst xmlns:p14="http://schemas.microsoft.com/office/powerpoint/2010/main">
-        <p14:section name="Opening" id="{41916fdd-1f2a-8ce1-6e17-a2d0f1cb14e3}">
+        <p14:section name="Opening" id="{e4c593dc-c8af-09c3-4538-3617b233051f}">
           <p14:sldIdLst>
             <p14:sldId id="256"/>
             <p14:sldId id="257"/>
           </p14:sldIdLst>
         </p14:section>
-        <p14:section name="MDS" id="{0777c5d5-014b-4e5e-d637-7655e722a0c1}">
+        <p14:section name="MDS" id="{f559457d-7456-2079-290f-f7b994208bc4}">
           <p14:sldIdLst>
             <p14:sldId id="258"/>
             <p14:sldId id="259"/>
@@ -154,7 +154,7 @@
             <p14:sldId id="265"/>
           </p14:sldIdLst>
         </p14:section>
-        <p14:section name="MDS/MPN" id="{7f5934f0-0ae4-2741-167e-bf3af4b54466}">
+        <p14:section name="MDS/MPN" id="{78ee7b7e-9944-cf0e-e3a1-dd82cef1ca54}">
           <p14:sldIdLst>
             <p14:sldId id="266"/>
             <p14:sldId id="267"/>
@@ -164,7 +164,7 @@
             <p14:sldId id="271"/>
           </p14:sldIdLst>
         </p14:section>
-        <p14:section name="Board questions" id="{dde73cf9-0fa7-860a-220b-35897606e373}">
+        <p14:section name="Board questions" id="{b87f4ea1-d2b0-12ab-bce4-857984cc4518}">
           <p14:sldIdLst>
             <p14:sldId id="272"/>
             <p14:sldId id="273"/>
@@ -174,7 +174,7 @@
             <p14:sldId id="277"/>
           </p14:sldIdLst>
         </p14:section>
-        <p14:section name="References" id="{5e25547b-69c4-f5e1-63ce-49e891059437}">
+        <p14:section name="References" id="{2188079d-7e43-0aba-aeb8-e3a4aff3ade0}">
           <p14:sldIdLst>
             <p14:sldId id="278"/>
             <p14:sldId id="279"/>
@@ -183,7 +183,7 @@
             <p14:sldId id="282"/>
           </p14:sldIdLst>
         </p14:section>
-        <p14:section name="Backup" id="{0ee0a192-5fce-b4b2-459c-6047f9f44f4b}">
+        <p14:section name="Backup" id="{2a239c2e-4bf8-ed2d-ae63-b00d481065b0}">
           <p14:sldIdLst>
             <p14:sldId id="283"/>
             <p14:sldId id="284"/>
